--- a/index/designs/y8-l15/l6-my-neighbourhood/l6-my-neighbourhood.pptx
+++ b/index/designs/y8-l15/l6-my-neighbourhood/l6-my-neighbourhood.pptx
@@ -30,9 +30,12 @@
     <p:sldId id="278" r:id="rId24"/>
     <p:sldId id="279" r:id="rId25"/>
     <p:sldId id="280" r:id="rId26"/>
+    <p:sldId id="281" r:id="rId27"/>
+    <p:sldId id="282" r:id="rId28"/>
+    <p:sldId id="283" r:id="rId29"/>
   </p:sldIdLst>
   <p:notesMasterIdLst>
-    <p:notesMasterId r:id="rId27"/>
+    <p:notesMasterId r:id="rId30"/>
   </p:notesMasterIdLst>
   <p:sldSz cx="12192000" cy="6858000"/>
   <p:notesSz cx="6858000" cy="12192000"/>
@@ -2046,6 +2049,270 @@
             <a:fld id="{F7021451-1387-4CA6-816F-3879F97B5CBC}" type="slidenum">
               <a:rPr lang="en-US"/>
               <a:t>25</a:t>
+            </a:fld>
+            <a:endParaRPr lang="en-US"/>
+          </a:p>
+        </p:txBody>
+      </p:sp>
+    </p:spTree>
+    <p:extLst>
+      <p:ext uri="{BB962C8B-B14F-4D97-AF65-F5344CB8AC3E}">
+        <p14:creationId xmlns:p14="http://schemas.microsoft.com/office/powerpoint/2010/main" val="1024086991"/>
+      </p:ext>
+    </p:extLst>
+  </p:cSld>
+  <p:clrMapOvr>
+    <a:masterClrMapping/>
+  </p:clrMapOvr>
+</p:notes>
+</file>
+
+<file path=ppt/notesSlides/notesSlide26.xml><?xml version="1.0" encoding="utf-8"?>
+<p:notes xmlns:a="http://schemas.openxmlformats.org/drawingml/2006/main" xmlns:r="http://schemas.openxmlformats.org/officeDocument/2006/relationships" xmlns:p="http://schemas.openxmlformats.org/presentationml/2006/main">
+  <p:cSld>
+    <p:spTree>
+      <p:nvGrpSpPr>
+        <p:cNvPr id="1" name=""/>
+        <p:cNvGrpSpPr/>
+        <p:nvPr/>
+      </p:nvGrpSpPr>
+      <p:grpSpPr>
+        <a:xfrm>
+          <a:off x="0" y="0"/>
+          <a:ext cx="0" cy="0"/>
+          <a:chOff x="0" y="0"/>
+          <a:chExt cx="0" cy="0"/>
+        </a:xfrm>
+      </p:grpSpPr>
+      <p:sp>
+        <p:nvSpPr>
+          <p:cNvPr id="2" name="Slide Image Placeholder 1"/>
+          <p:cNvSpPr>
+            <a:spLocks noGrp="1" noRot="1" noChangeAspect="1"/>
+          </p:cNvSpPr>
+          <p:nvPr>
+            <p:ph type="sldImg"/>
+          </p:nvPr>
+        </p:nvSpPr>
+        <p:spPr/>
+      </p:sp>
+      <p:sp>
+        <p:nvSpPr>
+          <p:cNvPr id="3" name="Notes Placeholder 2"/>
+          <p:cNvSpPr>
+            <a:spLocks noGrp="1"/>
+          </p:cNvSpPr>
+          <p:nvPr>
+            <p:ph type="body" idx="1"/>
+          </p:nvPr>
+        </p:nvSpPr>
+        <p:spPr/>
+        <p:txBody>
+          <a:bodyPr/>
+          <a:lstStyle/>
+          <a:p>
+            <a:r>
+              <a:rPr lang="en-US" dirty="0"/>
+              <a:t/>
+            </a:r>
+            <a:endParaRPr lang="en-US" dirty="0"/>
+          </a:p>
+        </p:txBody>
+      </p:sp>
+      <p:sp>
+        <p:nvSpPr>
+          <p:cNvPr id="4" name="Slide Number Placeholder 3"/>
+          <p:cNvSpPr>
+            <a:spLocks noGrp="1"/>
+          </p:cNvSpPr>
+          <p:nvPr>
+            <p:ph type="sldNum" sz="quarter" idx="10"/>
+          </p:nvPr>
+        </p:nvSpPr>
+        <p:spPr/>
+        <p:txBody>
+          <a:bodyPr/>
+          <a:lstStyle/>
+          <a:p>
+            <a:fld id="{F7021451-1387-4CA6-816F-3879F97B5CBC}" type="slidenum">
+              <a:rPr lang="en-US"/>
+              <a:t>26</a:t>
+            </a:fld>
+            <a:endParaRPr lang="en-US"/>
+          </a:p>
+        </p:txBody>
+      </p:sp>
+    </p:spTree>
+    <p:extLst>
+      <p:ext uri="{BB962C8B-B14F-4D97-AF65-F5344CB8AC3E}">
+        <p14:creationId xmlns:p14="http://schemas.microsoft.com/office/powerpoint/2010/main" val="1024086991"/>
+      </p:ext>
+    </p:extLst>
+  </p:cSld>
+  <p:clrMapOvr>
+    <a:masterClrMapping/>
+  </p:clrMapOvr>
+</p:notes>
+</file>
+
+<file path=ppt/notesSlides/notesSlide27.xml><?xml version="1.0" encoding="utf-8"?>
+<p:notes xmlns:a="http://schemas.openxmlformats.org/drawingml/2006/main" xmlns:r="http://schemas.openxmlformats.org/officeDocument/2006/relationships" xmlns:p="http://schemas.openxmlformats.org/presentationml/2006/main">
+  <p:cSld>
+    <p:spTree>
+      <p:nvGrpSpPr>
+        <p:cNvPr id="1" name=""/>
+        <p:cNvGrpSpPr/>
+        <p:nvPr/>
+      </p:nvGrpSpPr>
+      <p:grpSpPr>
+        <a:xfrm>
+          <a:off x="0" y="0"/>
+          <a:ext cx="0" cy="0"/>
+          <a:chOff x="0" y="0"/>
+          <a:chExt cx="0" cy="0"/>
+        </a:xfrm>
+      </p:grpSpPr>
+      <p:sp>
+        <p:nvSpPr>
+          <p:cNvPr id="2" name="Slide Image Placeholder 1"/>
+          <p:cNvSpPr>
+            <a:spLocks noGrp="1" noRot="1" noChangeAspect="1"/>
+          </p:cNvSpPr>
+          <p:nvPr>
+            <p:ph type="sldImg"/>
+          </p:nvPr>
+        </p:nvSpPr>
+        <p:spPr/>
+      </p:sp>
+      <p:sp>
+        <p:nvSpPr>
+          <p:cNvPr id="3" name="Notes Placeholder 2"/>
+          <p:cNvSpPr>
+            <a:spLocks noGrp="1"/>
+          </p:cNvSpPr>
+          <p:nvPr>
+            <p:ph type="body" idx="1"/>
+          </p:nvPr>
+        </p:nvSpPr>
+        <p:spPr/>
+        <p:txBody>
+          <a:bodyPr/>
+          <a:lstStyle/>
+          <a:p>
+            <a:r>
+              <a:rPr lang="en-US" dirty="0"/>
+              <a:t/>
+            </a:r>
+            <a:endParaRPr lang="en-US" dirty="0"/>
+          </a:p>
+        </p:txBody>
+      </p:sp>
+      <p:sp>
+        <p:nvSpPr>
+          <p:cNvPr id="4" name="Slide Number Placeholder 3"/>
+          <p:cNvSpPr>
+            <a:spLocks noGrp="1"/>
+          </p:cNvSpPr>
+          <p:nvPr>
+            <p:ph type="sldNum" sz="quarter" idx="10"/>
+          </p:nvPr>
+        </p:nvSpPr>
+        <p:spPr/>
+        <p:txBody>
+          <a:bodyPr/>
+          <a:lstStyle/>
+          <a:p>
+            <a:fld id="{F7021451-1387-4CA6-816F-3879F97B5CBC}" type="slidenum">
+              <a:rPr lang="en-US"/>
+              <a:t>27</a:t>
+            </a:fld>
+            <a:endParaRPr lang="en-US"/>
+          </a:p>
+        </p:txBody>
+      </p:sp>
+    </p:spTree>
+    <p:extLst>
+      <p:ext uri="{BB962C8B-B14F-4D97-AF65-F5344CB8AC3E}">
+        <p14:creationId xmlns:p14="http://schemas.microsoft.com/office/powerpoint/2010/main" val="1024086991"/>
+      </p:ext>
+    </p:extLst>
+  </p:cSld>
+  <p:clrMapOvr>
+    <a:masterClrMapping/>
+  </p:clrMapOvr>
+</p:notes>
+</file>
+
+<file path=ppt/notesSlides/notesSlide28.xml><?xml version="1.0" encoding="utf-8"?>
+<p:notes xmlns:a="http://schemas.openxmlformats.org/drawingml/2006/main" xmlns:r="http://schemas.openxmlformats.org/officeDocument/2006/relationships" xmlns:p="http://schemas.openxmlformats.org/presentationml/2006/main">
+  <p:cSld>
+    <p:spTree>
+      <p:nvGrpSpPr>
+        <p:cNvPr id="1" name=""/>
+        <p:cNvGrpSpPr/>
+        <p:nvPr/>
+      </p:nvGrpSpPr>
+      <p:grpSpPr>
+        <a:xfrm>
+          <a:off x="0" y="0"/>
+          <a:ext cx="0" cy="0"/>
+          <a:chOff x="0" y="0"/>
+          <a:chExt cx="0" cy="0"/>
+        </a:xfrm>
+      </p:grpSpPr>
+      <p:sp>
+        <p:nvSpPr>
+          <p:cNvPr id="2" name="Slide Image Placeholder 1"/>
+          <p:cNvSpPr>
+            <a:spLocks noGrp="1" noRot="1" noChangeAspect="1"/>
+          </p:cNvSpPr>
+          <p:nvPr>
+            <p:ph type="sldImg"/>
+          </p:nvPr>
+        </p:nvSpPr>
+        <p:spPr/>
+      </p:sp>
+      <p:sp>
+        <p:nvSpPr>
+          <p:cNvPr id="3" name="Notes Placeholder 2"/>
+          <p:cNvSpPr>
+            <a:spLocks noGrp="1"/>
+          </p:cNvSpPr>
+          <p:nvPr>
+            <p:ph type="body" idx="1"/>
+          </p:nvPr>
+        </p:nvSpPr>
+        <p:spPr/>
+        <p:txBody>
+          <a:bodyPr/>
+          <a:lstStyle/>
+          <a:p>
+            <a:r>
+              <a:rPr lang="en-US" dirty="0"/>
+              <a:t/>
+            </a:r>
+            <a:endParaRPr lang="en-US" dirty="0"/>
+          </a:p>
+        </p:txBody>
+      </p:sp>
+      <p:sp>
+        <p:nvSpPr>
+          <p:cNvPr id="4" name="Slide Number Placeholder 3"/>
+          <p:cNvSpPr>
+            <a:spLocks noGrp="1"/>
+          </p:cNvSpPr>
+          <p:nvPr>
+            <p:ph type="sldNum" sz="quarter" idx="10"/>
+          </p:nvPr>
+        </p:nvSpPr>
+        <p:spPr/>
+        <p:txBody>
+          <a:bodyPr/>
+          <a:lstStyle/>
+          <a:p>
+            <a:fld id="{F7021451-1387-4CA6-816F-3879F97B5CBC}" type="slidenum">
+              <a:rPr lang="en-US"/>
+              <a:t>28</a:t>
             </a:fld>
             <a:endParaRPr lang="en-US"/>
           </a:p>
@@ -3072,8 +3339,8 @@
         </p:nvSpPr>
         <p:spPr>
           <a:xfrm>
-            <a:off x="507950" y="176213"/>
-            <a:ext cx="1204570" cy="180975"/>
+            <a:off x="507950" y="180975"/>
+            <a:ext cx="1086618" cy="171450"/>
           </a:xfrm>
           <a:prstGeom prst="rect">
             <a:avLst/>
@@ -3111,8 +3378,8 @@
         </p:nvSpPr>
         <p:spPr>
           <a:xfrm>
-            <a:off x="1974354" y="166688"/>
-            <a:ext cx="1046390" cy="200025"/>
+            <a:off x="1858714" y="166688"/>
+            <a:ext cx="967451" cy="200025"/>
           </a:xfrm>
           <a:prstGeom prst="rect">
             <a:avLst/>
@@ -3150,8 +3417,8 @@
         </p:nvSpPr>
         <p:spPr>
           <a:xfrm>
-            <a:off x="11291441" y="176213"/>
-            <a:ext cx="400461" cy="180975"/>
+            <a:off x="11322397" y="180975"/>
+            <a:ext cx="368885" cy="171450"/>
           </a:xfrm>
           <a:prstGeom prst="rect">
             <a:avLst/>
@@ -3175,7 +3442,7 @@
                 <a:ea typeface="Noto Sans" pitchFamily="34" charset="-122"/>
                 <a:cs typeface="Noto Sans" pitchFamily="34" charset="-120"/>
               </a:rPr>
-              <a:t>1 / 25</a:t>
+              <a:t>1 / 28</a:t>
             </a:r>
             <a:endParaRPr lang="en-US" sz="1000" dirty="0"/>
           </a:p>
@@ -3556,8 +3823,8 @@
         </p:nvSpPr>
         <p:spPr>
           <a:xfrm>
-            <a:off x="11209288" y="176213"/>
-            <a:ext cx="484257" cy="180975"/>
+            <a:off x="11208990" y="176213"/>
+            <a:ext cx="484561" cy="180975"/>
           </a:xfrm>
           <a:prstGeom prst="rect">
             <a:avLst/>
@@ -3581,7 +3848,7 @@
                 <a:ea typeface="Noto Sans" pitchFamily="34" charset="-122"/>
                 <a:cs typeface="Noto Sans" pitchFamily="34" charset="-120"/>
               </a:rPr>
-              <a:t>10 / 25</a:t>
+              <a:t>10 / 28</a:t>
             </a:r>
             <a:endParaRPr lang="en-US" sz="1000" dirty="0"/>
           </a:p>
@@ -4060,8 +4327,8 @@
         </p:nvSpPr>
         <p:spPr>
           <a:xfrm>
-            <a:off x="11233696" y="176213"/>
-            <a:ext cx="459361" cy="180975"/>
+            <a:off x="11233398" y="176213"/>
+            <a:ext cx="459665" cy="180975"/>
           </a:xfrm>
           <a:prstGeom prst="rect">
             <a:avLst/>
@@ -4085,7 +4352,7 @@
                 <a:ea typeface="Noto Sans" pitchFamily="34" charset="-122"/>
                 <a:cs typeface="Noto Sans" pitchFamily="34" charset="-120"/>
               </a:rPr>
-              <a:t>11 / 25</a:t>
+              <a:t>11 / 28</a:t>
             </a:r>
             <a:endParaRPr lang="en-US" sz="1000" dirty="0"/>
           </a:p>
@@ -4773,8 +5040,8 @@
         </p:nvSpPr>
         <p:spPr>
           <a:xfrm>
-            <a:off x="11208544" y="176213"/>
-            <a:ext cx="485016" cy="180975"/>
+            <a:off x="11208246" y="176213"/>
+            <a:ext cx="485320" cy="180975"/>
           </a:xfrm>
           <a:prstGeom prst="rect">
             <a:avLst/>
@@ -4798,7 +5065,7 @@
                 <a:ea typeface="Noto Sans" pitchFamily="34" charset="-122"/>
                 <a:cs typeface="Noto Sans" pitchFamily="34" charset="-120"/>
               </a:rPr>
-              <a:t>12 / 25</a:t>
+              <a:t>12 / 28</a:t>
             </a:r>
             <a:endParaRPr lang="en-US" sz="1000" dirty="0"/>
           </a:p>
@@ -5389,8 +5656,8 @@
         </p:nvSpPr>
         <p:spPr>
           <a:xfrm>
-            <a:off x="11208990" y="176213"/>
-            <a:ext cx="484561" cy="180975"/>
+            <a:off x="11208544" y="176213"/>
+            <a:ext cx="485016" cy="180975"/>
           </a:xfrm>
           <a:prstGeom prst="rect">
             <a:avLst/>
@@ -5414,7 +5681,7 @@
                 <a:ea typeface="Noto Sans" pitchFamily="34" charset="-122"/>
                 <a:cs typeface="Noto Sans" pitchFamily="34" charset="-120"/>
               </a:rPr>
-              <a:t>13 / 25</a:t>
+              <a:t>13 / 28</a:t>
             </a:r>
             <a:endParaRPr lang="en-US" sz="1000" dirty="0"/>
           </a:p>
@@ -5772,8 +6039,8 @@
         </p:nvSpPr>
         <p:spPr>
           <a:xfrm>
-            <a:off x="507950" y="180975"/>
-            <a:ext cx="1264837" cy="171450"/>
+            <a:off x="507950" y="176213"/>
+            <a:ext cx="1371404" cy="180975"/>
           </a:xfrm>
           <a:prstGeom prst="rect">
             <a:avLst/>
@@ -5811,8 +6078,8 @@
         </p:nvSpPr>
         <p:spPr>
           <a:xfrm>
-            <a:off x="2033439" y="166688"/>
-            <a:ext cx="1537174" cy="200025"/>
+            <a:off x="2137916" y="166688"/>
+            <a:ext cx="1627498" cy="200025"/>
           </a:xfrm>
           <a:prstGeom prst="rect">
             <a:avLst/>
@@ -5850,8 +6117,8 @@
         </p:nvSpPr>
         <p:spPr>
           <a:xfrm>
-            <a:off x="11244709" y="180975"/>
-            <a:ext cx="448127" cy="171450"/>
+            <a:off x="11207948" y="176213"/>
+            <a:ext cx="485623" cy="180975"/>
           </a:xfrm>
           <a:prstGeom prst="rect">
             <a:avLst/>
@@ -5875,7 +6142,7 @@
                 <a:ea typeface="Noto Sans" pitchFamily="34" charset="-122"/>
                 <a:cs typeface="Noto Sans" pitchFamily="34" charset="-120"/>
               </a:rPr>
-              <a:t>14 / 25</a:t>
+              <a:t>14 / 28</a:t>
             </a:r>
             <a:endParaRPr lang="en-US" sz="1000" dirty="0"/>
           </a:p>
@@ -5919,7 +6186,7 @@
         </p:nvSpPr>
         <p:spPr>
           <a:xfrm>
-            <a:off x="609600" y="949821"/>
+            <a:off x="609600" y="740271"/>
             <a:ext cx="11192256" cy="200025"/>
           </a:xfrm>
           <a:prstGeom prst="rect">
@@ -5958,12 +6225,12 @@
         </p:nvSpPr>
         <p:spPr>
           <a:xfrm>
-            <a:off x="609600" y="1149846"/>
-            <a:ext cx="10972800" cy="857250"/>
+            <a:off x="609600" y="940296"/>
+            <a:ext cx="10972800" cy="1276350"/>
           </a:xfrm>
           <a:prstGeom prst="roundRect">
             <a:avLst>
-              <a:gd name="adj" fmla="val 13333"/>
+              <a:gd name="adj" fmla="val 8955"/>
             </a:avLst>
           </a:prstGeom>
           <a:solidFill>
@@ -5994,8 +6261,8 @@
         </p:nvSpPr>
         <p:spPr>
           <a:xfrm>
-            <a:off x="830199" y="1359396"/>
-            <a:ext cx="10531602" cy="438150"/>
+            <a:off x="830199" y="1149846"/>
+            <a:ext cx="10531602" cy="857250"/>
           </a:xfrm>
           <a:prstGeom prst="rect">
             <a:avLst/>
@@ -6033,7 +6300,7 @@
         </p:nvSpPr>
         <p:spPr>
           <a:xfrm>
-            <a:off x="609600" y="2134046"/>
+            <a:off x="609600" y="2343596"/>
             <a:ext cx="10972800" cy="1046411"/>
           </a:xfrm>
           <a:prstGeom prst="roundRect">
@@ -6069,7 +6336,7 @@
         </p:nvSpPr>
         <p:spPr>
           <a:xfrm>
-            <a:off x="822275" y="2295971"/>
+            <a:off x="822275" y="2505521"/>
             <a:ext cx="297841" cy="350490"/>
           </a:xfrm>
           <a:prstGeom prst="rect">
@@ -6111,7 +6378,7 @@
         </p:nvSpPr>
         <p:spPr>
           <a:xfrm>
-            <a:off x="1279327" y="2295971"/>
+            <a:off x="1279327" y="2505521"/>
             <a:ext cx="4624578" cy="400050"/>
           </a:xfrm>
           <a:prstGeom prst="rect">
@@ -6197,7 +6464,7 @@
         </p:nvSpPr>
         <p:spPr>
           <a:xfrm>
-            <a:off x="1279327" y="2734121"/>
+            <a:off x="1279327" y="2943671"/>
             <a:ext cx="4624578" cy="284411"/>
           </a:xfrm>
           <a:prstGeom prst="rect">
@@ -6242,7 +6509,7 @@
         </p:nvSpPr>
         <p:spPr>
           <a:xfrm>
-            <a:off x="609600" y="3332857"/>
+            <a:off x="609600" y="3542407"/>
             <a:ext cx="10972800" cy="1046411"/>
           </a:xfrm>
           <a:prstGeom prst="roundRect">
@@ -6278,7 +6545,7 @@
         </p:nvSpPr>
         <p:spPr>
           <a:xfrm>
-            <a:off x="822275" y="3494782"/>
+            <a:off x="822275" y="3704332"/>
             <a:ext cx="297841" cy="350490"/>
           </a:xfrm>
           <a:prstGeom prst="rect">
@@ -6320,7 +6587,7 @@
         </p:nvSpPr>
         <p:spPr>
           <a:xfrm>
-            <a:off x="1279327" y="3494782"/>
+            <a:off x="1279327" y="3704332"/>
             <a:ext cx="7072884" cy="400050"/>
           </a:xfrm>
           <a:prstGeom prst="rect">
@@ -6450,7 +6717,7 @@
         </p:nvSpPr>
         <p:spPr>
           <a:xfrm>
-            <a:off x="1279327" y="3932932"/>
+            <a:off x="1279327" y="4142482"/>
             <a:ext cx="7072884" cy="284411"/>
           </a:xfrm>
           <a:prstGeom prst="rect">
@@ -6495,7 +6762,7 @@
         </p:nvSpPr>
         <p:spPr>
           <a:xfrm>
-            <a:off x="609600" y="4531668"/>
+            <a:off x="609600" y="4741218"/>
             <a:ext cx="10972800" cy="1046411"/>
           </a:xfrm>
           <a:prstGeom prst="roundRect">
@@ -6531,7 +6798,7 @@
         </p:nvSpPr>
         <p:spPr>
           <a:xfrm>
-            <a:off x="822275" y="4693593"/>
+            <a:off x="822275" y="4903143"/>
             <a:ext cx="297841" cy="350490"/>
           </a:xfrm>
           <a:prstGeom prst="rect">
@@ -6573,7 +6840,7 @@
         </p:nvSpPr>
         <p:spPr>
           <a:xfrm>
-            <a:off x="1279327" y="4693593"/>
+            <a:off x="1279327" y="4903143"/>
             <a:ext cx="5440680" cy="400050"/>
           </a:xfrm>
           <a:prstGeom prst="rect">
@@ -6681,7 +6948,7 @@
         </p:nvSpPr>
         <p:spPr>
           <a:xfrm>
-            <a:off x="1279327" y="5131743"/>
+            <a:off x="1279327" y="5341293"/>
             <a:ext cx="5440680" cy="284411"/>
           </a:xfrm>
           <a:prstGeom prst="rect">
@@ -6726,7 +6993,7 @@
         </p:nvSpPr>
         <p:spPr>
           <a:xfrm>
-            <a:off x="609600" y="5705029"/>
+            <a:off x="609600" y="5914579"/>
             <a:ext cx="11192256" cy="228600"/>
           </a:xfrm>
           <a:prstGeom prst="rect">
@@ -6934,8 +7201,8 @@
         </p:nvSpPr>
         <p:spPr>
           <a:xfrm>
-            <a:off x="11208544" y="176213"/>
-            <a:ext cx="485016" cy="180975"/>
+            <a:off x="11208246" y="176213"/>
+            <a:ext cx="485320" cy="180975"/>
           </a:xfrm>
           <a:prstGeom prst="rect">
             <a:avLst/>
@@ -6959,7 +7226,7 @@
                 <a:ea typeface="Noto Sans" pitchFamily="34" charset="-122"/>
                 <a:cs typeface="Noto Sans" pitchFamily="34" charset="-120"/>
               </a:rPr>
-              <a:t>15 / 25</a:t>
+              <a:t>15 / 28</a:t>
             </a:r>
             <a:endParaRPr lang="en-US" sz="1000" dirty="0"/>
           </a:p>
@@ -7931,8 +8198,8 @@
         </p:nvSpPr>
         <p:spPr>
           <a:xfrm>
-            <a:off x="11207800" y="176213"/>
-            <a:ext cx="485775" cy="180975"/>
+            <a:off x="11207502" y="176213"/>
+            <a:ext cx="486079" cy="180975"/>
           </a:xfrm>
           <a:prstGeom prst="rect">
             <a:avLst/>
@@ -7956,7 +8223,7 @@
                 <a:ea typeface="Noto Sans" pitchFamily="34" charset="-122"/>
                 <a:cs typeface="Noto Sans" pitchFamily="34" charset="-120"/>
               </a:rPr>
-              <a:t>16 / 25</a:t>
+              <a:t>16 / 28</a:t>
             </a:r>
             <a:endParaRPr lang="en-US" sz="1000" dirty="0"/>
           </a:p>
@@ -8069,7 +8336,7 @@
       </p:sp>
       <p:pic>
         <p:nvPicPr>
-          <p:cNvPr id="10" name="Image 0" descr="/var/folders/6c/210dcgxn4gz5sm71vld2cy1h0000gn/T/tmp.LHO6BoqOp1/img/shuiguodian.png">    </p:cNvPr>
+          <p:cNvPr id="10" name="Image 0" descr="/var/folders/6c/210dcgxn4gz5sm71vld2cy1h0000gn/T/tmp.kuKuqUEQz8/img/shuiguodian.png">    </p:cNvPr>
           <p:cNvPicPr>
             <a:picLocks noChangeAspect="1"/>
           </p:cNvPicPr>
@@ -8168,7 +8435,7 @@
       </p:sp>
       <p:pic>
         <p:nvPicPr>
-          <p:cNvPr id="13" name="Image 1" descr="/var/folders/6c/210dcgxn4gz5sm71vld2cy1h0000gn/T/tmp.LHO6BoqOp1/img/shudian.png">    </p:cNvPr>
+          <p:cNvPr id="13" name="Image 1" descr="/var/folders/6c/210dcgxn4gz5sm71vld2cy1h0000gn/T/tmp.kuKuqUEQz8/img/shudian.png">    </p:cNvPr>
           <p:cNvPicPr>
             <a:picLocks noChangeAspect="1"/>
           </p:cNvPicPr>
@@ -8267,7 +8534,7 @@
       </p:sp>
       <p:pic>
         <p:nvPicPr>
-          <p:cNvPr id="16" name="Image 2" descr="/var/folders/6c/210dcgxn4gz5sm71vld2cy1h0000gn/T/tmp.LHO6BoqOp1/img/lifadian.png">    </p:cNvPr>
+          <p:cNvPr id="16" name="Image 2" descr="/var/folders/6c/210dcgxn4gz5sm71vld2cy1h0000gn/T/tmp.kuKuqUEQz8/img/lifadian.png">    </p:cNvPr>
           <p:cNvPicPr>
             <a:picLocks noChangeAspect="1"/>
           </p:cNvPicPr>
@@ -8366,7 +8633,7 @@
       </p:sp>
       <p:pic>
         <p:nvPicPr>
-          <p:cNvPr id="19" name="Image 3" descr="/var/folders/6c/210dcgxn4gz5sm71vld2cy1h0000gn/T/tmp.LHO6BoqOp1/img/kuaicandian.png">    </p:cNvPr>
+          <p:cNvPr id="19" name="Image 3" descr="/var/folders/6c/210dcgxn4gz5sm71vld2cy1h0000gn/T/tmp.kuKuqUEQz8/img/kuaicandian.png">    </p:cNvPr>
           <p:cNvPicPr>
             <a:picLocks noChangeAspect="1"/>
           </p:cNvPicPr>
@@ -8629,7 +8896,7 @@
                 <a:ea typeface="Noto Sans" pitchFamily="34" charset="-122"/>
                 <a:cs typeface="Noto Sans" pitchFamily="34" charset="-120"/>
               </a:rPr>
-              <a:t>活动一 · 6 分钟</a:t>
+              <a:t>活动一 · 5 分钟</a:t>
             </a:r>
             <a:endParaRPr lang="en-US" sz="1100" dirty="0"/>
           </a:p>
@@ -8643,8 +8910,8 @@
         </p:nvSpPr>
         <p:spPr>
           <a:xfrm>
-            <a:off x="11214348" y="176213"/>
-            <a:ext cx="479096" cy="180975"/>
+            <a:off x="11213902" y="176213"/>
+            <a:ext cx="479551" cy="180975"/>
           </a:xfrm>
           <a:prstGeom prst="rect">
             <a:avLst/>
@@ -8668,7 +8935,7 @@
                 <a:ea typeface="Noto Sans" pitchFamily="34" charset="-122"/>
                 <a:cs typeface="Noto Sans" pitchFamily="34" charset="-120"/>
               </a:rPr>
-              <a:t>17 / 25</a:t>
+              <a:t>17 / 28</a:t>
             </a:r>
             <a:endParaRPr lang="en-US" sz="1000" dirty="0"/>
           </a:p>
@@ -8745,7 +9012,7 @@
       </p:sp>
       <p:pic>
         <p:nvPicPr>
-          <p:cNvPr id="9" name="Image 0" descr="/var/folders/6c/210dcgxn4gz5sm71vld2cy1h0000gn/T/tmp.LHO6BoqOp1/img/ditu.png">    </p:cNvPr>
+          <p:cNvPr id="9" name="Image 0" descr="/var/folders/6c/210dcgxn4gz5sm71vld2cy1h0000gn/T/tmp.kuKuqUEQz8/img/ditu.png">    </p:cNvPr>
           <p:cNvPicPr>
             <a:picLocks noChangeAspect="1"/>
           </p:cNvPicPr>
@@ -9195,8 +9462,8 @@
         </p:nvSpPr>
         <p:spPr>
           <a:xfrm>
-            <a:off x="11208246" y="176213"/>
-            <a:ext cx="485320" cy="180975"/>
+            <a:off x="11207800" y="176213"/>
+            <a:ext cx="485775" cy="180975"/>
           </a:xfrm>
           <a:prstGeom prst="rect">
             <a:avLst/>
@@ -9220,7 +9487,7 @@
                 <a:ea typeface="Noto Sans" pitchFamily="34" charset="-122"/>
                 <a:cs typeface="Noto Sans" pitchFamily="34" charset="-120"/>
               </a:rPr>
-              <a:t>18 / 25</a:t>
+              <a:t>18 / 28</a:t>
             </a:r>
             <a:endParaRPr lang="en-US" sz="1000" dirty="0"/>
           </a:p>
@@ -9725,7 +9992,7 @@
                 <a:ea typeface="Noto Sans" pitchFamily="34" charset="-122"/>
                 <a:cs typeface="Noto Sans" pitchFamily="34" charset="-120"/>
               </a:rPr>
-              <a:t>活动二 · 9 分钟</a:t>
+              <a:t>活动二 · 8 分钟</a:t>
             </a:r>
             <a:endParaRPr lang="en-US" sz="1100" dirty="0"/>
           </a:p>
@@ -9739,8 +10006,8 @@
         </p:nvSpPr>
         <p:spPr>
           <a:xfrm>
-            <a:off x="11207651" y="176213"/>
-            <a:ext cx="485927" cy="180975"/>
+            <a:off x="11207353" y="176213"/>
+            <a:ext cx="486230" cy="180975"/>
           </a:xfrm>
           <a:prstGeom prst="rect">
             <a:avLst/>
@@ -9764,7 +10031,7 @@
                 <a:ea typeface="Noto Sans" pitchFamily="34" charset="-122"/>
                 <a:cs typeface="Noto Sans" pitchFamily="34" charset="-120"/>
               </a:rPr>
-              <a:t>19 / 25</a:t>
+              <a:t>19 / 28</a:t>
             </a:r>
             <a:endParaRPr lang="en-US" sz="1000" dirty="0"/>
           </a:p>
@@ -9841,7 +10108,7 @@
       </p:sp>
       <p:pic>
         <p:nvPicPr>
-          <p:cNvPr id="9" name="Image 0" descr="/var/folders/6c/210dcgxn4gz5sm71vld2cy1h0000gn/T/tmp.LHO6BoqOp1/img/zhilu.png">    </p:cNvPr>
+          <p:cNvPr id="9" name="Image 0" descr="/var/folders/6c/210dcgxn4gz5sm71vld2cy1h0000gn/T/tmp.kuKuqUEQz8/img/zhilu.png">    </p:cNvPr>
           <p:cNvPicPr>
             <a:picLocks noChangeAspect="1"/>
           </p:cNvPicPr>
@@ -10091,7 +10358,7 @@
                 <a:ea typeface="Noto Sans" pitchFamily="34" charset="-122"/>
                 <a:cs typeface="Noto Sans" pitchFamily="34" charset="-120"/>
               </a:rPr>
-              <a:t>四分半换角色。</a:t>
+              <a:t>四分钟换角色。</a:t>
             </a:r>
             <a:endParaRPr lang="en-US" sz="1700" dirty="0"/>
           </a:p>
@@ -10359,8 +10626,8 @@
         </p:nvSpPr>
         <p:spPr>
           <a:xfrm>
-            <a:off x="11266438" y="176213"/>
-            <a:ext cx="425964" cy="180975"/>
+            <a:off x="11265991" y="176213"/>
+            <a:ext cx="426419" cy="180975"/>
           </a:xfrm>
           <a:prstGeom prst="rect">
             <a:avLst/>
@@ -10384,7 +10651,7 @@
                 <a:ea typeface="Noto Sans" pitchFamily="34" charset="-122"/>
                 <a:cs typeface="Noto Sans" pitchFamily="34" charset="-120"/>
               </a:rPr>
-              <a:t>2 / 25</a:t>
+              <a:t>2 / 28</a:t>
             </a:r>
             <a:endParaRPr lang="en-US" sz="1000" dirty="0"/>
           </a:p>
@@ -11647,8 +11914,8 @@
         </p:nvSpPr>
         <p:spPr>
           <a:xfrm>
-            <a:off x="11184285" y="176213"/>
-            <a:ext cx="509760" cy="180975"/>
+            <a:off x="11183838" y="176213"/>
+            <a:ext cx="510216" cy="180975"/>
           </a:xfrm>
           <a:prstGeom prst="rect">
             <a:avLst/>
@@ -11672,7 +11939,7 @@
                 <a:ea typeface="Noto Sans" pitchFamily="34" charset="-122"/>
                 <a:cs typeface="Noto Sans" pitchFamily="34" charset="-120"/>
               </a:rPr>
-              <a:t>20 / 25</a:t>
+              <a:t>20 / 28</a:t>
             </a:r>
             <a:endParaRPr lang="en-US" sz="1000" dirty="0"/>
           </a:p>
@@ -12263,7 +12530,7 @@
                 <a:ea typeface="Noto Sans" pitchFamily="34" charset="-122"/>
                 <a:cs typeface="Noto Sans" pitchFamily="34" charset="-120"/>
               </a:rPr>
-              <a:t>活动三 · 8 分钟 · 课本 p.153 第十六题</a:t>
+              <a:t>活动三 · 5 分钟 · 课本 p.153 第十六题</a:t>
             </a:r>
             <a:endParaRPr lang="en-US" sz="1100" dirty="0"/>
           </a:p>
@@ -12277,8 +12544,8 @@
         </p:nvSpPr>
         <p:spPr>
           <a:xfrm>
-            <a:off x="11208544" y="176213"/>
-            <a:ext cx="485016" cy="180975"/>
+            <a:off x="11208246" y="176213"/>
+            <a:ext cx="485320" cy="180975"/>
           </a:xfrm>
           <a:prstGeom prst="rect">
             <a:avLst/>
@@ -12302,7 +12569,7 @@
                 <a:ea typeface="Noto Sans" pitchFamily="34" charset="-122"/>
                 <a:cs typeface="Noto Sans" pitchFamily="34" charset="-120"/>
               </a:rPr>
-              <a:t>21 / 25</a:t>
+              <a:t>21 / 28</a:t>
             </a:r>
             <a:endParaRPr lang="en-US" sz="1000" dirty="0"/>
           </a:p>
@@ -12491,7 +12758,7 @@
                 <a:ea typeface="Noto Sans" pitchFamily="34" charset="-122"/>
                 <a:cs typeface="Noto Sans" pitchFamily="34" charset="-120"/>
               </a:rPr>
-              <a:t>两人一组，一张 A3。四分钟，画至少</a:t>
+              <a:t>两人一组，一张 A3。两分半，画至少</a:t>
             </a:r>
             <a:r>
               <a:rPr lang="en-US" sz="1600" b="1" dirty="0">
@@ -12502,7 +12769,7 @@
                 <a:ea typeface="Noto Sans" pitchFamily="34" charset="-122"/>
                 <a:cs typeface="Noto Sans" pitchFamily="34" charset="-120"/>
               </a:rPr>
-              <a:t>八个</a:t>
+              <a:t>六个</a:t>
             </a:r>
             <a:r>
               <a:rPr lang="en-US" sz="1600" dirty="0">
@@ -12513,7 +12780,7 @@
                 <a:ea typeface="Noto Sans" pitchFamily="34" charset="-122"/>
                 <a:cs typeface="Noto Sans" pitchFamily="34" charset="-120"/>
               </a:rPr>
-              <a:t>地方，全部写汉字，其中至少六个是这六课学过的店。</a:t>
+              <a:t>地方，全部写汉字，其中至少四个是这六课学过的店。</a:t>
             </a:r>
             <a:endParaRPr lang="en-US" sz="1600" dirty="0"/>
           </a:p>
@@ -12775,7 +13042,7 @@
                 <a:ea typeface="Noto Sans" pitchFamily="34" charset="-122"/>
                 <a:cs typeface="Noto Sans" pitchFamily="34" charset="-120"/>
               </a:rPr>
-              <a:t>全部贴到墙上。两分钟大家走一圈，在</a:t>
+              <a:t>全部贴到墙上。九十秒大家走一圈，在</a:t>
             </a:r>
             <a:r>
               <a:rPr lang="en-US" sz="1600" b="1" dirty="0">
@@ -13061,8 +13328,8 @@
         </p:nvSpPr>
         <p:spPr>
           <a:xfrm>
-            <a:off x="507950" y="180975"/>
-            <a:ext cx="2386370" cy="171450"/>
+            <a:off x="507950" y="176213"/>
+            <a:ext cx="2644893" cy="180975"/>
           </a:xfrm>
           <a:prstGeom prst="rect">
             <a:avLst/>
@@ -13100,8 +13367,8 @@
         </p:nvSpPr>
         <p:spPr>
           <a:xfrm>
-            <a:off x="3132981" y="166688"/>
-            <a:ext cx="1206392" cy="200025"/>
+            <a:off x="3386435" y="166688"/>
+            <a:ext cx="1296260" cy="200025"/>
           </a:xfrm>
           <a:prstGeom prst="rect">
             <a:avLst/>
@@ -13139,8 +13406,8 @@
         </p:nvSpPr>
         <p:spPr>
           <a:xfrm>
-            <a:off x="11244709" y="180975"/>
-            <a:ext cx="448127" cy="171450"/>
+            <a:off x="11183094" y="176213"/>
+            <a:ext cx="510975" cy="180975"/>
           </a:xfrm>
           <a:prstGeom prst="rect">
             <a:avLst/>
@@ -13164,7 +13431,7 @@
                 <a:ea typeface="Noto Sans" pitchFamily="34" charset="-122"/>
                 <a:cs typeface="Noto Sans" pitchFamily="34" charset="-120"/>
               </a:rPr>
-              <a:t>22 / 25</a:t>
+              <a:t>22 / 28</a:t>
             </a:r>
             <a:endParaRPr lang="en-US" sz="1000" dirty="0"/>
           </a:p>
@@ -13583,8 +13850,8 @@
         </p:nvSpPr>
         <p:spPr>
           <a:xfrm>
-            <a:off x="507950" y="180975"/>
-            <a:ext cx="1608826" cy="171450"/>
+            <a:off x="507950" y="176213"/>
+            <a:ext cx="2644893" cy="180975"/>
           </a:xfrm>
           <a:prstGeom prst="rect">
             <a:avLst/>
@@ -13608,7 +13875,7 @@
                 <a:ea typeface="Noto Sans" pitchFamily="34" charset="-122"/>
                 <a:cs typeface="Noto Sans" pitchFamily="34" charset="-120"/>
               </a:rPr>
-              <a:t>43–50 MIN · PLENARY</a:t>
+              <a:t>20–43 MIN · FLEXIBLE PRACTICE</a:t>
             </a:r>
             <a:endParaRPr lang="en-US" sz="1000" dirty="0"/>
           </a:p>
@@ -13622,8 +13889,8 @@
         </p:nvSpPr>
         <p:spPr>
           <a:xfrm>
-            <a:off x="2370683" y="166688"/>
-            <a:ext cx="1394781" cy="200025"/>
+            <a:off x="3386435" y="166688"/>
+            <a:ext cx="1511519" cy="200025"/>
           </a:xfrm>
           <a:prstGeom prst="rect">
             <a:avLst/>
@@ -13647,7 +13914,7 @@
                 <a:ea typeface="Noto Sans" pitchFamily="34" charset="-122"/>
                 <a:cs typeface="Noto Sans" pitchFamily="34" charset="-120"/>
               </a:rPr>
-              <a:t>小结 · 六课一起回头看</a:t>
+              <a:t>游戏 · 第一步 · 独体字</a:t>
             </a:r>
             <a:endParaRPr lang="en-US" sz="1100" dirty="0"/>
           </a:p>
@@ -13661,8 +13928,8 @@
         </p:nvSpPr>
         <p:spPr>
           <a:xfrm>
-            <a:off x="11244709" y="180975"/>
-            <a:ext cx="448127" cy="171450"/>
+            <a:off x="11183392" y="176213"/>
+            <a:ext cx="510671" cy="180975"/>
           </a:xfrm>
           <a:prstGeom prst="rect">
             <a:avLst/>
@@ -13686,7 +13953,7 @@
                 <a:ea typeface="Noto Sans" pitchFamily="34" charset="-122"/>
                 <a:cs typeface="Noto Sans" pitchFamily="34" charset="-120"/>
               </a:rPr>
-              <a:t>23 / 25</a:t>
+              <a:t>23 / 28</a:t>
             </a:r>
             <a:endParaRPr lang="en-US" sz="1000" dirty="0"/>
           </a:p>
@@ -13730,7 +13997,7 @@
         </p:nvSpPr>
         <p:spPr>
           <a:xfrm>
-            <a:off x="609600" y="884337"/>
+            <a:off x="609600" y="2125266"/>
             <a:ext cx="11192256" cy="200025"/>
           </a:xfrm>
           <a:prstGeom prst="rect">
@@ -13755,7 +14022,7 @@
                 <a:ea typeface="Noto Sans" pitchFamily="34" charset="-122"/>
                 <a:cs typeface="Noto Sans" pitchFamily="34" charset="-120"/>
               </a:rPr>
-              <a:t>小结 · 这六节课，你学会了什么</a:t>
+              <a:t>独体字 · 课本 P.147 第九题 · 九十秒看一遍</a:t>
             </a:r>
             <a:endParaRPr lang="en-US" sz="1100" dirty="0"/>
           </a:p>
@@ -13769,18 +14036,18 @@
         </p:nvSpPr>
         <p:spPr>
           <a:xfrm>
-            <a:off x="609600" y="1084362"/>
-            <a:ext cx="10972800" cy="721816"/>
+            <a:off x="609600" y="2426791"/>
+            <a:ext cx="2628900" cy="1721793"/>
           </a:xfrm>
           <a:prstGeom prst="roundRect">
             <a:avLst>
-              <a:gd name="adj" fmla="val 8797"/>
+              <a:gd name="adj" fmla="val 3688"/>
             </a:avLst>
           </a:prstGeom>
           <a:solidFill>
             <a:srgbClr val="E6EAEB"/>
           </a:solidFill>
-          <a:ln w="9525">
+          <a:ln w="19050">
             <a:solidFill>
               <a:srgbClr val="D5DBDD"/>
             </a:solidFill>
@@ -13805,37 +14072,37 @@
         </p:nvSpPr>
         <p:spPr>
           <a:xfrm>
-            <a:off x="796826" y="1157288"/>
-            <a:ext cx="246075" cy="259110"/>
-          </a:xfrm>
-          <a:prstGeom prst="rect">
-            <a:avLst/>
-          </a:prstGeom>
-          <a:noFill/>
-          <a:ln/>
-        </p:spPr>
-        <p:txBody>
-          <a:bodyPr wrap="square" lIns="0" tIns="0" rIns="0" bIns="0" rtlCol="0" anchor="t"/>
-          <a:lstStyle/>
-          <a:p>
-            <a:pPr algn="l" indent="0" marL="0">
+            <a:off x="680466" y="2585442"/>
+            <a:ext cx="2487168" cy="575965"/>
+          </a:xfrm>
+          <a:prstGeom prst="rect">
+            <a:avLst/>
+          </a:prstGeom>
+          <a:noFill/>
+          <a:ln/>
+        </p:spPr>
+        <p:txBody>
+          <a:bodyPr wrap="square" lIns="0" tIns="0" rIns="0" bIns="0" rtlCol="0" anchor="t"/>
+          <a:lstStyle/>
+          <a:p>
+            <a:pPr algn="ctr" indent="0" marL="0">
               <a:lnSpc>
-                <a:spcPts val="2040"/>
+                <a:spcPts val="4536"/>
               </a:lnSpc>
               <a:buNone/>
             </a:pPr>
             <a:r>
-              <a:rPr lang="en-US" sz="1700" b="1" dirty="0">
-                <a:solidFill>
-                  <a:srgbClr val="B05B3B"/>
+              <a:rPr lang="en-US" sz="4200" b="1" dirty="0">
+                <a:solidFill>
+                  <a:srgbClr val="262B30"/>
                 </a:solidFill>
                 <a:latin typeface="Noto Serif SC" pitchFamily="34" charset="0"/>
                 <a:ea typeface="Noto Serif SC" pitchFamily="34" charset="-122"/>
                 <a:cs typeface="Noto Serif SC" pitchFamily="34" charset="-120"/>
               </a:rPr>
-              <a:t>1</a:t>
-            </a:r>
-            <a:endParaRPr lang="en-US" sz="1700" dirty="0"/>
+              <a:t>反</a:t>
+            </a:r>
+            <a:endParaRPr lang="en-US" sz="4200" dirty="0"/>
           </a:p>
         </p:txBody>
       </p:sp>
@@ -13847,62 +14114,20 @@
         </p:nvSpPr>
         <p:spPr>
           <a:xfrm>
-            <a:off x="1203127" y="1157288"/>
-            <a:ext cx="3625855" cy="248989"/>
-          </a:xfrm>
-          <a:prstGeom prst="rect">
-            <a:avLst/>
-          </a:prstGeom>
-          <a:noFill/>
-          <a:ln/>
-        </p:spPr>
-        <p:txBody>
-          <a:bodyPr wrap="square" lIns="0" tIns="0" rIns="0" bIns="0" rtlCol="0" anchor="t"/>
-          <a:lstStyle/>
-          <a:p>
-            <a:pPr algn="l" indent="0" marL="0">
-              <a:lnSpc>
-                <a:spcPts val="1960"/>
-              </a:lnSpc>
-              <a:buNone/>
-            </a:pPr>
-            <a:r>
-              <a:rPr lang="en-US" sz="1400" dirty="0">
-                <a:solidFill>
-                  <a:srgbClr val="262B30"/>
-                </a:solidFill>
-                <a:latin typeface="Noto Sans" pitchFamily="34" charset="0"/>
-                <a:ea typeface="Noto Sans" pitchFamily="34" charset="-122"/>
-                <a:cs typeface="Noto Sans" pitchFamily="34" charset="-120"/>
-              </a:rPr>
-              <a:t>第一课　我家附近有花店、文具店、家具店等</a:t>
-            </a:r>
-            <a:endParaRPr lang="en-US" sz="1400" dirty="0"/>
-          </a:p>
-        </p:txBody>
-      </p:sp>
-      <p:sp>
-        <p:nvSpPr>
-          <p:cNvPr id="12" name="Text 10"/>
-          <p:cNvSpPr/>
-          <p:nvPr/>
-        </p:nvSpPr>
-        <p:spPr>
-          <a:xfrm>
-            <a:off x="1203127" y="1457027"/>
-            <a:ext cx="3625855" cy="276225"/>
-          </a:xfrm>
-          <a:prstGeom prst="rect">
-            <a:avLst/>
-          </a:prstGeom>
-          <a:noFill/>
-          <a:ln/>
-        </p:spPr>
-        <p:txBody>
-          <a:bodyPr wrap="square" lIns="0" tIns="0" rIns="0" bIns="0" rtlCol="0" anchor="t"/>
-          <a:lstStyle/>
-          <a:p>
-            <a:pPr algn="l" indent="0" marL="0">
+            <a:off x="680466" y="3212157"/>
+            <a:ext cx="2487168" cy="266700"/>
+          </a:xfrm>
+          <a:prstGeom prst="rect">
+            <a:avLst/>
+          </a:prstGeom>
+          <a:noFill/>
+          <a:ln/>
+        </p:spPr>
+        <p:txBody>
+          <a:bodyPr wrap="square" lIns="0" tIns="0" rIns="0" bIns="0" rtlCol="0" anchor="t"/>
+          <a:lstStyle/>
+          <a:p>
+            <a:pPr algn="ctr" indent="0" marL="0">
               <a:spcBef>
                 <a:spcPts val="400"/>
               </a:spcBef>
@@ -13913,11 +14138,11 @@
                 <a:solidFill>
                   <a:srgbClr val="3D5A73"/>
                 </a:solidFill>
-                <a:latin typeface="Noto Serif SC" pitchFamily="34" charset="0"/>
-                <a:ea typeface="Noto Serif SC" pitchFamily="34" charset="-122"/>
-                <a:cs typeface="Noto Serif SC" pitchFamily="34" charset="-120"/>
-              </a:rPr>
-              <a:t>举一个中文例子</a:t>
+                <a:latin typeface="Noto Sans" pitchFamily="34" charset="0"/>
+                <a:ea typeface="Noto Sans" pitchFamily="34" charset="-122"/>
+                <a:cs typeface="Noto Sans" pitchFamily="34" charset="-120"/>
+              </a:rPr>
+              <a:t>fǎn</a:t>
             </a:r>
             <a:endParaRPr lang="en-US" sz="1500" dirty="0"/>
           </a:p>
@@ -13925,24 +14150,108 @@
       </p:sp>
       <p:sp>
         <p:nvSpPr>
+          <p:cNvPr id="12" name="Text 10"/>
+          <p:cNvSpPr/>
+          <p:nvPr/>
+        </p:nvSpPr>
+        <p:spPr>
+          <a:xfrm>
+            <a:off x="680466" y="3491508"/>
+            <a:ext cx="2487168" cy="247650"/>
+          </a:xfrm>
+          <a:prstGeom prst="rect">
+            <a:avLst/>
+          </a:prstGeom>
+          <a:noFill/>
+          <a:ln/>
+        </p:spPr>
+        <p:txBody>
+          <a:bodyPr wrap="square" lIns="0" tIns="0" rIns="0" bIns="0" rtlCol="0" anchor="t"/>
+          <a:lstStyle/>
+          <a:p>
+            <a:pPr algn="ctr" indent="0" marL="0">
+              <a:spcBef>
+                <a:spcPts val="100"/>
+              </a:spcBef>
+              <a:buNone/>
+            </a:pPr>
+            <a:r>
+              <a:rPr lang="en-US" sz="1400" dirty="0">
+                <a:solidFill>
+                  <a:srgbClr val="4B545C"/>
+                </a:solidFill>
+                <a:latin typeface="Noto Sans" pitchFamily="34" charset="0"/>
+                <a:ea typeface="Noto Sans" pitchFamily="34" charset="-122"/>
+                <a:cs typeface="Noto Sans" pitchFamily="34" charset="-120"/>
+              </a:rPr>
+              <a:t>reverse</a:t>
+            </a:r>
+            <a:endParaRPr lang="en-US" sz="1400" dirty="0"/>
+          </a:p>
+        </p:txBody>
+      </p:sp>
+      <p:sp>
+        <p:nvSpPr>
           <p:cNvPr id="13" name="Text 11"/>
           <p:cNvSpPr/>
           <p:nvPr/>
         </p:nvSpPr>
         <p:spPr>
           <a:xfrm>
-            <a:off x="609600" y="1856929"/>
-            <a:ext cx="10972800" cy="721816"/>
+            <a:off x="680466" y="3802559"/>
+            <a:ext cx="2487168" cy="200025"/>
+          </a:xfrm>
+          <a:prstGeom prst="rect">
+            <a:avLst/>
+          </a:prstGeom>
+          <a:noFill/>
+          <a:ln/>
+        </p:spPr>
+        <p:txBody>
+          <a:bodyPr wrap="square" lIns="0" tIns="0" rIns="0" bIns="0" rtlCol="0" anchor="t"/>
+          <a:lstStyle/>
+          <a:p>
+            <a:pPr algn="ctr" indent="0" marL="0">
+              <a:spcBef>
+                <a:spcPts val="500"/>
+              </a:spcBef>
+              <a:buNone/>
+            </a:pPr>
+            <a:r>
+              <a:rPr lang="en-US" sz="1100" dirty="0">
+                <a:solidFill>
+                  <a:srgbClr val="6E7780"/>
+                </a:solidFill>
+                <a:latin typeface="Noto Sans" pitchFamily="34" charset="0"/>
+                <a:ea typeface="Noto Sans" pitchFamily="34" charset="-122"/>
+                <a:cs typeface="Noto Sans" pitchFamily="34" charset="-120"/>
+              </a:rPr>
+              <a:t>第十五课 p.147</a:t>
+            </a:r>
+            <a:endParaRPr lang="en-US" sz="1100" dirty="0"/>
+          </a:p>
+        </p:txBody>
+      </p:sp>
+      <p:sp>
+        <p:nvSpPr>
+          <p:cNvPr id="14" name="Text 12"/>
+          <p:cNvSpPr/>
+          <p:nvPr/>
+        </p:nvSpPr>
+        <p:spPr>
+          <a:xfrm>
+            <a:off x="3390900" y="2426791"/>
+            <a:ext cx="2628900" cy="1721793"/>
           </a:xfrm>
           <a:prstGeom prst="roundRect">
             <a:avLst>
-              <a:gd name="adj" fmla="val 8797"/>
+              <a:gd name="adj" fmla="val 3688"/>
             </a:avLst>
           </a:prstGeom>
           <a:solidFill>
             <a:srgbClr val="E6EAEB"/>
           </a:solidFill>
-          <a:ln w="9525">
+          <a:ln w="19050">
             <a:solidFill>
               <a:srgbClr val="D5DBDD"/>
             </a:solidFill>
@@ -13961,85 +14270,43 @@
       </p:sp>
       <p:sp>
         <p:nvSpPr>
-          <p:cNvPr id="14" name="Text 12"/>
-          <p:cNvSpPr/>
-          <p:nvPr/>
-        </p:nvSpPr>
-        <p:spPr>
-          <a:xfrm>
-            <a:off x="796826" y="1929854"/>
-            <a:ext cx="246075" cy="259110"/>
-          </a:xfrm>
-          <a:prstGeom prst="rect">
-            <a:avLst/>
-          </a:prstGeom>
-          <a:noFill/>
-          <a:ln/>
-        </p:spPr>
-        <p:txBody>
-          <a:bodyPr wrap="square" lIns="0" tIns="0" rIns="0" bIns="0" rtlCol="0" anchor="t"/>
-          <a:lstStyle/>
-          <a:p>
-            <a:pPr algn="l" indent="0" marL="0">
+          <p:cNvPr id="15" name="Text 13"/>
+          <p:cNvSpPr/>
+          <p:nvPr/>
+        </p:nvSpPr>
+        <p:spPr>
+          <a:xfrm>
+            <a:off x="3461766" y="2585442"/>
+            <a:ext cx="2487168" cy="575965"/>
+          </a:xfrm>
+          <a:prstGeom prst="rect">
+            <a:avLst/>
+          </a:prstGeom>
+          <a:noFill/>
+          <a:ln/>
+        </p:spPr>
+        <p:txBody>
+          <a:bodyPr wrap="square" lIns="0" tIns="0" rIns="0" bIns="0" rtlCol="0" anchor="t"/>
+          <a:lstStyle/>
+          <a:p>
+            <a:pPr algn="ctr" indent="0" marL="0">
               <a:lnSpc>
-                <a:spcPts val="2040"/>
+                <a:spcPts val="4536"/>
               </a:lnSpc>
               <a:buNone/>
             </a:pPr>
             <a:r>
-              <a:rPr lang="en-US" sz="1700" b="1" dirty="0">
-                <a:solidFill>
-                  <a:srgbClr val="B05B3B"/>
+              <a:rPr lang="en-US" sz="4200" b="1" dirty="0">
+                <a:solidFill>
+                  <a:srgbClr val="262B30"/>
                 </a:solidFill>
                 <a:latin typeface="Noto Serif SC" pitchFamily="34" charset="0"/>
                 <a:ea typeface="Noto Serif SC" pitchFamily="34" charset="-122"/>
                 <a:cs typeface="Noto Serif SC" pitchFamily="34" charset="-120"/>
               </a:rPr>
-              <a:t>2</a:t>
-            </a:r>
-            <a:endParaRPr lang="en-US" sz="1700" dirty="0"/>
-          </a:p>
-        </p:txBody>
-      </p:sp>
-      <p:sp>
-        <p:nvSpPr>
-          <p:cNvPr id="15" name="Text 13"/>
-          <p:cNvSpPr/>
-          <p:nvPr/>
-        </p:nvSpPr>
-        <p:spPr>
-          <a:xfrm>
-            <a:off x="1203127" y="1929854"/>
-            <a:ext cx="2949261" cy="248989"/>
-          </a:xfrm>
-          <a:prstGeom prst="rect">
-            <a:avLst/>
-          </a:prstGeom>
-          <a:noFill/>
-          <a:ln/>
-        </p:spPr>
-        <p:txBody>
-          <a:bodyPr wrap="square" lIns="0" tIns="0" rIns="0" bIns="0" rtlCol="0" anchor="t"/>
-          <a:lstStyle/>
-          <a:p>
-            <a:pPr algn="l" indent="0" marL="0">
-              <a:lnSpc>
-                <a:spcPts val="1960"/>
-              </a:lnSpc>
-              <a:buNone/>
-            </a:pPr>
-            <a:r>
-              <a:rPr lang="en-US" sz="1400" dirty="0">
-                <a:solidFill>
-                  <a:srgbClr val="262B30"/>
-                </a:solidFill>
-                <a:latin typeface="Noto Sans" pitchFamily="34" charset="0"/>
-                <a:ea typeface="Noto Sans" pitchFamily="34" charset="-122"/>
-                <a:cs typeface="Noto Sans" pitchFamily="34" charset="-120"/>
-              </a:rPr>
-              <a:t>第二课　超市离我家不远　·　挺远的</a:t>
-            </a:r>
-            <a:endParaRPr lang="en-US" sz="1400" dirty="0"/>
+              <a:t>血</a:t>
+            </a:r>
+            <a:endParaRPr lang="en-US" sz="4200" dirty="0"/>
           </a:p>
         </p:txBody>
       </p:sp>
@@ -14051,20 +14318,20 @@
         </p:nvSpPr>
         <p:spPr>
           <a:xfrm>
-            <a:off x="1203127" y="2229594"/>
-            <a:ext cx="2949261" cy="276225"/>
-          </a:xfrm>
-          <a:prstGeom prst="rect">
-            <a:avLst/>
-          </a:prstGeom>
-          <a:noFill/>
-          <a:ln/>
-        </p:spPr>
-        <p:txBody>
-          <a:bodyPr wrap="square" lIns="0" tIns="0" rIns="0" bIns="0" rtlCol="0" anchor="t"/>
-          <a:lstStyle/>
-          <a:p>
-            <a:pPr algn="l" indent="0" marL="0">
+            <a:off x="3461766" y="3212157"/>
+            <a:ext cx="2487168" cy="266700"/>
+          </a:xfrm>
+          <a:prstGeom prst="rect">
+            <a:avLst/>
+          </a:prstGeom>
+          <a:noFill/>
+          <a:ln/>
+        </p:spPr>
+        <p:txBody>
+          <a:bodyPr wrap="square" lIns="0" tIns="0" rIns="0" bIns="0" rtlCol="0" anchor="t"/>
+          <a:lstStyle/>
+          <a:p>
+            <a:pPr algn="ctr" indent="0" marL="0">
               <a:spcBef>
                 <a:spcPts val="400"/>
               </a:spcBef>
@@ -14075,11 +14342,11 @@
                 <a:solidFill>
                   <a:srgbClr val="3D5A73"/>
                 </a:solidFill>
-                <a:latin typeface="Noto Serif SC" pitchFamily="34" charset="0"/>
-                <a:ea typeface="Noto Serif SC" pitchFamily="34" charset="-122"/>
-                <a:cs typeface="Noto Serif SC" pitchFamily="34" charset="-120"/>
-              </a:rPr>
-              <a:t>举一个中文例子</a:t>
+                <a:latin typeface="Noto Sans" pitchFamily="34" charset="0"/>
+                <a:ea typeface="Noto Sans" pitchFamily="34" charset="-122"/>
+                <a:cs typeface="Noto Sans" pitchFamily="34" charset="-120"/>
+              </a:rPr>
+              <a:t>xuè</a:t>
             </a:r>
             <a:endParaRPr lang="en-US" sz="1500" dirty="0"/>
           </a:p>
@@ -14093,18 +14360,102 @@
         </p:nvSpPr>
         <p:spPr>
           <a:xfrm>
-            <a:off x="609600" y="2629495"/>
-            <a:ext cx="10972800" cy="721816"/>
+            <a:off x="3461766" y="3491508"/>
+            <a:ext cx="2487168" cy="247650"/>
+          </a:xfrm>
+          <a:prstGeom prst="rect">
+            <a:avLst/>
+          </a:prstGeom>
+          <a:noFill/>
+          <a:ln/>
+        </p:spPr>
+        <p:txBody>
+          <a:bodyPr wrap="square" lIns="0" tIns="0" rIns="0" bIns="0" rtlCol="0" anchor="t"/>
+          <a:lstStyle/>
+          <a:p>
+            <a:pPr algn="ctr" indent="0" marL="0">
+              <a:spcBef>
+                <a:spcPts val="100"/>
+              </a:spcBef>
+              <a:buNone/>
+            </a:pPr>
+            <a:r>
+              <a:rPr lang="en-US" sz="1400" dirty="0">
+                <a:solidFill>
+                  <a:srgbClr val="4B545C"/>
+                </a:solidFill>
+                <a:latin typeface="Noto Sans" pitchFamily="34" charset="0"/>
+                <a:ea typeface="Noto Sans" pitchFamily="34" charset="-122"/>
+                <a:cs typeface="Noto Sans" pitchFamily="34" charset="-120"/>
+              </a:rPr>
+              <a:t>blood</a:t>
+            </a:r>
+            <a:endParaRPr lang="en-US" sz="1400" dirty="0"/>
+          </a:p>
+        </p:txBody>
+      </p:sp>
+      <p:sp>
+        <p:nvSpPr>
+          <p:cNvPr id="18" name="Text 16"/>
+          <p:cNvSpPr/>
+          <p:nvPr/>
+        </p:nvSpPr>
+        <p:spPr>
+          <a:xfrm>
+            <a:off x="3461766" y="3802559"/>
+            <a:ext cx="2487168" cy="200025"/>
+          </a:xfrm>
+          <a:prstGeom prst="rect">
+            <a:avLst/>
+          </a:prstGeom>
+          <a:noFill/>
+          <a:ln/>
+        </p:spPr>
+        <p:txBody>
+          <a:bodyPr wrap="square" lIns="0" tIns="0" rIns="0" bIns="0" rtlCol="0" anchor="t"/>
+          <a:lstStyle/>
+          <a:p>
+            <a:pPr algn="ctr" indent="0" marL="0">
+              <a:spcBef>
+                <a:spcPts val="500"/>
+              </a:spcBef>
+              <a:buNone/>
+            </a:pPr>
+            <a:r>
+              <a:rPr lang="en-US" sz="1100" dirty="0">
+                <a:solidFill>
+                  <a:srgbClr val="6E7780"/>
+                </a:solidFill>
+                <a:latin typeface="Noto Sans" pitchFamily="34" charset="0"/>
+                <a:ea typeface="Noto Sans" pitchFamily="34" charset="-122"/>
+                <a:cs typeface="Noto Sans" pitchFamily="34" charset="-120"/>
+              </a:rPr>
+              <a:t>第十五课 p.147</a:t>
+            </a:r>
+            <a:endParaRPr lang="en-US" sz="1100" dirty="0"/>
+          </a:p>
+        </p:txBody>
+      </p:sp>
+      <p:sp>
+        <p:nvSpPr>
+          <p:cNvPr id="19" name="Text 17"/>
+          <p:cNvSpPr/>
+          <p:nvPr/>
+        </p:nvSpPr>
+        <p:spPr>
+          <a:xfrm>
+            <a:off x="6172200" y="2426791"/>
+            <a:ext cx="2628900" cy="1721793"/>
           </a:xfrm>
           <a:prstGeom prst="roundRect">
             <a:avLst>
-              <a:gd name="adj" fmla="val 8797"/>
+              <a:gd name="adj" fmla="val 3688"/>
             </a:avLst>
           </a:prstGeom>
           <a:solidFill>
             <a:srgbClr val="E6EAEB"/>
           </a:solidFill>
-          <a:ln w="9525">
+          <a:ln w="19050">
             <a:solidFill>
               <a:srgbClr val="D5DBDD"/>
             </a:solidFill>
@@ -14123,110 +14474,68 @@
       </p:sp>
       <p:sp>
         <p:nvSpPr>
-          <p:cNvPr id="18" name="Text 16"/>
-          <p:cNvSpPr/>
-          <p:nvPr/>
-        </p:nvSpPr>
-        <p:spPr>
-          <a:xfrm>
-            <a:off x="796826" y="2702421"/>
-            <a:ext cx="246075" cy="259110"/>
-          </a:xfrm>
-          <a:prstGeom prst="rect">
-            <a:avLst/>
-          </a:prstGeom>
-          <a:noFill/>
-          <a:ln/>
-        </p:spPr>
-        <p:txBody>
-          <a:bodyPr wrap="square" lIns="0" tIns="0" rIns="0" bIns="0" rtlCol="0" anchor="t"/>
-          <a:lstStyle/>
-          <a:p>
-            <a:pPr algn="l" indent="0" marL="0">
+          <p:cNvPr id="20" name="Text 18"/>
+          <p:cNvSpPr/>
+          <p:nvPr/>
+        </p:nvSpPr>
+        <p:spPr>
+          <a:xfrm>
+            <a:off x="6243066" y="2585442"/>
+            <a:ext cx="2487168" cy="575965"/>
+          </a:xfrm>
+          <a:prstGeom prst="rect">
+            <a:avLst/>
+          </a:prstGeom>
+          <a:noFill/>
+          <a:ln/>
+        </p:spPr>
+        <p:txBody>
+          <a:bodyPr wrap="square" lIns="0" tIns="0" rIns="0" bIns="0" rtlCol="0" anchor="t"/>
+          <a:lstStyle/>
+          <a:p>
+            <a:pPr algn="ctr" indent="0" marL="0">
               <a:lnSpc>
-                <a:spcPts val="2040"/>
+                <a:spcPts val="4536"/>
               </a:lnSpc>
               <a:buNone/>
             </a:pPr>
             <a:r>
-              <a:rPr lang="en-US" sz="1700" b="1" dirty="0">
-                <a:solidFill>
-                  <a:srgbClr val="B05B3B"/>
+              <a:rPr lang="en-US" sz="4200" b="1" dirty="0">
+                <a:solidFill>
+                  <a:srgbClr val="262B30"/>
                 </a:solidFill>
                 <a:latin typeface="Noto Serif SC" pitchFamily="34" charset="0"/>
                 <a:ea typeface="Noto Serif SC" pitchFamily="34" charset="-122"/>
                 <a:cs typeface="Noto Serif SC" pitchFamily="34" charset="-120"/>
               </a:rPr>
-              <a:t>3</a:t>
-            </a:r>
-            <a:endParaRPr lang="en-US" sz="1700" dirty="0"/>
-          </a:p>
-        </p:txBody>
-      </p:sp>
-      <p:sp>
-        <p:nvSpPr>
-          <p:cNvPr id="19" name="Text 17"/>
-          <p:cNvSpPr/>
-          <p:nvPr/>
-        </p:nvSpPr>
-        <p:spPr>
-          <a:xfrm>
-            <a:off x="1203127" y="2702421"/>
-            <a:ext cx="2356920" cy="248989"/>
-          </a:xfrm>
-          <a:prstGeom prst="rect">
-            <a:avLst/>
-          </a:prstGeom>
-          <a:noFill/>
-          <a:ln/>
-        </p:spPr>
-        <p:txBody>
-          <a:bodyPr wrap="square" lIns="0" tIns="0" rIns="0" bIns="0" rtlCol="0" anchor="t"/>
-          <a:lstStyle/>
-          <a:p>
-            <a:pPr algn="l" indent="0" marL="0">
-              <a:lnSpc>
-                <a:spcPts val="1960"/>
-              </a:lnSpc>
-              <a:buNone/>
-            </a:pPr>
-            <a:r>
-              <a:rPr lang="en-US" sz="1400" dirty="0">
-                <a:solidFill>
-                  <a:srgbClr val="262B30"/>
-                </a:solidFill>
-                <a:latin typeface="Noto Sans" pitchFamily="34" charset="0"/>
-                <a:ea typeface="Noto Sans" pitchFamily="34" charset="-122"/>
-                <a:cs typeface="Noto Sans" pitchFamily="34" charset="-120"/>
-              </a:rPr>
-              <a:t>第三课　火车站就在马路对面</a:t>
-            </a:r>
-            <a:endParaRPr lang="en-US" sz="1400" dirty="0"/>
-          </a:p>
-        </p:txBody>
-      </p:sp>
-      <p:sp>
-        <p:nvSpPr>
-          <p:cNvPr id="20" name="Text 18"/>
-          <p:cNvSpPr/>
-          <p:nvPr/>
-        </p:nvSpPr>
-        <p:spPr>
-          <a:xfrm>
-            <a:off x="1203127" y="3002161"/>
-            <a:ext cx="2356920" cy="276225"/>
-          </a:xfrm>
-          <a:prstGeom prst="rect">
-            <a:avLst/>
-          </a:prstGeom>
-          <a:noFill/>
-          <a:ln/>
-        </p:spPr>
-        <p:txBody>
-          <a:bodyPr wrap="square" lIns="0" tIns="0" rIns="0" bIns="0" rtlCol="0" anchor="t"/>
-          <a:lstStyle/>
-          <a:p>
-            <a:pPr algn="l" indent="0" marL="0">
+              <a:t>习</a:t>
+            </a:r>
+            <a:endParaRPr lang="en-US" sz="4200" dirty="0"/>
+          </a:p>
+        </p:txBody>
+      </p:sp>
+      <p:sp>
+        <p:nvSpPr>
+          <p:cNvPr id="21" name="Text 19"/>
+          <p:cNvSpPr/>
+          <p:nvPr/>
+        </p:nvSpPr>
+        <p:spPr>
+          <a:xfrm>
+            <a:off x="6243066" y="3212157"/>
+            <a:ext cx="2487168" cy="266700"/>
+          </a:xfrm>
+          <a:prstGeom prst="rect">
+            <a:avLst/>
+          </a:prstGeom>
+          <a:noFill/>
+          <a:ln/>
+        </p:spPr>
+        <p:txBody>
+          <a:bodyPr wrap="square" lIns="0" tIns="0" rIns="0" bIns="0" rtlCol="0" anchor="t"/>
+          <a:lstStyle/>
+          <a:p>
+            <a:pPr algn="ctr" indent="0" marL="0">
               <a:spcBef>
                 <a:spcPts val="400"/>
               </a:spcBef>
@@ -14237,11 +14546,11 @@
                 <a:solidFill>
                   <a:srgbClr val="3D5A73"/>
                 </a:solidFill>
-                <a:latin typeface="Noto Serif SC" pitchFamily="34" charset="0"/>
-                <a:ea typeface="Noto Serif SC" pitchFamily="34" charset="-122"/>
-                <a:cs typeface="Noto Serif SC" pitchFamily="34" charset="-120"/>
-              </a:rPr>
-              <a:t>举一个中文例子</a:t>
+                <a:latin typeface="Noto Sans" pitchFamily="34" charset="0"/>
+                <a:ea typeface="Noto Sans" pitchFamily="34" charset="-122"/>
+                <a:cs typeface="Noto Sans" pitchFamily="34" charset="-120"/>
+              </a:rPr>
+              <a:t>xí</a:t>
             </a:r>
             <a:endParaRPr lang="en-US" sz="1500" dirty="0"/>
           </a:p>
@@ -14249,24 +14558,108 @@
       </p:sp>
       <p:sp>
         <p:nvSpPr>
-          <p:cNvPr id="21" name="Text 19"/>
-          <p:cNvSpPr/>
-          <p:nvPr/>
-        </p:nvSpPr>
-        <p:spPr>
-          <a:xfrm>
-            <a:off x="609600" y="3402062"/>
-            <a:ext cx="10972800" cy="721816"/>
+          <p:cNvPr id="22" name="Text 20"/>
+          <p:cNvSpPr/>
+          <p:nvPr/>
+        </p:nvSpPr>
+        <p:spPr>
+          <a:xfrm>
+            <a:off x="6243066" y="3491508"/>
+            <a:ext cx="2487168" cy="247650"/>
+          </a:xfrm>
+          <a:prstGeom prst="rect">
+            <a:avLst/>
+          </a:prstGeom>
+          <a:noFill/>
+          <a:ln/>
+        </p:spPr>
+        <p:txBody>
+          <a:bodyPr wrap="square" lIns="0" tIns="0" rIns="0" bIns="0" rtlCol="0" anchor="t"/>
+          <a:lstStyle/>
+          <a:p>
+            <a:pPr algn="ctr" indent="0" marL="0">
+              <a:spcBef>
+                <a:spcPts val="100"/>
+              </a:spcBef>
+              <a:buNone/>
+            </a:pPr>
+            <a:r>
+              <a:rPr lang="en-US" sz="1400" dirty="0">
+                <a:solidFill>
+                  <a:srgbClr val="4B545C"/>
+                </a:solidFill>
+                <a:latin typeface="Noto Sans" pitchFamily="34" charset="0"/>
+                <a:ea typeface="Noto Sans" pitchFamily="34" charset="-122"/>
+                <a:cs typeface="Noto Sans" pitchFamily="34" charset="-120"/>
+              </a:rPr>
+              <a:t>study</a:t>
+            </a:r>
+            <a:endParaRPr lang="en-US" sz="1400" dirty="0"/>
+          </a:p>
+        </p:txBody>
+      </p:sp>
+      <p:sp>
+        <p:nvSpPr>
+          <p:cNvPr id="23" name="Text 21"/>
+          <p:cNvSpPr/>
+          <p:nvPr/>
+        </p:nvSpPr>
+        <p:spPr>
+          <a:xfrm>
+            <a:off x="6243066" y="3802559"/>
+            <a:ext cx="2487168" cy="200025"/>
+          </a:xfrm>
+          <a:prstGeom prst="rect">
+            <a:avLst/>
+          </a:prstGeom>
+          <a:noFill/>
+          <a:ln/>
+        </p:spPr>
+        <p:txBody>
+          <a:bodyPr wrap="square" lIns="0" tIns="0" rIns="0" bIns="0" rtlCol="0" anchor="t"/>
+          <a:lstStyle/>
+          <a:p>
+            <a:pPr algn="ctr" indent="0" marL="0">
+              <a:spcBef>
+                <a:spcPts val="500"/>
+              </a:spcBef>
+              <a:buNone/>
+            </a:pPr>
+            <a:r>
+              <a:rPr lang="en-US" sz="1100" dirty="0">
+                <a:solidFill>
+                  <a:srgbClr val="6E7780"/>
+                </a:solidFill>
+                <a:latin typeface="Noto Sans" pitchFamily="34" charset="0"/>
+                <a:ea typeface="Noto Sans" pitchFamily="34" charset="-122"/>
+                <a:cs typeface="Noto Sans" pitchFamily="34" charset="-120"/>
+              </a:rPr>
+              <a:t>第十五课 p.147</a:t>
+            </a:r>
+            <a:endParaRPr lang="en-US" sz="1100" dirty="0"/>
+          </a:p>
+        </p:txBody>
+      </p:sp>
+      <p:sp>
+        <p:nvSpPr>
+          <p:cNvPr id="24" name="Text 22"/>
+          <p:cNvSpPr/>
+          <p:nvPr/>
+        </p:nvSpPr>
+        <p:spPr>
+          <a:xfrm>
+            <a:off x="8953500" y="2426791"/>
+            <a:ext cx="2628900" cy="1721793"/>
           </a:xfrm>
           <a:prstGeom prst="roundRect">
             <a:avLst>
-              <a:gd name="adj" fmla="val 8797"/>
+              <a:gd name="adj" fmla="val 3688"/>
             </a:avLst>
           </a:prstGeom>
           <a:solidFill>
             <a:srgbClr val="E6EAEB"/>
           </a:solidFill>
-          <a:ln w="9525">
+          <a:ln w="19050">
             <a:solidFill>
               <a:srgbClr val="D5DBDD"/>
             </a:solidFill>
@@ -14285,110 +14678,68 @@
       </p:sp>
       <p:sp>
         <p:nvSpPr>
-          <p:cNvPr id="22" name="Text 20"/>
-          <p:cNvSpPr/>
-          <p:nvPr/>
-        </p:nvSpPr>
-        <p:spPr>
-          <a:xfrm>
-            <a:off x="796826" y="3474988"/>
-            <a:ext cx="246075" cy="259110"/>
-          </a:xfrm>
-          <a:prstGeom prst="rect">
-            <a:avLst/>
-          </a:prstGeom>
-          <a:noFill/>
-          <a:ln/>
-        </p:spPr>
-        <p:txBody>
-          <a:bodyPr wrap="square" lIns="0" tIns="0" rIns="0" bIns="0" rtlCol="0" anchor="t"/>
-          <a:lstStyle/>
-          <a:p>
-            <a:pPr algn="l" indent="0" marL="0">
+          <p:cNvPr id="25" name="Text 23"/>
+          <p:cNvSpPr/>
+          <p:nvPr/>
+        </p:nvSpPr>
+        <p:spPr>
+          <a:xfrm>
+            <a:off x="9024366" y="2585442"/>
+            <a:ext cx="2487168" cy="575965"/>
+          </a:xfrm>
+          <a:prstGeom prst="rect">
+            <a:avLst/>
+          </a:prstGeom>
+          <a:noFill/>
+          <a:ln/>
+        </p:spPr>
+        <p:txBody>
+          <a:bodyPr wrap="square" lIns="0" tIns="0" rIns="0" bIns="0" rtlCol="0" anchor="t"/>
+          <a:lstStyle/>
+          <a:p>
+            <a:pPr algn="ctr" indent="0" marL="0">
               <a:lnSpc>
-                <a:spcPts val="2040"/>
+                <a:spcPts val="4536"/>
               </a:lnSpc>
               <a:buNone/>
             </a:pPr>
             <a:r>
-              <a:rPr lang="en-US" sz="1700" b="1" dirty="0">
-                <a:solidFill>
-                  <a:srgbClr val="B05B3B"/>
+              <a:rPr lang="en-US" sz="4200" b="1" dirty="0">
+                <a:solidFill>
+                  <a:srgbClr val="262B30"/>
                 </a:solidFill>
                 <a:latin typeface="Noto Serif SC" pitchFamily="34" charset="0"/>
                 <a:ea typeface="Noto Serif SC" pitchFamily="34" charset="-122"/>
                 <a:cs typeface="Noto Serif SC" pitchFamily="34" charset="-120"/>
               </a:rPr>
-              <a:t>4</a:t>
-            </a:r>
-            <a:endParaRPr lang="en-US" sz="1700" dirty="0"/>
-          </a:p>
-        </p:txBody>
-      </p:sp>
-      <p:sp>
-        <p:nvSpPr>
-          <p:cNvPr id="23" name="Text 21"/>
-          <p:cNvSpPr/>
-          <p:nvPr/>
-        </p:nvSpPr>
-        <p:spPr>
-          <a:xfrm>
-            <a:off x="1203127" y="3474988"/>
-            <a:ext cx="2900684" cy="248989"/>
-          </a:xfrm>
-          <a:prstGeom prst="rect">
-            <a:avLst/>
-          </a:prstGeom>
-          <a:noFill/>
-          <a:ln/>
-        </p:spPr>
-        <p:txBody>
-          <a:bodyPr wrap="square" lIns="0" tIns="0" rIns="0" bIns="0" rtlCol="0" anchor="t"/>
-          <a:lstStyle/>
-          <a:p>
-            <a:pPr algn="l" indent="0" marL="0">
-              <a:lnSpc>
-                <a:spcPts val="1960"/>
-              </a:lnSpc>
-              <a:buNone/>
-            </a:pPr>
-            <a:r>
-              <a:rPr lang="en-US" sz="1400" dirty="0">
-                <a:solidFill>
-                  <a:srgbClr val="262B30"/>
-                </a:solidFill>
-                <a:latin typeface="Noto Sans" pitchFamily="34" charset="0"/>
-                <a:ea typeface="Noto Sans" pitchFamily="34" charset="-122"/>
-                <a:cs typeface="Noto Sans" pitchFamily="34" charset="-120"/>
-              </a:rPr>
-              <a:t>第四课　我先坐船，然后坐公共汽车</a:t>
-            </a:r>
-            <a:endParaRPr lang="en-US" sz="1400" dirty="0"/>
-          </a:p>
-        </p:txBody>
-      </p:sp>
-      <p:sp>
-        <p:nvSpPr>
-          <p:cNvPr id="24" name="Text 22"/>
-          <p:cNvSpPr/>
-          <p:nvPr/>
-        </p:nvSpPr>
-        <p:spPr>
-          <a:xfrm>
-            <a:off x="1203127" y="3774728"/>
-            <a:ext cx="2900684" cy="276225"/>
-          </a:xfrm>
-          <a:prstGeom prst="rect">
-            <a:avLst/>
-          </a:prstGeom>
-          <a:noFill/>
-          <a:ln/>
-        </p:spPr>
-        <p:txBody>
-          <a:bodyPr wrap="square" lIns="0" tIns="0" rIns="0" bIns="0" rtlCol="0" anchor="t"/>
-          <a:lstStyle/>
-          <a:p>
-            <a:pPr algn="l" indent="0" marL="0">
+              <a:t>山</a:t>
+            </a:r>
+            <a:endParaRPr lang="en-US" sz="4200" dirty="0"/>
+          </a:p>
+        </p:txBody>
+      </p:sp>
+      <p:sp>
+        <p:nvSpPr>
+          <p:cNvPr id="26" name="Text 24"/>
+          <p:cNvSpPr/>
+          <p:nvPr/>
+        </p:nvSpPr>
+        <p:spPr>
+          <a:xfrm>
+            <a:off x="9024366" y="3212157"/>
+            <a:ext cx="2487168" cy="266700"/>
+          </a:xfrm>
+          <a:prstGeom prst="rect">
+            <a:avLst/>
+          </a:prstGeom>
+          <a:noFill/>
+          <a:ln/>
+        </p:spPr>
+        <p:txBody>
+          <a:bodyPr wrap="square" lIns="0" tIns="0" rIns="0" bIns="0" rtlCol="0" anchor="t"/>
+          <a:lstStyle/>
+          <a:p>
+            <a:pPr algn="ctr" indent="0" marL="0">
               <a:spcBef>
                 <a:spcPts val="400"/>
               </a:spcBef>
@@ -14399,11 +14750,11 @@
                 <a:solidFill>
                   <a:srgbClr val="3D5A73"/>
                 </a:solidFill>
-                <a:latin typeface="Noto Serif SC" pitchFamily="34" charset="0"/>
-                <a:ea typeface="Noto Serif SC" pitchFamily="34" charset="-122"/>
-                <a:cs typeface="Noto Serif SC" pitchFamily="34" charset="-120"/>
-              </a:rPr>
-              <a:t>举一个中文例子</a:t>
+                <a:latin typeface="Noto Sans" pitchFamily="34" charset="0"/>
+                <a:ea typeface="Noto Sans" pitchFamily="34" charset="-122"/>
+                <a:cs typeface="Noto Sans" pitchFamily="34" charset="-120"/>
+              </a:rPr>
+              <a:t>shān</a:t>
             </a:r>
             <a:endParaRPr lang="en-US" sz="1500" dirty="0"/>
           </a:p>
@@ -14411,119 +14762,41 @@
       </p:sp>
       <p:sp>
         <p:nvSpPr>
-          <p:cNvPr id="25" name="Text 23"/>
-          <p:cNvSpPr/>
-          <p:nvPr/>
-        </p:nvSpPr>
-        <p:spPr>
-          <a:xfrm>
-            <a:off x="609600" y="4174629"/>
-            <a:ext cx="10972800" cy="721816"/>
-          </a:xfrm>
-          <a:prstGeom prst="roundRect">
-            <a:avLst>
-              <a:gd name="adj" fmla="val 8797"/>
-            </a:avLst>
-          </a:prstGeom>
-          <a:solidFill>
-            <a:srgbClr val="E6EAEB"/>
-          </a:solidFill>
-          <a:ln w="9525">
-            <a:solidFill>
-              <a:srgbClr val="D5DBDD"/>
-            </a:solidFill>
-          </a:ln>
-        </p:spPr>
-        <p:txBody>
-          <a:bodyPr wrap="square" rtlCol="0" anchor="ctr"/>
-          <a:lstStyle/>
-          <a:p>
-            <a:pPr indent="0" marL="0">
-              <a:buNone/>
-            </a:pPr>
-            <a:endParaRPr lang="en-US" dirty="0"/>
-          </a:p>
-        </p:txBody>
-      </p:sp>
-      <p:sp>
-        <p:nvSpPr>
-          <p:cNvPr id="26" name="Text 24"/>
-          <p:cNvSpPr/>
-          <p:nvPr/>
-        </p:nvSpPr>
-        <p:spPr>
-          <a:xfrm>
-            <a:off x="796826" y="4247555"/>
-            <a:ext cx="246075" cy="259110"/>
-          </a:xfrm>
-          <a:prstGeom prst="rect">
-            <a:avLst/>
-          </a:prstGeom>
-          <a:noFill/>
-          <a:ln/>
-        </p:spPr>
-        <p:txBody>
-          <a:bodyPr wrap="square" lIns="0" tIns="0" rIns="0" bIns="0" rtlCol="0" anchor="t"/>
-          <a:lstStyle/>
-          <a:p>
-            <a:pPr algn="l" indent="0" marL="0">
-              <a:lnSpc>
-                <a:spcPts val="2040"/>
-              </a:lnSpc>
-              <a:buNone/>
-            </a:pPr>
-            <a:r>
-              <a:rPr lang="en-US" sz="1700" b="1" dirty="0">
-                <a:solidFill>
-                  <a:srgbClr val="B05B3B"/>
-                </a:solidFill>
-                <a:latin typeface="Noto Serif SC" pitchFamily="34" charset="0"/>
-                <a:ea typeface="Noto Serif SC" pitchFamily="34" charset="-122"/>
-                <a:cs typeface="Noto Serif SC" pitchFamily="34" charset="-120"/>
-              </a:rPr>
-              <a:t>5</a:t>
-            </a:r>
-            <a:endParaRPr lang="en-US" sz="1700" dirty="0"/>
-          </a:p>
-        </p:txBody>
-      </p:sp>
-      <p:sp>
-        <p:nvSpPr>
           <p:cNvPr id="27" name="Text 25"/>
           <p:cNvSpPr/>
           <p:nvPr/>
         </p:nvSpPr>
         <p:spPr>
           <a:xfrm>
-            <a:off x="1203127" y="4247555"/>
-            <a:ext cx="3673066" cy="248989"/>
-          </a:xfrm>
-          <a:prstGeom prst="rect">
-            <a:avLst/>
-          </a:prstGeom>
-          <a:noFill/>
-          <a:ln/>
-        </p:spPr>
-        <p:txBody>
-          <a:bodyPr wrap="square" lIns="0" tIns="0" rIns="0" bIns="0" rtlCol="0" anchor="t"/>
-          <a:lstStyle/>
-          <a:p>
-            <a:pPr algn="l" indent="0" marL="0">
-              <a:lnSpc>
-                <a:spcPts val="1960"/>
-              </a:lnSpc>
+            <a:off x="9024366" y="3491508"/>
+            <a:ext cx="2487168" cy="247650"/>
+          </a:xfrm>
+          <a:prstGeom prst="rect">
+            <a:avLst/>
+          </a:prstGeom>
+          <a:noFill/>
+          <a:ln/>
+        </p:spPr>
+        <p:txBody>
+          <a:bodyPr wrap="square" lIns="0" tIns="0" rIns="0" bIns="0" rtlCol="0" anchor="t"/>
+          <a:lstStyle/>
+          <a:p>
+            <a:pPr algn="ctr" indent="0" marL="0">
+              <a:spcBef>
+                <a:spcPts val="100"/>
+              </a:spcBef>
               <a:buNone/>
             </a:pPr>
             <a:r>
               <a:rPr lang="en-US" sz="1400" dirty="0">
                 <a:solidFill>
-                  <a:srgbClr val="262B30"/>
-                </a:solidFill>
-                <a:latin typeface="Noto Sans" pitchFamily="34" charset="0"/>
-                <a:ea typeface="Noto Sans" pitchFamily="34" charset="-122"/>
-                <a:cs typeface="Noto Sans" pitchFamily="34" charset="-120"/>
-              </a:rPr>
-              <a:t>第五课　要坐多长时间？　—— 大约二十分钟</a:t>
+                  <a:srgbClr val="4B545C"/>
+                </a:solidFill>
+                <a:latin typeface="Noto Sans" pitchFamily="34" charset="0"/>
+                <a:ea typeface="Noto Sans" pitchFamily="34" charset="-122"/>
+                <a:cs typeface="Noto Sans" pitchFamily="34" charset="-120"/>
+              </a:rPr>
+              <a:t>mountain</a:t>
             </a:r>
             <a:endParaRPr lang="en-US" sz="1400" dirty="0"/>
           </a:p>
@@ -14537,37 +14810,37 @@
         </p:nvSpPr>
         <p:spPr>
           <a:xfrm>
-            <a:off x="1203127" y="4547295"/>
-            <a:ext cx="3673066" cy="276225"/>
-          </a:xfrm>
-          <a:prstGeom prst="rect">
-            <a:avLst/>
-          </a:prstGeom>
-          <a:noFill/>
-          <a:ln/>
-        </p:spPr>
-        <p:txBody>
-          <a:bodyPr wrap="square" lIns="0" tIns="0" rIns="0" bIns="0" rtlCol="0" anchor="t"/>
-          <a:lstStyle/>
-          <a:p>
-            <a:pPr algn="l" indent="0" marL="0">
+            <a:off x="9024366" y="3802559"/>
+            <a:ext cx="2487168" cy="200025"/>
+          </a:xfrm>
+          <a:prstGeom prst="rect">
+            <a:avLst/>
+          </a:prstGeom>
+          <a:noFill/>
+          <a:ln/>
+        </p:spPr>
+        <p:txBody>
+          <a:bodyPr wrap="square" lIns="0" tIns="0" rIns="0" bIns="0" rtlCol="0" anchor="t"/>
+          <a:lstStyle/>
+          <a:p>
+            <a:pPr algn="ctr" indent="0" marL="0">
               <a:spcBef>
-                <a:spcPts val="400"/>
+                <a:spcPts val="500"/>
               </a:spcBef>
               <a:buNone/>
             </a:pPr>
             <a:r>
-              <a:rPr lang="en-US" sz="1500" b="1" dirty="0">
-                <a:solidFill>
-                  <a:srgbClr val="3D5A73"/>
-                </a:solidFill>
-                <a:latin typeface="Noto Serif SC" pitchFamily="34" charset="0"/>
-                <a:ea typeface="Noto Serif SC" pitchFamily="34" charset="-122"/>
-                <a:cs typeface="Noto Serif SC" pitchFamily="34" charset="-120"/>
-              </a:rPr>
-              <a:t>举一个中文例子</a:t>
-            </a:r>
-            <a:endParaRPr lang="en-US" sz="1500" dirty="0"/>
+              <a:rPr lang="en-US" sz="1100" dirty="0">
+                <a:solidFill>
+                  <a:srgbClr val="6E7780"/>
+                </a:solidFill>
+                <a:latin typeface="Noto Sans" pitchFamily="34" charset="0"/>
+                <a:ea typeface="Noto Sans" pitchFamily="34" charset="-122"/>
+                <a:cs typeface="Noto Sans" pitchFamily="34" charset="-120"/>
+              </a:rPr>
+              <a:t>第十五课 p.147</a:t>
+            </a:r>
+            <a:endParaRPr lang="en-US" sz="1100" dirty="0"/>
           </a:p>
         </p:txBody>
       </p:sp>
@@ -14579,170 +14852,8 @@
         </p:nvSpPr>
         <p:spPr>
           <a:xfrm>
-            <a:off x="609600" y="4947196"/>
-            <a:ext cx="10972800" cy="721816"/>
-          </a:xfrm>
-          <a:prstGeom prst="roundRect">
-            <a:avLst>
-              <a:gd name="adj" fmla="val 8797"/>
-            </a:avLst>
-          </a:prstGeom>
-          <a:solidFill>
-            <a:srgbClr val="E6EAEB"/>
-          </a:solidFill>
-          <a:ln w="9525">
-            <a:solidFill>
-              <a:srgbClr val="D5DBDD"/>
-            </a:solidFill>
-          </a:ln>
-        </p:spPr>
-        <p:txBody>
-          <a:bodyPr wrap="square" rtlCol="0" anchor="ctr"/>
-          <a:lstStyle/>
-          <a:p>
-            <a:pPr indent="0" marL="0">
-              <a:buNone/>
-            </a:pPr>
-            <a:endParaRPr lang="en-US" dirty="0"/>
-          </a:p>
-        </p:txBody>
-      </p:sp>
-      <p:sp>
-        <p:nvSpPr>
-          <p:cNvPr id="30" name="Text 28"/>
-          <p:cNvSpPr/>
-          <p:nvPr/>
-        </p:nvSpPr>
-        <p:spPr>
-          <a:xfrm>
-            <a:off x="796826" y="5020121"/>
-            <a:ext cx="246075" cy="259110"/>
-          </a:xfrm>
-          <a:prstGeom prst="rect">
-            <a:avLst/>
-          </a:prstGeom>
-          <a:noFill/>
-          <a:ln/>
-        </p:spPr>
-        <p:txBody>
-          <a:bodyPr wrap="square" lIns="0" tIns="0" rIns="0" bIns="0" rtlCol="0" anchor="t"/>
-          <a:lstStyle/>
-          <a:p>
-            <a:pPr algn="l" indent="0" marL="0">
-              <a:lnSpc>
-                <a:spcPts val="2040"/>
-              </a:lnSpc>
-              <a:buNone/>
-            </a:pPr>
-            <a:r>
-              <a:rPr lang="en-US" sz="1700" b="1" dirty="0">
-                <a:solidFill>
-                  <a:srgbClr val="B05B3B"/>
-                </a:solidFill>
-                <a:latin typeface="Noto Serif SC" pitchFamily="34" charset="0"/>
-                <a:ea typeface="Noto Serif SC" pitchFamily="34" charset="-122"/>
-                <a:cs typeface="Noto Serif SC" pitchFamily="34" charset="-120"/>
-              </a:rPr>
-              <a:t>6</a:t>
-            </a:r>
-            <a:endParaRPr lang="en-US" sz="1700" dirty="0"/>
-          </a:p>
-        </p:txBody>
-      </p:sp>
-      <p:sp>
-        <p:nvSpPr>
-          <p:cNvPr id="31" name="Text 29"/>
-          <p:cNvSpPr/>
-          <p:nvPr/>
-        </p:nvSpPr>
-        <p:spPr>
-          <a:xfrm>
-            <a:off x="1203127" y="5020121"/>
-            <a:ext cx="3263345" cy="248989"/>
-          </a:xfrm>
-          <a:prstGeom prst="rect">
-            <a:avLst/>
-          </a:prstGeom>
-          <a:noFill/>
-          <a:ln/>
-        </p:spPr>
-        <p:txBody>
-          <a:bodyPr wrap="square" lIns="0" tIns="0" rIns="0" bIns="0" rtlCol="0" anchor="t"/>
-          <a:lstStyle/>
-          <a:p>
-            <a:pPr algn="l" indent="0" marL="0">
-              <a:lnSpc>
-                <a:spcPts val="1960"/>
-              </a:lnSpc>
-              <a:buNone/>
-            </a:pPr>
-            <a:r>
-              <a:rPr lang="en-US" sz="1400" dirty="0">
-                <a:solidFill>
-                  <a:srgbClr val="262B30"/>
-                </a:solidFill>
-                <a:latin typeface="Noto Sans" pitchFamily="34" charset="0"/>
-                <a:ea typeface="Noto Sans" pitchFamily="34" charset="-122"/>
-                <a:cs typeface="Noto Sans" pitchFamily="34" charset="-120"/>
-              </a:rPr>
-              <a:t>第六课　水果店、书店、理发店、快餐店</a:t>
-            </a:r>
-            <a:endParaRPr lang="en-US" sz="1400" dirty="0"/>
-          </a:p>
-        </p:txBody>
-      </p:sp>
-      <p:sp>
-        <p:nvSpPr>
-          <p:cNvPr id="32" name="Text 30"/>
-          <p:cNvSpPr/>
-          <p:nvPr/>
-        </p:nvSpPr>
-        <p:spPr>
-          <a:xfrm>
-            <a:off x="1203127" y="5319861"/>
-            <a:ext cx="3263345" cy="276225"/>
-          </a:xfrm>
-          <a:prstGeom prst="rect">
-            <a:avLst/>
-          </a:prstGeom>
-          <a:noFill/>
-          <a:ln/>
-        </p:spPr>
-        <p:txBody>
-          <a:bodyPr wrap="square" lIns="0" tIns="0" rIns="0" bIns="0" rtlCol="0" anchor="t"/>
-          <a:lstStyle/>
-          <a:p>
-            <a:pPr algn="l" indent="0" marL="0">
-              <a:spcBef>
-                <a:spcPts val="400"/>
-              </a:spcBef>
-              <a:buNone/>
-            </a:pPr>
-            <a:r>
-              <a:rPr lang="en-US" sz="1500" b="1" dirty="0">
-                <a:solidFill>
-                  <a:srgbClr val="3D5A73"/>
-                </a:solidFill>
-                <a:latin typeface="Noto Serif SC" pitchFamily="34" charset="0"/>
-                <a:ea typeface="Noto Serif SC" pitchFamily="34" charset="-122"/>
-                <a:cs typeface="Noto Serif SC" pitchFamily="34" charset="-120"/>
-              </a:rPr>
-              <a:t>举一个中文例子</a:t>
-            </a:r>
-            <a:endParaRPr lang="en-US" sz="1500" dirty="0"/>
-          </a:p>
-        </p:txBody>
-      </p:sp>
-      <p:sp>
-        <p:nvSpPr>
-          <p:cNvPr id="33" name="Text 31"/>
-          <p:cNvSpPr/>
-          <p:nvPr/>
-        </p:nvSpPr>
-        <p:spPr>
-          <a:xfrm>
-            <a:off x="609600" y="5770513"/>
-            <a:ext cx="11192256" cy="228600"/>
+            <a:off x="609600" y="4300984"/>
+            <a:ext cx="11192256" cy="457200"/>
           </a:xfrm>
           <a:prstGeom prst="rect">
             <a:avLst/>
@@ -14759,7 +14870,7 @@
                 <a:spcPts val="1800"/>
               </a:lnSpc>
               <a:spcBef>
-                <a:spcPts val="800"/>
+                <a:spcPts val="1200"/>
               </a:spcBef>
               <a:buNone/>
             </a:pPr>
@@ -14772,7 +14883,51 @@
                 <a:ea typeface="Noto Sans" pitchFamily="34" charset="-122"/>
                 <a:cs typeface="Noto Sans" pitchFamily="34" charset="-120"/>
               </a:rPr>
-              <a:t>今天不是只看今天的三条——六节课一条一条过。每一条请一个同学用中文举例，说得出来才算学会。</a:t>
+              <a:t>这四个字课本教过，我们一直没碰。现在看九十秒——下面两轮要用，单元测验也要用。第十三课的</a:t>
+            </a:r>
+            <a:r>
+              <a:rPr lang="en-US" sz="1200" b="1" dirty="0">
+                <a:solidFill>
+                  <a:srgbClr val="6E7780"/>
+                </a:solidFill>
+                <a:latin typeface="Noto Sans" pitchFamily="34" charset="0"/>
+                <a:ea typeface="Noto Sans" pitchFamily="34" charset="-122"/>
+                <a:cs typeface="Noto Sans" pitchFamily="34" charset="-120"/>
+              </a:rPr>
+              <a:t>光 金 匕 入</a:t>
+            </a:r>
+            <a:r>
+              <a:rPr lang="en-US" sz="1200" dirty="0">
+                <a:solidFill>
+                  <a:srgbClr val="6E7780"/>
+                </a:solidFill>
+                <a:latin typeface="Noto Sans" pitchFamily="34" charset="0"/>
+                <a:ea typeface="Noto Sans" pitchFamily="34" charset="-122"/>
+                <a:cs typeface="Noto Sans" pitchFamily="34" charset="-120"/>
+              </a:rPr>
+              <a:t>、第十四课的</a:t>
+            </a:r>
+            <a:r>
+              <a:rPr lang="en-US" sz="1200" b="1" dirty="0">
+                <a:solidFill>
+                  <a:srgbClr val="6E7780"/>
+                </a:solidFill>
+                <a:latin typeface="Noto Sans" pitchFamily="34" charset="0"/>
+                <a:ea typeface="Noto Sans" pitchFamily="34" charset="-122"/>
+                <a:cs typeface="Noto Sans" pitchFamily="34" charset="-120"/>
+              </a:rPr>
+              <a:t>井 亡 乌 勺</a:t>
+            </a:r>
+            <a:r>
+              <a:rPr lang="en-US" sz="1200" dirty="0">
+                <a:solidFill>
+                  <a:srgbClr val="6E7780"/>
+                </a:solidFill>
+                <a:latin typeface="Noto Sans" pitchFamily="34" charset="0"/>
+                <a:ea typeface="Noto Sans" pitchFamily="34" charset="-122"/>
+                <a:cs typeface="Noto Sans" pitchFamily="34" charset="-120"/>
+              </a:rPr>
+              <a:t>也一起回忆一下，一共十二个。</a:t>
             </a:r>
             <a:endParaRPr lang="en-US" sz="1200" dirty="0"/>
           </a:p>
@@ -14872,7 +15027,7 @@
         <p:spPr>
           <a:xfrm>
             <a:off x="507950" y="176213"/>
-            <a:ext cx="1785830" cy="180975"/>
+            <a:ext cx="2644893" cy="180975"/>
           </a:xfrm>
           <a:prstGeom prst="rect">
             <a:avLst/>
@@ -14896,7 +15051,7 @@
                 <a:ea typeface="Noto Sans" pitchFamily="34" charset="-122"/>
                 <a:cs typeface="Noto Sans" pitchFamily="34" charset="-120"/>
               </a:rPr>
-              <a:t>43–50 MIN · PLENARY</a:t>
+              <a:t>20–43 MIN · FLEXIBLE PRACTICE</a:t>
             </a:r>
             <a:endParaRPr lang="en-US" sz="1000" dirty="0"/>
           </a:p>
@@ -14910,8 +15065,8 @@
         </p:nvSpPr>
         <p:spPr>
           <a:xfrm>
-            <a:off x="2544217" y="166688"/>
-            <a:ext cx="901113" cy="200025"/>
+            <a:off x="3386435" y="166688"/>
+            <a:ext cx="1656796" cy="200025"/>
           </a:xfrm>
           <a:prstGeom prst="rect">
             <a:avLst/>
@@ -14935,7 +15090,7 @@
                 <a:ea typeface="Noto Sans" pitchFamily="34" charset="-122"/>
                 <a:cs typeface="Noto Sans" pitchFamily="34" charset="-120"/>
               </a:rPr>
-              <a:t>自评 · 小白板</a:t>
+              <a:t>游戏 · 第二步 · 部首抢答</a:t>
             </a:r>
             <a:endParaRPr lang="en-US" sz="1100" dirty="0"/>
           </a:p>
@@ -14949,8 +15104,8 @@
         </p:nvSpPr>
         <p:spPr>
           <a:xfrm>
-            <a:off x="11183243" y="176213"/>
-            <a:ext cx="510823" cy="180975"/>
+            <a:off x="11182796" y="176213"/>
+            <a:ext cx="511278" cy="180975"/>
           </a:xfrm>
           <a:prstGeom prst="rect">
             <a:avLst/>
@@ -14974,7 +15129,7 @@
                 <a:ea typeface="Noto Sans" pitchFamily="34" charset="-122"/>
                 <a:cs typeface="Noto Sans" pitchFamily="34" charset="-120"/>
               </a:rPr>
-              <a:t>24 / 25</a:t>
+              <a:t>24 / 28</a:t>
             </a:r>
             <a:endParaRPr lang="en-US" sz="1000" dirty="0"/>
           </a:p>
@@ -15018,7 +15173,7 @@
         </p:nvSpPr>
         <p:spPr>
           <a:xfrm>
-            <a:off x="609600" y="1725960"/>
+            <a:off x="609600" y="1695599"/>
             <a:ext cx="11192256" cy="200025"/>
           </a:xfrm>
           <a:prstGeom prst="rect">
@@ -15043,7 +15198,7 @@
                 <a:ea typeface="Noto Sans" pitchFamily="34" charset="-122"/>
                 <a:cs typeface="Noto Sans" pitchFamily="34" charset="-120"/>
               </a:rPr>
-              <a:t>词汇总览 · 这一课的生词 · STAYS UP WHILE YOU WORK</a:t>
+              <a:t>游戏 · 第一轮 · 写部首 · 四人一组，写在纸上</a:t>
             </a:r>
             <a:endParaRPr lang="en-US" sz="1100" dirty="0"/>
           </a:p>
@@ -15057,18 +15212,63 @@
         </p:nvSpPr>
         <p:spPr>
           <a:xfrm>
-            <a:off x="609600" y="2027486"/>
-            <a:ext cx="2052340" cy="1298377"/>
+            <a:off x="609600" y="1895624"/>
+            <a:ext cx="11192256" cy="342900"/>
+          </a:xfrm>
+          <a:prstGeom prst="rect">
+            <a:avLst/>
+          </a:prstGeom>
+          <a:noFill/>
+          <a:ln/>
+        </p:spPr>
+        <p:txBody>
+          <a:bodyPr wrap="square" lIns="0" tIns="0" rIns="0" bIns="0" rtlCol="0" anchor="t"/>
+          <a:lstStyle/>
+          <a:p>
+            <a:pPr algn="l" indent="0" marL="0">
+              <a:lnSpc>
+                <a:spcPts val="2700"/>
+              </a:lnSpc>
+              <a:spcAft>
+                <a:spcPts val="400"/>
+              </a:spcAft>
+              <a:buNone/>
+            </a:pPr>
+            <a:r>
+              <a:rPr lang="en-US" sz="1800" dirty="0">
+                <a:solidFill>
+                  <a:srgbClr val="4B545C"/>
+                </a:solidFill>
+                <a:latin typeface="Noto Sans" pitchFamily="34" charset="0"/>
+                <a:ea typeface="Noto Sans" pitchFamily="34" charset="-122"/>
+                <a:cs typeface="Noto Sans" pitchFamily="34" charset="-120"/>
+              </a:rPr>
+              <a:t>每个字的部首是什么？写下来，再写它的意思。九十秒。</a:t>
+            </a:r>
+            <a:endParaRPr lang="en-US" sz="1800" dirty="0"/>
+          </a:p>
+        </p:txBody>
+      </p:sp>
+      <p:sp>
+        <p:nvSpPr>
+          <p:cNvPr id="10" name="Text 8"/>
+          <p:cNvSpPr/>
+          <p:nvPr/>
+        </p:nvSpPr>
+        <p:spPr>
+          <a:xfrm>
+            <a:off x="609600" y="2390775"/>
+            <a:ext cx="1722983" cy="1282750"/>
           </a:xfrm>
           <a:prstGeom prst="roundRect">
             <a:avLst>
-              <a:gd name="adj" fmla="val 8803"/>
+              <a:gd name="adj" fmla="val 4950"/>
             </a:avLst>
           </a:prstGeom>
           <a:solidFill>
             <a:srgbClr val="E6EAEB"/>
           </a:solidFill>
-          <a:ln w="9525">
+          <a:ln w="19050">
             <a:solidFill>
               <a:srgbClr val="D5DBDD"/>
             </a:solidFill>
@@ -15085,56 +15285,35 @@
           </a:p>
         </p:txBody>
       </p:sp>
-      <p:pic>
-        <p:nvPicPr>
-          <p:cNvPr id="10" name="Image 0" descr="/var/folders/6c/210dcgxn4gz5sm71vld2cy1h0000gn/T/tmp.LHO6BoqOp1/img/fujin.png">    </p:cNvPr>
-          <p:cNvPicPr>
-            <a:picLocks noChangeAspect="1"/>
-          </p:cNvPicPr>
-          <p:nvPr/>
-        </p:nvPicPr>
-        <p:blipFill>
-          <a:blip r:embed="rId1"/>
-          <a:stretch>
-            <a:fillRect/>
-          </a:stretch>
-        </p:blipFill>
-        <p:spPr>
-          <a:xfrm>
-            <a:off x="1330970" y="2125861"/>
-            <a:ext cx="609600" cy="609600"/>
-          </a:xfrm>
-          <a:prstGeom prst="rect">
-            <a:avLst/>
-          </a:prstGeom>
-        </p:spPr>
-      </p:pic>
-      <p:sp>
-        <p:nvSpPr>
-          <p:cNvPr id="11" name="Text 8"/>
-          <p:cNvSpPr/>
-          <p:nvPr/>
-        </p:nvSpPr>
-        <p:spPr>
-          <a:xfrm>
-            <a:off x="1330970" y="2798862"/>
-            <a:ext cx="621792" cy="428625"/>
-          </a:xfrm>
-          <a:prstGeom prst="rect">
-            <a:avLst/>
-          </a:prstGeom>
-          <a:noFill/>
-          <a:ln/>
-        </p:spPr>
-        <p:txBody>
-          <a:bodyPr wrap="square" lIns="0" tIns="0" rIns="0" bIns="0" rtlCol="0" anchor="t"/>
-          <a:lstStyle/>
-          <a:p>
-            <a:pPr algn="l" indent="0" marL="0">
-              <a:buNone/>
-            </a:pPr>
-            <a:r>
-              <a:rPr lang="en-US" sz="2400" b="1" dirty="0">
+      <p:sp>
+        <p:nvSpPr>
+          <p:cNvPr id="11" name="Text 9"/>
+          <p:cNvSpPr/>
+          <p:nvPr/>
+        </p:nvSpPr>
+        <p:spPr>
+          <a:xfrm>
+            <a:off x="689525" y="2549426"/>
+            <a:ext cx="1563133" cy="603498"/>
+          </a:xfrm>
+          <a:prstGeom prst="rect">
+            <a:avLst/>
+          </a:prstGeom>
+          <a:noFill/>
+          <a:ln/>
+        </p:spPr>
+        <p:txBody>
+          <a:bodyPr wrap="square" lIns="0" tIns="0" rIns="0" bIns="0" rtlCol="0" anchor="t"/>
+          <a:lstStyle/>
+          <a:p>
+            <a:pPr algn="ctr" indent="0" marL="0">
+              <a:lnSpc>
+                <a:spcPts val="4752"/>
+              </a:lnSpc>
+              <a:buNone/>
+            </a:pPr>
+            <a:r>
+              <a:rPr lang="en-US" sz="4400" b="1" dirty="0">
                 <a:solidFill>
                   <a:srgbClr val="262B30"/>
                 </a:solidFill>
@@ -15142,32 +15321,55 @@
                 <a:ea typeface="Noto Serif SC" pitchFamily="34" charset="-122"/>
                 <a:cs typeface="Noto Serif SC" pitchFamily="34" charset="-120"/>
               </a:rPr>
-              <a:t>附近</a:t>
-            </a:r>
-            <a:endParaRPr lang="en-US" sz="2400" dirty="0"/>
-          </a:p>
-        </p:txBody>
-      </p:sp>
-      <p:sp>
-        <p:nvSpPr>
-          <p:cNvPr id="12" name="Text 9"/>
-          <p:cNvSpPr/>
-          <p:nvPr/>
-        </p:nvSpPr>
-        <p:spPr>
-          <a:xfrm>
-            <a:off x="2839641" y="2027486"/>
-            <a:ext cx="2052340" cy="1298377"/>
+              <a:t>层</a:t>
+            </a:r>
+            <a:endParaRPr lang="en-US" sz="4400" dirty="0"/>
+          </a:p>
+        </p:txBody>
+      </p:sp>
+      <p:sp>
+        <p:nvSpPr>
+          <p:cNvPr id="12" name="Shape 10"/>
+          <p:cNvSpPr/>
+          <p:nvPr/>
+        </p:nvSpPr>
+        <p:spPr>
+          <a:xfrm>
+            <a:off x="704850" y="3530650"/>
+            <a:ext cx="1532483" cy="0"/>
+          </a:xfrm>
+          <a:prstGeom prst="line">
+            <a:avLst/>
+          </a:prstGeom>
+          <a:noFill/>
+          <a:ln w="19050">
+            <a:solidFill>
+              <a:srgbClr val="6E7780"/>
+            </a:solidFill>
+            <a:prstDash val="solid"/>
+          </a:ln>
+        </p:spPr>
+      </p:sp>
+      <p:sp>
+        <p:nvSpPr>
+          <p:cNvPr id="13" name="Text 11"/>
+          <p:cNvSpPr/>
+          <p:nvPr/>
+        </p:nvSpPr>
+        <p:spPr>
+          <a:xfrm>
+            <a:off x="2459534" y="2390775"/>
+            <a:ext cx="1722983" cy="1282750"/>
           </a:xfrm>
           <a:prstGeom prst="roundRect">
             <a:avLst>
-              <a:gd name="adj" fmla="val 8803"/>
+              <a:gd name="adj" fmla="val 4950"/>
             </a:avLst>
           </a:prstGeom>
           <a:solidFill>
             <a:srgbClr val="E6EAEB"/>
           </a:solidFill>
-          <a:ln w="9525">
+          <a:ln w="19050">
             <a:solidFill>
               <a:srgbClr val="D5DBDD"/>
             </a:solidFill>
@@ -15184,56 +15386,35 @@
           </a:p>
         </p:txBody>
       </p:sp>
-      <p:pic>
-        <p:nvPicPr>
-          <p:cNvPr id="13" name="Image 1" descr="/var/folders/6c/210dcgxn4gz5sm71vld2cy1h0000gn/T/tmp.LHO6BoqOp1/img/li.png">    </p:cNvPr>
-          <p:cNvPicPr>
-            <a:picLocks noChangeAspect="1"/>
-          </p:cNvPicPr>
-          <p:nvPr/>
-        </p:nvPicPr>
-        <p:blipFill>
-          <a:blip r:embed="rId2"/>
-          <a:stretch>
-            <a:fillRect/>
-          </a:stretch>
-        </p:blipFill>
-        <p:spPr>
-          <a:xfrm>
-            <a:off x="3561011" y="2125861"/>
-            <a:ext cx="609600" cy="609600"/>
-          </a:xfrm>
-          <a:prstGeom prst="rect">
-            <a:avLst/>
-          </a:prstGeom>
-        </p:spPr>
-      </p:pic>
-      <p:sp>
-        <p:nvSpPr>
-          <p:cNvPr id="14" name="Text 10"/>
-          <p:cNvSpPr/>
-          <p:nvPr/>
-        </p:nvSpPr>
-        <p:spPr>
-          <a:xfrm>
-            <a:off x="3713411" y="2798862"/>
-            <a:ext cx="310896" cy="428625"/>
-          </a:xfrm>
-          <a:prstGeom prst="rect">
-            <a:avLst/>
-          </a:prstGeom>
-          <a:noFill/>
-          <a:ln/>
-        </p:spPr>
-        <p:txBody>
-          <a:bodyPr wrap="square" lIns="0" tIns="0" rIns="0" bIns="0" rtlCol="0" anchor="t"/>
-          <a:lstStyle/>
-          <a:p>
-            <a:pPr algn="l" indent="0" marL="0">
-              <a:buNone/>
-            </a:pPr>
-            <a:r>
-              <a:rPr lang="en-US" sz="2400" b="1" dirty="0">
+      <p:sp>
+        <p:nvSpPr>
+          <p:cNvPr id="14" name="Text 12"/>
+          <p:cNvSpPr/>
+          <p:nvPr/>
+        </p:nvSpPr>
+        <p:spPr>
+          <a:xfrm>
+            <a:off x="2539459" y="2549426"/>
+            <a:ext cx="1563133" cy="603498"/>
+          </a:xfrm>
+          <a:prstGeom prst="rect">
+            <a:avLst/>
+          </a:prstGeom>
+          <a:noFill/>
+          <a:ln/>
+        </p:spPr>
+        <p:txBody>
+          <a:bodyPr wrap="square" lIns="0" tIns="0" rIns="0" bIns="0" rtlCol="0" anchor="t"/>
+          <a:lstStyle/>
+          <a:p>
+            <a:pPr algn="ctr" indent="0" marL="0">
+              <a:lnSpc>
+                <a:spcPts val="4752"/>
+              </a:lnSpc>
+              <a:buNone/>
+            </a:pPr>
+            <a:r>
+              <a:rPr lang="en-US" sz="4400" b="1" dirty="0">
                 <a:solidFill>
                   <a:srgbClr val="262B30"/>
                 </a:solidFill>
@@ -15241,32 +15422,55 @@
                 <a:ea typeface="Noto Serif SC" pitchFamily="34" charset="-122"/>
                 <a:cs typeface="Noto Serif SC" pitchFamily="34" charset="-120"/>
               </a:rPr>
-              <a:t>离</a:t>
-            </a:r>
-            <a:endParaRPr lang="en-US" sz="2400" dirty="0"/>
-          </a:p>
-        </p:txBody>
-      </p:sp>
-      <p:sp>
-        <p:nvSpPr>
-          <p:cNvPr id="15" name="Text 11"/>
-          <p:cNvSpPr/>
-          <p:nvPr/>
-        </p:nvSpPr>
-        <p:spPr>
-          <a:xfrm>
-            <a:off x="5069681" y="2027486"/>
-            <a:ext cx="2052489" cy="1298377"/>
+              <a:t>厅</a:t>
+            </a:r>
+            <a:endParaRPr lang="en-US" sz="4400" dirty="0"/>
+          </a:p>
+        </p:txBody>
+      </p:sp>
+      <p:sp>
+        <p:nvSpPr>
+          <p:cNvPr id="15" name="Shape 13"/>
+          <p:cNvSpPr/>
+          <p:nvPr/>
+        </p:nvSpPr>
+        <p:spPr>
+          <a:xfrm>
+            <a:off x="2554784" y="3530650"/>
+            <a:ext cx="1532483" cy="0"/>
+          </a:xfrm>
+          <a:prstGeom prst="line">
+            <a:avLst/>
+          </a:prstGeom>
+          <a:noFill/>
+          <a:ln w="19050">
+            <a:solidFill>
+              <a:srgbClr val="6E7780"/>
+            </a:solidFill>
+            <a:prstDash val="solid"/>
+          </a:ln>
+        </p:spPr>
+      </p:sp>
+      <p:sp>
+        <p:nvSpPr>
+          <p:cNvPr id="16" name="Text 14"/>
+          <p:cNvSpPr/>
+          <p:nvPr/>
+        </p:nvSpPr>
+        <p:spPr>
+          <a:xfrm>
+            <a:off x="4309467" y="2390775"/>
+            <a:ext cx="1722983" cy="1282750"/>
           </a:xfrm>
           <a:prstGeom prst="roundRect">
             <a:avLst>
-              <a:gd name="adj" fmla="val 8803"/>
+              <a:gd name="adj" fmla="val 4950"/>
             </a:avLst>
           </a:prstGeom>
           <a:solidFill>
             <a:srgbClr val="E6EAEB"/>
           </a:solidFill>
-          <a:ln w="9525">
+          <a:ln w="19050">
             <a:solidFill>
               <a:srgbClr val="D5DBDD"/>
             </a:solidFill>
@@ -15285,30 +15489,33 @@
       </p:sp>
       <p:sp>
         <p:nvSpPr>
-          <p:cNvPr id="16" name="Text 12"/>
-          <p:cNvSpPr/>
-          <p:nvPr/>
-        </p:nvSpPr>
-        <p:spPr>
-          <a:xfrm>
-            <a:off x="5943451" y="2125861"/>
-            <a:ext cx="310896" cy="428625"/>
-          </a:xfrm>
-          <a:prstGeom prst="rect">
-            <a:avLst/>
-          </a:prstGeom>
-          <a:noFill/>
-          <a:ln/>
-        </p:spPr>
-        <p:txBody>
-          <a:bodyPr wrap="square" lIns="0" tIns="0" rIns="0" bIns="0" rtlCol="0" anchor="t"/>
-          <a:lstStyle/>
-          <a:p>
-            <a:pPr algn="l" indent="0" marL="0">
-              <a:buNone/>
-            </a:pPr>
-            <a:r>
-              <a:rPr lang="en-US" sz="2400" b="1" dirty="0">
+          <p:cNvPr id="17" name="Text 15"/>
+          <p:cNvSpPr/>
+          <p:nvPr/>
+        </p:nvSpPr>
+        <p:spPr>
+          <a:xfrm>
+            <a:off x="4389392" y="2549426"/>
+            <a:ext cx="1563133" cy="603498"/>
+          </a:xfrm>
+          <a:prstGeom prst="rect">
+            <a:avLst/>
+          </a:prstGeom>
+          <a:noFill/>
+          <a:ln/>
+        </p:spPr>
+        <p:txBody>
+          <a:bodyPr wrap="square" lIns="0" tIns="0" rIns="0" bIns="0" rtlCol="0" anchor="t"/>
+          <a:lstStyle/>
+          <a:p>
+            <a:pPr algn="ctr" indent="0" marL="0">
+              <a:lnSpc>
+                <a:spcPts val="4752"/>
+              </a:lnSpc>
+              <a:buNone/>
+            </a:pPr>
+            <a:r>
+              <a:rPr lang="en-US" sz="4400" b="1" dirty="0">
                 <a:solidFill>
                   <a:srgbClr val="262B30"/>
                 </a:solidFill>
@@ -15316,32 +15523,55 @@
                 <a:ea typeface="Noto Serif SC" pitchFamily="34" charset="-122"/>
                 <a:cs typeface="Noto Serif SC" pitchFamily="34" charset="-120"/>
               </a:rPr>
-              <a:t>就</a:t>
-            </a:r>
-            <a:endParaRPr lang="en-US" sz="2400" dirty="0"/>
-          </a:p>
-        </p:txBody>
-      </p:sp>
-      <p:sp>
-        <p:nvSpPr>
-          <p:cNvPr id="17" name="Text 13"/>
-          <p:cNvSpPr/>
-          <p:nvPr/>
-        </p:nvSpPr>
-        <p:spPr>
-          <a:xfrm>
-            <a:off x="7299871" y="2027486"/>
-            <a:ext cx="2052340" cy="1298377"/>
+              <a:t>辆</a:t>
+            </a:r>
+            <a:endParaRPr lang="en-US" sz="4400" dirty="0"/>
+          </a:p>
+        </p:txBody>
+      </p:sp>
+      <p:sp>
+        <p:nvSpPr>
+          <p:cNvPr id="18" name="Shape 16"/>
+          <p:cNvSpPr/>
+          <p:nvPr/>
+        </p:nvSpPr>
+        <p:spPr>
+          <a:xfrm>
+            <a:off x="4404717" y="3530650"/>
+            <a:ext cx="1532483" cy="0"/>
+          </a:xfrm>
+          <a:prstGeom prst="line">
+            <a:avLst/>
+          </a:prstGeom>
+          <a:noFill/>
+          <a:ln w="19050">
+            <a:solidFill>
+              <a:srgbClr val="6E7780"/>
+            </a:solidFill>
+            <a:prstDash val="solid"/>
+          </a:ln>
+        </p:spPr>
+      </p:sp>
+      <p:sp>
+        <p:nvSpPr>
+          <p:cNvPr id="19" name="Text 17"/>
+          <p:cNvSpPr/>
+          <p:nvPr/>
+        </p:nvSpPr>
+        <p:spPr>
+          <a:xfrm>
+            <a:off x="6159401" y="2390775"/>
+            <a:ext cx="1722983" cy="1282750"/>
           </a:xfrm>
           <a:prstGeom prst="roundRect">
             <a:avLst>
-              <a:gd name="adj" fmla="val 8803"/>
+              <a:gd name="adj" fmla="val 4950"/>
             </a:avLst>
           </a:prstGeom>
           <a:solidFill>
             <a:srgbClr val="E6EAEB"/>
           </a:solidFill>
-          <a:ln w="9525">
+          <a:ln w="19050">
             <a:solidFill>
               <a:srgbClr val="D5DBDD"/>
             </a:solidFill>
@@ -15358,56 +15588,35 @@
           </a:p>
         </p:txBody>
       </p:sp>
-      <p:pic>
-        <p:nvPicPr>
-          <p:cNvPr id="18" name="Image 2" descr="/var/folders/6c/210dcgxn4gz5sm71vld2cy1h0000gn/T/tmp.LHO6BoqOp1/img/ranhou.png">    </p:cNvPr>
-          <p:cNvPicPr>
-            <a:picLocks noChangeAspect="1"/>
-          </p:cNvPicPr>
-          <p:nvPr/>
-        </p:nvPicPr>
-        <p:blipFill>
-          <a:blip r:embed="rId3"/>
-          <a:stretch>
-            <a:fillRect/>
-          </a:stretch>
-        </p:blipFill>
-        <p:spPr>
-          <a:xfrm>
-            <a:off x="8021241" y="2125861"/>
-            <a:ext cx="609600" cy="609600"/>
-          </a:xfrm>
-          <a:prstGeom prst="rect">
-            <a:avLst/>
-          </a:prstGeom>
-        </p:spPr>
-      </p:pic>
-      <p:sp>
-        <p:nvSpPr>
-          <p:cNvPr id="19" name="Text 14"/>
-          <p:cNvSpPr/>
-          <p:nvPr/>
-        </p:nvSpPr>
-        <p:spPr>
-          <a:xfrm>
-            <a:off x="8021241" y="2798862"/>
-            <a:ext cx="621792" cy="428625"/>
-          </a:xfrm>
-          <a:prstGeom prst="rect">
-            <a:avLst/>
-          </a:prstGeom>
-          <a:noFill/>
-          <a:ln/>
-        </p:spPr>
-        <p:txBody>
-          <a:bodyPr wrap="square" lIns="0" tIns="0" rIns="0" bIns="0" rtlCol="0" anchor="t"/>
-          <a:lstStyle/>
-          <a:p>
-            <a:pPr algn="l" indent="0" marL="0">
-              <a:buNone/>
-            </a:pPr>
-            <a:r>
-              <a:rPr lang="en-US" sz="2400" b="1" dirty="0">
+      <p:sp>
+        <p:nvSpPr>
+          <p:cNvPr id="20" name="Text 18"/>
+          <p:cNvSpPr/>
+          <p:nvPr/>
+        </p:nvSpPr>
+        <p:spPr>
+          <a:xfrm>
+            <a:off x="6239326" y="2549426"/>
+            <a:ext cx="1563133" cy="603498"/>
+          </a:xfrm>
+          <a:prstGeom prst="rect">
+            <a:avLst/>
+          </a:prstGeom>
+          <a:noFill/>
+          <a:ln/>
+        </p:spPr>
+        <p:txBody>
+          <a:bodyPr wrap="square" lIns="0" tIns="0" rIns="0" bIns="0" rtlCol="0" anchor="t"/>
+          <a:lstStyle/>
+          <a:p>
+            <a:pPr algn="ctr" indent="0" marL="0">
+              <a:lnSpc>
+                <a:spcPts val="4752"/>
+              </a:lnSpc>
+              <a:buNone/>
+            </a:pPr>
+            <a:r>
+              <a:rPr lang="en-US" sz="4400" b="1" dirty="0">
                 <a:solidFill>
                   <a:srgbClr val="262B30"/>
                 </a:solidFill>
@@ -15415,32 +15624,55 @@
                 <a:ea typeface="Noto Serif SC" pitchFamily="34" charset="-122"/>
                 <a:cs typeface="Noto Serif SC" pitchFamily="34" charset="-120"/>
               </a:rPr>
-              <a:t>然后</a:t>
-            </a:r>
-            <a:endParaRPr lang="en-US" sz="2400" dirty="0"/>
-          </a:p>
-        </p:txBody>
-      </p:sp>
-      <p:sp>
-        <p:nvSpPr>
-          <p:cNvPr id="20" name="Text 15"/>
-          <p:cNvSpPr/>
-          <p:nvPr/>
-        </p:nvSpPr>
-        <p:spPr>
-          <a:xfrm>
-            <a:off x="9529911" y="2027486"/>
-            <a:ext cx="2052489" cy="1298377"/>
+              <a:t>冰</a:t>
+            </a:r>
+            <a:endParaRPr lang="en-US" sz="4400" dirty="0"/>
+          </a:p>
+        </p:txBody>
+      </p:sp>
+      <p:sp>
+        <p:nvSpPr>
+          <p:cNvPr id="21" name="Shape 19"/>
+          <p:cNvSpPr/>
+          <p:nvPr/>
+        </p:nvSpPr>
+        <p:spPr>
+          <a:xfrm>
+            <a:off x="6254651" y="3530650"/>
+            <a:ext cx="1532483" cy="0"/>
+          </a:xfrm>
+          <a:prstGeom prst="line">
+            <a:avLst/>
+          </a:prstGeom>
+          <a:noFill/>
+          <a:ln w="19050">
+            <a:solidFill>
+              <a:srgbClr val="6E7780"/>
+            </a:solidFill>
+            <a:prstDash val="solid"/>
+          </a:ln>
+        </p:spPr>
+      </p:sp>
+      <p:sp>
+        <p:nvSpPr>
+          <p:cNvPr id="22" name="Text 20"/>
+          <p:cNvSpPr/>
+          <p:nvPr/>
+        </p:nvSpPr>
+        <p:spPr>
+          <a:xfrm>
+            <a:off x="8009334" y="2390775"/>
+            <a:ext cx="1722983" cy="1282750"/>
           </a:xfrm>
           <a:prstGeom prst="roundRect">
             <a:avLst>
-              <a:gd name="adj" fmla="val 8803"/>
+              <a:gd name="adj" fmla="val 4950"/>
             </a:avLst>
           </a:prstGeom>
           <a:solidFill>
             <a:srgbClr val="E6EAEB"/>
           </a:solidFill>
-          <a:ln w="9525">
+          <a:ln w="19050">
             <a:solidFill>
               <a:srgbClr val="D5DBDD"/>
             </a:solidFill>
@@ -15457,56 +15689,35 @@
           </a:p>
         </p:txBody>
       </p:sp>
-      <p:pic>
-        <p:nvPicPr>
-          <p:cNvPr id="21" name="Image 3" descr="/var/folders/6c/210dcgxn4gz5sm71vld2cy1h0000gn/T/tmp.LHO6BoqOp1/img/dayue.png">    </p:cNvPr>
-          <p:cNvPicPr>
-            <a:picLocks noChangeAspect="1"/>
-          </p:cNvPicPr>
-          <p:nvPr/>
-        </p:nvPicPr>
-        <p:blipFill>
-          <a:blip r:embed="rId4"/>
-          <a:stretch>
-            <a:fillRect/>
-          </a:stretch>
-        </p:blipFill>
-        <p:spPr>
-          <a:xfrm>
-            <a:off x="10251281" y="2125861"/>
-            <a:ext cx="609600" cy="609600"/>
-          </a:xfrm>
-          <a:prstGeom prst="rect">
-            <a:avLst/>
-          </a:prstGeom>
-        </p:spPr>
-      </p:pic>
-      <p:sp>
-        <p:nvSpPr>
-          <p:cNvPr id="22" name="Text 16"/>
-          <p:cNvSpPr/>
-          <p:nvPr/>
-        </p:nvSpPr>
-        <p:spPr>
-          <a:xfrm>
-            <a:off x="10251281" y="2798862"/>
-            <a:ext cx="621792" cy="428625"/>
-          </a:xfrm>
-          <a:prstGeom prst="rect">
-            <a:avLst/>
-          </a:prstGeom>
-          <a:noFill/>
-          <a:ln/>
-        </p:spPr>
-        <p:txBody>
-          <a:bodyPr wrap="square" lIns="0" tIns="0" rIns="0" bIns="0" rtlCol="0" anchor="t"/>
-          <a:lstStyle/>
-          <a:p>
-            <a:pPr algn="l" indent="0" marL="0">
-              <a:buNone/>
-            </a:pPr>
-            <a:r>
-              <a:rPr lang="en-US" sz="2400" b="1" dirty="0">
+      <p:sp>
+        <p:nvSpPr>
+          <p:cNvPr id="23" name="Text 21"/>
+          <p:cNvSpPr/>
+          <p:nvPr/>
+        </p:nvSpPr>
+        <p:spPr>
+          <a:xfrm>
+            <a:off x="8089260" y="2549426"/>
+            <a:ext cx="1563133" cy="603498"/>
+          </a:xfrm>
+          <a:prstGeom prst="rect">
+            <a:avLst/>
+          </a:prstGeom>
+          <a:noFill/>
+          <a:ln/>
+        </p:spPr>
+        <p:txBody>
+          <a:bodyPr wrap="square" lIns="0" tIns="0" rIns="0" bIns="0" rtlCol="0" anchor="t"/>
+          <a:lstStyle/>
+          <a:p>
+            <a:pPr algn="ctr" indent="0" marL="0">
+              <a:lnSpc>
+                <a:spcPts val="4752"/>
+              </a:lnSpc>
+              <a:buNone/>
+            </a:pPr>
+            <a:r>
+              <a:rPr lang="en-US" sz="4400" b="1" dirty="0">
                 <a:solidFill>
                   <a:srgbClr val="262B30"/>
                 </a:solidFill>
@@ -15514,32 +15725,55 @@
                 <a:ea typeface="Noto Serif SC" pitchFamily="34" charset="-122"/>
                 <a:cs typeface="Noto Serif SC" pitchFamily="34" charset="-120"/>
               </a:rPr>
-              <a:t>大约</a:t>
-            </a:r>
-            <a:endParaRPr lang="en-US" sz="2400" dirty="0"/>
-          </a:p>
-        </p:txBody>
-      </p:sp>
-      <p:sp>
-        <p:nvSpPr>
-          <p:cNvPr id="23" name="Text 17"/>
-          <p:cNvSpPr/>
-          <p:nvPr/>
-        </p:nvSpPr>
-        <p:spPr>
-          <a:xfrm>
-            <a:off x="609600" y="3503563"/>
-            <a:ext cx="2052340" cy="1298377"/>
+              <a:t>超</a:t>
+            </a:r>
+            <a:endParaRPr lang="en-US" sz="4400" dirty="0"/>
+          </a:p>
+        </p:txBody>
+      </p:sp>
+      <p:sp>
+        <p:nvSpPr>
+          <p:cNvPr id="24" name="Shape 22"/>
+          <p:cNvSpPr/>
+          <p:nvPr/>
+        </p:nvSpPr>
+        <p:spPr>
+          <a:xfrm>
+            <a:off x="8104584" y="3530650"/>
+            <a:ext cx="1532483" cy="0"/>
+          </a:xfrm>
+          <a:prstGeom prst="line">
+            <a:avLst/>
+          </a:prstGeom>
+          <a:noFill/>
+          <a:ln w="19050">
+            <a:solidFill>
+              <a:srgbClr val="6E7780"/>
+            </a:solidFill>
+            <a:prstDash val="solid"/>
+          </a:ln>
+        </p:spPr>
+      </p:sp>
+      <p:sp>
+        <p:nvSpPr>
+          <p:cNvPr id="25" name="Text 23"/>
+          <p:cNvSpPr/>
+          <p:nvPr/>
+        </p:nvSpPr>
+        <p:spPr>
+          <a:xfrm>
+            <a:off x="9859268" y="2390775"/>
+            <a:ext cx="1723132" cy="1282750"/>
           </a:xfrm>
           <a:prstGeom prst="roundRect">
             <a:avLst>
-              <a:gd name="adj" fmla="val 8803"/>
+              <a:gd name="adj" fmla="val 4950"/>
             </a:avLst>
           </a:prstGeom>
           <a:solidFill>
             <a:srgbClr val="E6EAEB"/>
           </a:solidFill>
-          <a:ln w="9525">
+          <a:ln w="19050">
             <a:solidFill>
               <a:srgbClr val="D5DBDD"/>
             </a:solidFill>
@@ -15556,56 +15790,35 @@
           </a:p>
         </p:txBody>
       </p:sp>
-      <p:pic>
-        <p:nvPicPr>
-          <p:cNvPr id="24" name="Image 4" descr="/var/folders/6c/210dcgxn4gz5sm71vld2cy1h0000gn/T/tmp.LHO6BoqOp1/img/duimian.png">    </p:cNvPr>
-          <p:cNvPicPr>
-            <a:picLocks noChangeAspect="1"/>
-          </p:cNvPicPr>
-          <p:nvPr/>
-        </p:nvPicPr>
-        <p:blipFill>
-          <a:blip r:embed="rId5"/>
-          <a:stretch>
-            <a:fillRect/>
-          </a:stretch>
-        </p:blipFill>
-        <p:spPr>
-          <a:xfrm>
-            <a:off x="1330970" y="3601938"/>
-            <a:ext cx="609600" cy="609600"/>
-          </a:xfrm>
-          <a:prstGeom prst="rect">
-            <a:avLst/>
-          </a:prstGeom>
-        </p:spPr>
-      </p:pic>
-      <p:sp>
-        <p:nvSpPr>
-          <p:cNvPr id="25" name="Text 18"/>
-          <p:cNvSpPr/>
-          <p:nvPr/>
-        </p:nvSpPr>
-        <p:spPr>
-          <a:xfrm>
-            <a:off x="1330970" y="4274939"/>
-            <a:ext cx="621792" cy="428625"/>
-          </a:xfrm>
-          <a:prstGeom prst="rect">
-            <a:avLst/>
-          </a:prstGeom>
-          <a:noFill/>
-          <a:ln/>
-        </p:spPr>
-        <p:txBody>
-          <a:bodyPr wrap="square" lIns="0" tIns="0" rIns="0" bIns="0" rtlCol="0" anchor="t"/>
-          <a:lstStyle/>
-          <a:p>
-            <a:pPr algn="l" indent="0" marL="0">
-              <a:buNone/>
-            </a:pPr>
-            <a:r>
-              <a:rPr lang="en-US" sz="2400" b="1" dirty="0">
+      <p:sp>
+        <p:nvSpPr>
+          <p:cNvPr id="26" name="Text 24"/>
+          <p:cNvSpPr/>
+          <p:nvPr/>
+        </p:nvSpPr>
+        <p:spPr>
+          <a:xfrm>
+            <a:off x="9939192" y="2549426"/>
+            <a:ext cx="1563285" cy="603498"/>
+          </a:xfrm>
+          <a:prstGeom prst="rect">
+            <a:avLst/>
+          </a:prstGeom>
+          <a:noFill/>
+          <a:ln/>
+        </p:spPr>
+        <p:txBody>
+          <a:bodyPr wrap="square" lIns="0" tIns="0" rIns="0" bIns="0" rtlCol="0" anchor="t"/>
+          <a:lstStyle/>
+          <a:p>
+            <a:pPr algn="ctr" indent="0" marL="0">
+              <a:lnSpc>
+                <a:spcPts val="4752"/>
+              </a:lnSpc>
+              <a:buNone/>
+            </a:pPr>
+            <a:r>
+              <a:rPr lang="en-US" sz="4400" b="1" dirty="0">
                 <a:solidFill>
                   <a:srgbClr val="262B30"/>
                 </a:solidFill>
@@ -15613,34 +15826,59 @@
                 <a:ea typeface="Noto Serif SC" pitchFamily="34" charset="-122"/>
                 <a:cs typeface="Noto Serif SC" pitchFamily="34" charset="-120"/>
               </a:rPr>
-              <a:t>对面</a:t>
-            </a:r>
-            <a:endParaRPr lang="en-US" sz="2400" dirty="0"/>
-          </a:p>
-        </p:txBody>
-      </p:sp>
-      <p:sp>
-        <p:nvSpPr>
-          <p:cNvPr id="26" name="Text 19"/>
-          <p:cNvSpPr/>
-          <p:nvPr/>
-        </p:nvSpPr>
-        <p:spPr>
-          <a:xfrm>
-            <a:off x="2839641" y="3503563"/>
-            <a:ext cx="2052340" cy="1298377"/>
+              <a:t>站</a:t>
+            </a:r>
+            <a:endParaRPr lang="en-US" sz="4400" dirty="0"/>
+          </a:p>
+        </p:txBody>
+      </p:sp>
+      <p:sp>
+        <p:nvSpPr>
+          <p:cNvPr id="27" name="Shape 25"/>
+          <p:cNvSpPr/>
+          <p:nvPr/>
+        </p:nvSpPr>
+        <p:spPr>
+          <a:xfrm>
+            <a:off x="9954518" y="3530650"/>
+            <a:ext cx="1532632" cy="0"/>
+          </a:xfrm>
+          <a:prstGeom prst="line">
+            <a:avLst/>
+          </a:prstGeom>
+          <a:noFill/>
+          <a:ln w="19050">
+            <a:solidFill>
+              <a:srgbClr val="6E7780"/>
+            </a:solidFill>
+            <a:prstDash val="solid"/>
+          </a:ln>
+        </p:spPr>
+      </p:sp>
+      <p:sp>
+        <p:nvSpPr>
+          <p:cNvPr id="28" name="Text 26"/>
+          <p:cNvSpPr/>
+          <p:nvPr/>
+        </p:nvSpPr>
+        <p:spPr>
+          <a:xfrm>
+            <a:off x="609600" y="3838575"/>
+            <a:ext cx="10972800" cy="993725"/>
           </a:xfrm>
           <a:prstGeom prst="roundRect">
             <a:avLst>
-              <a:gd name="adj" fmla="val 8803"/>
+              <a:gd name="adj" fmla="val 6390"/>
             </a:avLst>
           </a:prstGeom>
           <a:solidFill>
-            <a:srgbClr val="E6EAEB"/>
+            <a:srgbClr val="3D5A73">
+              <a:alpha val="11000"/>
+            </a:srgbClr>
           </a:solidFill>
-          <a:ln w="9525">
+          <a:ln w="19050">
             <a:solidFill>
-              <a:srgbClr val="D5DBDD"/>
+              <a:srgbClr val="3D5A73"/>
             </a:solidFill>
           </a:ln>
         </p:spPr>
@@ -15657,151 +15895,94 @@
       </p:sp>
       <p:sp>
         <p:nvSpPr>
-          <p:cNvPr id="27" name="Text 20"/>
-          <p:cNvSpPr/>
-          <p:nvPr/>
-        </p:nvSpPr>
-        <p:spPr>
-          <a:xfrm>
-            <a:off x="3713411" y="3601938"/>
-            <a:ext cx="310896" cy="428625"/>
-          </a:xfrm>
-          <a:prstGeom prst="rect">
-            <a:avLst/>
-          </a:prstGeom>
-          <a:noFill/>
-          <a:ln/>
-        </p:spPr>
-        <p:txBody>
-          <a:bodyPr wrap="square" lIns="0" tIns="0" rIns="0" bIns="0" rtlCol="0" anchor="t"/>
-          <a:lstStyle/>
-          <a:p>
-            <a:pPr algn="l" indent="0" marL="0">
-              <a:buNone/>
-            </a:pPr>
-            <a:r>
-              <a:rPr lang="en-US" sz="2400" b="1" dirty="0">
-                <a:solidFill>
-                  <a:srgbClr val="262B30"/>
+          <p:cNvPr id="29" name="Text 27"/>
+          <p:cNvSpPr/>
+          <p:nvPr/>
+        </p:nvSpPr>
+        <p:spPr>
+          <a:xfrm>
+            <a:off x="819150" y="3971925"/>
+            <a:ext cx="10764774" cy="200025"/>
+          </a:xfrm>
+          <a:prstGeom prst="rect">
+            <a:avLst/>
+          </a:prstGeom>
+          <a:noFill/>
+          <a:ln/>
+        </p:spPr>
+        <p:txBody>
+          <a:bodyPr wrap="square" lIns="0" tIns="0" rIns="0" bIns="0" rtlCol="0" anchor="t"/>
+          <a:lstStyle/>
+          <a:p>
+            <a:pPr algn="l" indent="0" marL="0">
+              <a:buNone/>
+            </a:pPr>
+            <a:r>
+              <a:rPr lang="en-US" sz="1100" b="1" dirty="0">
+                <a:solidFill>
+                  <a:srgbClr val="B05B3B"/>
+                </a:solidFill>
+                <a:latin typeface="Noto Sans" pitchFamily="34" charset="0"/>
+                <a:ea typeface="Noto Sans" pitchFamily="34" charset="-122"/>
+                <a:cs typeface="Noto Sans" pitchFamily="34" charset="-120"/>
+              </a:rPr>
+              <a:t>从这里选 · CHOOSE FROM</a:t>
+            </a:r>
+            <a:endParaRPr lang="en-US" sz="1100" dirty="0"/>
+          </a:p>
+        </p:txBody>
+      </p:sp>
+      <p:sp>
+        <p:nvSpPr>
+          <p:cNvPr id="30" name="Text 28"/>
+          <p:cNvSpPr/>
+          <p:nvPr/>
+        </p:nvSpPr>
+        <p:spPr>
+          <a:xfrm>
+            <a:off x="819150" y="4222700"/>
+            <a:ext cx="10764774" cy="476250"/>
+          </a:xfrm>
+          <a:prstGeom prst="rect">
+            <a:avLst/>
+          </a:prstGeom>
+          <a:noFill/>
+          <a:ln/>
+        </p:spPr>
+        <p:txBody>
+          <a:bodyPr wrap="square" lIns="0" tIns="0" rIns="0" bIns="0" rtlCol="0" anchor="t"/>
+          <a:lstStyle/>
+          <a:p>
+            <a:pPr algn="l" indent="0" marL="0">
+              <a:spcBef>
+                <a:spcPts val="400"/>
+              </a:spcBef>
+              <a:buNone/>
+            </a:pPr>
+            <a:r>
+              <a:rPr lang="en-US" sz="2700" b="1" dirty="0">
+                <a:solidFill>
+                  <a:srgbClr val="3D5A73"/>
                 </a:solidFill>
                 <a:latin typeface="Noto Serif SC" pitchFamily="34" charset="0"/>
                 <a:ea typeface="Noto Serif SC" pitchFamily="34" charset="-122"/>
                 <a:cs typeface="Noto Serif SC" pitchFamily="34" charset="-120"/>
               </a:rPr>
-              <a:t>挺</a:t>
-            </a:r>
-            <a:endParaRPr lang="en-US" sz="2400" dirty="0"/>
-          </a:p>
-        </p:txBody>
-      </p:sp>
-      <p:sp>
-        <p:nvSpPr>
-          <p:cNvPr id="28" name="Text 21"/>
-          <p:cNvSpPr/>
-          <p:nvPr/>
-        </p:nvSpPr>
-        <p:spPr>
-          <a:xfrm>
-            <a:off x="5069681" y="3503563"/>
-            <a:ext cx="2052489" cy="1298377"/>
-          </a:xfrm>
-          <a:prstGeom prst="roundRect">
-            <a:avLst>
-              <a:gd name="adj" fmla="val 8803"/>
-            </a:avLst>
-          </a:prstGeom>
-          <a:solidFill>
-            <a:srgbClr val="E6EAEB"/>
-          </a:solidFill>
-          <a:ln w="9525">
-            <a:solidFill>
-              <a:srgbClr val="D5DBDD"/>
-            </a:solidFill>
-          </a:ln>
-        </p:spPr>
-        <p:txBody>
-          <a:bodyPr wrap="square" rtlCol="0" anchor="ctr"/>
-          <a:lstStyle/>
-          <a:p>
-            <a:pPr indent="0" marL="0">
-              <a:buNone/>
-            </a:pPr>
-            <a:endParaRPr lang="en-US" dirty="0"/>
-          </a:p>
-        </p:txBody>
-      </p:sp>
-      <p:pic>
-        <p:nvPicPr>
-          <p:cNvPr id="29" name="Image 5" descr="/var/folders/6c/210dcgxn4gz5sm71vld2cy1h0000gn/T/tmp.LHO6BoqOp1/img/shijian.png">    </p:cNvPr>
-          <p:cNvPicPr>
-            <a:picLocks noChangeAspect="1"/>
-          </p:cNvPicPr>
-          <p:nvPr/>
-        </p:nvPicPr>
-        <p:blipFill>
-          <a:blip r:embed="rId6"/>
-          <a:stretch>
-            <a:fillRect/>
-          </a:stretch>
-        </p:blipFill>
-        <p:spPr>
-          <a:xfrm>
-            <a:off x="5791051" y="3601938"/>
-            <a:ext cx="609600" cy="609600"/>
-          </a:xfrm>
-          <a:prstGeom prst="rect">
-            <a:avLst/>
-          </a:prstGeom>
-        </p:spPr>
-      </p:pic>
-      <p:sp>
-        <p:nvSpPr>
-          <p:cNvPr id="30" name="Text 22"/>
-          <p:cNvSpPr/>
-          <p:nvPr/>
-        </p:nvSpPr>
-        <p:spPr>
-          <a:xfrm>
-            <a:off x="5588050" y="4274939"/>
-            <a:ext cx="1036067" cy="352425"/>
-          </a:xfrm>
-          <a:prstGeom prst="rect">
-            <a:avLst/>
-          </a:prstGeom>
-          <a:noFill/>
-          <a:ln/>
-        </p:spPr>
-        <p:txBody>
-          <a:bodyPr wrap="square" lIns="0" tIns="0" rIns="0" bIns="0" rtlCol="0" anchor="t"/>
-          <a:lstStyle/>
-          <a:p>
-            <a:pPr algn="l" indent="0" marL="0">
-              <a:buNone/>
-            </a:pPr>
-            <a:r>
-              <a:rPr lang="en-US" sz="2000" b="1" dirty="0">
-                <a:solidFill>
-                  <a:srgbClr val="262B30"/>
-                </a:solidFill>
-                <a:latin typeface="Noto Serif SC" pitchFamily="34" charset="0"/>
-                <a:ea typeface="Noto Serif SC" pitchFamily="34" charset="-122"/>
-                <a:cs typeface="Noto Serif SC" pitchFamily="34" charset="-120"/>
-              </a:rPr>
-              <a:t>多长时间</a:t>
-            </a:r>
-            <a:endParaRPr lang="en-US" sz="2000" dirty="0"/>
-          </a:p>
-        </p:txBody>
-      </p:sp>
-      <p:sp>
-        <p:nvSpPr>
-          <p:cNvPr id="31" name="Text 23"/>
-          <p:cNvSpPr/>
-          <p:nvPr/>
-        </p:nvSpPr>
-        <p:spPr>
-          <a:xfrm>
-            <a:off x="609600" y="4928890"/>
+              <a:t>尸　厂　车　冫　走　立　口　火　氵</a:t>
+            </a:r>
+            <a:endParaRPr lang="en-US" sz="2700" dirty="0"/>
+          </a:p>
+        </p:txBody>
+      </p:sp>
+      <p:sp>
+        <p:nvSpPr>
+          <p:cNvPr id="31" name="Text 29"/>
+          <p:cNvSpPr/>
+          <p:nvPr/>
+        </p:nvSpPr>
+        <p:spPr>
+          <a:xfrm>
+            <a:off x="609600" y="4959251"/>
             <a:ext cx="11192256" cy="228600"/>
           </a:xfrm>
           <a:prstGeom prst="rect">
@@ -15832,7 +16013,51 @@
                 <a:ea typeface="Noto Sans" pitchFamily="34" charset="-122"/>
                 <a:cs typeface="Noto Sans" pitchFamily="34" charset="-120"/>
               </a:rPr>
-              <a:t>小白板：这八样，哪一样你还是 😐？写下来举起来。举得最多的那一个，就是复习要从哪儿开始。</a:t>
+              <a:t>写对最多的一组得分。</a:t>
+            </a:r>
+            <a:r>
+              <a:rPr lang="en-US" sz="1200" b="1" dirty="0">
+                <a:solidFill>
+                  <a:srgbClr val="6E7780"/>
+                </a:solidFill>
+                <a:latin typeface="Noto Sans" pitchFamily="34" charset="0"/>
+                <a:ea typeface="Noto Sans" pitchFamily="34" charset="-122"/>
+                <a:cs typeface="Noto Sans" pitchFamily="34" charset="-120"/>
+              </a:rPr>
+              <a:t>方格里有三个是多出来的。</a:t>
+            </a:r>
+            <a:r>
+              <a:rPr lang="en-US" sz="1200" dirty="0">
+                <a:solidFill>
+                  <a:srgbClr val="6E7780"/>
+                </a:solidFill>
+                <a:latin typeface="Noto Sans" pitchFamily="34" charset="0"/>
+                <a:ea typeface="Noto Sans" pitchFamily="34" charset="-122"/>
+                <a:cs typeface="Noto Sans" pitchFamily="34" charset="-120"/>
+              </a:rPr>
+              <a:t> 这六个字就是单元测验第三部分考的，而且</a:t>
+            </a:r>
+            <a:r>
+              <a:rPr lang="en-US" sz="1200" b="1" dirty="0">
+                <a:solidFill>
+                  <a:srgbClr val="6E7780"/>
+                </a:solidFill>
+                <a:latin typeface="Noto Sans" pitchFamily="34" charset="0"/>
+                <a:ea typeface="Noto Sans" pitchFamily="34" charset="-122"/>
+                <a:cs typeface="Noto Sans" pitchFamily="34" charset="-120"/>
+              </a:rPr>
+              <a:t>考试不给方格</a:t>
+            </a:r>
+            <a:r>
+              <a:rPr lang="en-US" sz="1200" dirty="0">
+                <a:solidFill>
+                  <a:srgbClr val="6E7780"/>
+                </a:solidFill>
+                <a:latin typeface="Noto Sans" pitchFamily="34" charset="0"/>
+                <a:ea typeface="Noto Sans" pitchFamily="34" charset="-122"/>
+                <a:cs typeface="Noto Sans" pitchFamily="34" charset="-120"/>
+              </a:rPr>
+              <a:t>。</a:t>
             </a:r>
             <a:endParaRPr lang="en-US" sz="1200" dirty="0"/>
           </a:p>
@@ -15932,6 +16157,3387 @@
         <p:spPr>
           <a:xfrm>
             <a:off x="507950" y="176213"/>
+            <a:ext cx="2644893" cy="180975"/>
+          </a:xfrm>
+          <a:prstGeom prst="rect">
+            <a:avLst/>
+          </a:prstGeom>
+          <a:noFill/>
+          <a:ln/>
+        </p:spPr>
+        <p:txBody>
+          <a:bodyPr wrap="square" lIns="0" tIns="0" rIns="0" bIns="0" rtlCol="0" anchor="t"/>
+          <a:lstStyle/>
+          <a:p>
+            <a:pPr algn="l" indent="0" marL="0">
+              <a:buNone/>
+            </a:pPr>
+            <a:r>
+              <a:rPr lang="en-US" sz="1000" b="1" dirty="0">
+                <a:solidFill>
+                  <a:srgbClr val="B05B3B"/>
+                </a:solidFill>
+                <a:latin typeface="Noto Sans" pitchFamily="34" charset="0"/>
+                <a:ea typeface="Noto Sans" pitchFamily="34" charset="-122"/>
+                <a:cs typeface="Noto Sans" pitchFamily="34" charset="-120"/>
+              </a:rPr>
+              <a:t>20–43 MIN · FLEXIBLE PRACTICE</a:t>
+            </a:r>
+            <a:endParaRPr lang="en-US" sz="1000" dirty="0"/>
+          </a:p>
+        </p:txBody>
+      </p:sp>
+      <p:sp>
+        <p:nvSpPr>
+          <p:cNvPr id="5" name="Text 3"/>
+          <p:cNvSpPr/>
+          <p:nvPr/>
+        </p:nvSpPr>
+        <p:spPr>
+          <a:xfrm>
+            <a:off x="3386435" y="166688"/>
+            <a:ext cx="1656796" cy="200025"/>
+          </a:xfrm>
+          <a:prstGeom prst="rect">
+            <a:avLst/>
+          </a:prstGeom>
+          <a:noFill/>
+          <a:ln/>
+        </p:spPr>
+        <p:txBody>
+          <a:bodyPr wrap="square" lIns="0" tIns="0" rIns="0" bIns="0" rtlCol="0" anchor="t"/>
+          <a:lstStyle/>
+          <a:p>
+            <a:pPr algn="l" indent="0" marL="0">
+              <a:buNone/>
+            </a:pPr>
+            <a:r>
+              <a:rPr lang="en-US" sz="1100" dirty="0">
+                <a:solidFill>
+                  <a:srgbClr val="4B545C"/>
+                </a:solidFill>
+                <a:latin typeface="Noto Sans" pitchFamily="34" charset="0"/>
+                <a:ea typeface="Noto Sans" pitchFamily="34" charset="-122"/>
+                <a:cs typeface="Noto Sans" pitchFamily="34" charset="-120"/>
+              </a:rPr>
+              <a:t>游戏 · 第三步 · 找独体字</a:t>
+            </a:r>
+            <a:endParaRPr lang="en-US" sz="1100" dirty="0"/>
+          </a:p>
+        </p:txBody>
+      </p:sp>
+      <p:sp>
+        <p:nvSpPr>
+          <p:cNvPr id="6" name="Text 4"/>
+          <p:cNvSpPr/>
+          <p:nvPr/>
+        </p:nvSpPr>
+        <p:spPr>
+          <a:xfrm>
+            <a:off x="11183094" y="176213"/>
+            <a:ext cx="510975" cy="180975"/>
+          </a:xfrm>
+          <a:prstGeom prst="rect">
+            <a:avLst/>
+          </a:prstGeom>
+          <a:noFill/>
+          <a:ln/>
+        </p:spPr>
+        <p:txBody>
+          <a:bodyPr wrap="square" lIns="0" tIns="0" rIns="0" bIns="0" rtlCol="0" anchor="t"/>
+          <a:lstStyle/>
+          <a:p>
+            <a:pPr algn="l" indent="0" marL="0">
+              <a:buNone/>
+            </a:pPr>
+            <a:r>
+              <a:rPr lang="en-US" sz="1000" dirty="0">
+                <a:solidFill>
+                  <a:srgbClr val="6E7780"/>
+                </a:solidFill>
+                <a:latin typeface="Noto Sans" pitchFamily="34" charset="0"/>
+                <a:ea typeface="Noto Sans" pitchFamily="34" charset="-122"/>
+                <a:cs typeface="Noto Sans" pitchFamily="34" charset="-120"/>
+              </a:rPr>
+              <a:t>25 / 28</a:t>
+            </a:r>
+            <a:endParaRPr lang="en-US" sz="1000" dirty="0"/>
+          </a:p>
+        </p:txBody>
+      </p:sp>
+      <p:sp>
+        <p:nvSpPr>
+          <p:cNvPr id="7" name="Text 5"/>
+          <p:cNvSpPr/>
+          <p:nvPr/>
+        </p:nvSpPr>
+        <p:spPr>
+          <a:xfrm>
+            <a:off x="507950" y="0"/>
+            <a:ext cx="11176099" cy="31700"/>
+          </a:xfrm>
+          <a:prstGeom prst="rect">
+            <a:avLst/>
+          </a:prstGeom>
+          <a:solidFill>
+            <a:srgbClr val="3D5A73"/>
+          </a:solidFill>
+          <a:ln/>
+        </p:spPr>
+        <p:txBody>
+          <a:bodyPr wrap="square" rtlCol="0" anchor="ctr"/>
+          <a:lstStyle/>
+          <a:p>
+            <a:pPr indent="0" marL="0">
+              <a:buNone/>
+            </a:pPr>
+            <a:endParaRPr lang="en-US" dirty="0"/>
+          </a:p>
+        </p:txBody>
+      </p:sp>
+      <p:sp>
+        <p:nvSpPr>
+          <p:cNvPr id="8" name="Text 6"/>
+          <p:cNvSpPr/>
+          <p:nvPr/>
+        </p:nvSpPr>
+        <p:spPr>
+          <a:xfrm>
+            <a:off x="609600" y="2160687"/>
+            <a:ext cx="11192256" cy="200025"/>
+          </a:xfrm>
+          <a:prstGeom prst="rect">
+            <a:avLst/>
+          </a:prstGeom>
+          <a:noFill/>
+          <a:ln/>
+        </p:spPr>
+        <p:txBody>
+          <a:bodyPr wrap="square" lIns="0" tIns="0" rIns="0" bIns="0" rtlCol="0" anchor="t"/>
+          <a:lstStyle/>
+          <a:p>
+            <a:pPr algn="l" indent="0" marL="0">
+              <a:buNone/>
+            </a:pPr>
+            <a:r>
+              <a:rPr lang="en-US" sz="1100" b="1" dirty="0">
+                <a:solidFill>
+                  <a:srgbClr val="B05B3B"/>
+                </a:solidFill>
+                <a:latin typeface="Noto Sans" pitchFamily="34" charset="0"/>
+                <a:ea typeface="Noto Sans" pitchFamily="34" charset="-122"/>
+                <a:cs typeface="Noto Sans" pitchFamily="34" charset="-120"/>
+              </a:rPr>
+              <a:t>游戏 · 第二轮 · 找里面的独体字 · 同一组，继续写</a:t>
+            </a:r>
+            <a:endParaRPr lang="en-US" sz="1100" dirty="0"/>
+          </a:p>
+        </p:txBody>
+      </p:sp>
+      <p:sp>
+        <p:nvSpPr>
+          <p:cNvPr id="9" name="Text 7"/>
+          <p:cNvSpPr/>
+          <p:nvPr/>
+        </p:nvSpPr>
+        <p:spPr>
+          <a:xfrm>
+            <a:off x="609600" y="2360712"/>
+            <a:ext cx="11192256" cy="342900"/>
+          </a:xfrm>
+          <a:prstGeom prst="rect">
+            <a:avLst/>
+          </a:prstGeom>
+          <a:noFill/>
+          <a:ln/>
+        </p:spPr>
+        <p:txBody>
+          <a:bodyPr wrap="square" lIns="0" tIns="0" rIns="0" bIns="0" rtlCol="0" anchor="t"/>
+          <a:lstStyle/>
+          <a:p>
+            <a:pPr algn="l" indent="0" marL="0">
+              <a:lnSpc>
+                <a:spcPts val="2700"/>
+              </a:lnSpc>
+              <a:spcAft>
+                <a:spcPts val="400"/>
+              </a:spcAft>
+              <a:buNone/>
+            </a:pPr>
+            <a:r>
+              <a:rPr lang="en-US" sz="1800" dirty="0">
+                <a:solidFill>
+                  <a:srgbClr val="4B545C"/>
+                </a:solidFill>
+                <a:latin typeface="Noto Sans" pitchFamily="34" charset="0"/>
+                <a:ea typeface="Noto Sans" pitchFamily="34" charset="-122"/>
+                <a:cs typeface="Noto Sans" pitchFamily="34" charset="-120"/>
+              </a:rPr>
+              <a:t>每个字里面藏着一个独体字，把它找出来，写下来。九十秒。</a:t>
+            </a:r>
+            <a:endParaRPr lang="en-US" sz="1800" dirty="0"/>
+          </a:p>
+        </p:txBody>
+      </p:sp>
+      <p:sp>
+        <p:nvSpPr>
+          <p:cNvPr id="10" name="Text 8"/>
+          <p:cNvSpPr/>
+          <p:nvPr/>
+        </p:nvSpPr>
+        <p:spPr>
+          <a:xfrm>
+            <a:off x="609600" y="2855863"/>
+            <a:ext cx="1722983" cy="1282750"/>
+          </a:xfrm>
+          <a:prstGeom prst="roundRect">
+            <a:avLst>
+              <a:gd name="adj" fmla="val 4950"/>
+            </a:avLst>
+          </a:prstGeom>
+          <a:solidFill>
+            <a:srgbClr val="E6EAEB"/>
+          </a:solidFill>
+          <a:ln w="19050">
+            <a:solidFill>
+              <a:srgbClr val="D5DBDD"/>
+            </a:solidFill>
+          </a:ln>
+        </p:spPr>
+        <p:txBody>
+          <a:bodyPr wrap="square" rtlCol="0" anchor="ctr"/>
+          <a:lstStyle/>
+          <a:p>
+            <a:pPr indent="0" marL="0">
+              <a:buNone/>
+            </a:pPr>
+            <a:endParaRPr lang="en-US" dirty="0"/>
+          </a:p>
+        </p:txBody>
+      </p:sp>
+      <p:sp>
+        <p:nvSpPr>
+          <p:cNvPr id="11" name="Text 9"/>
+          <p:cNvSpPr/>
+          <p:nvPr/>
+        </p:nvSpPr>
+        <p:spPr>
+          <a:xfrm>
+            <a:off x="689525" y="3014514"/>
+            <a:ext cx="1563133" cy="603498"/>
+          </a:xfrm>
+          <a:prstGeom prst="rect">
+            <a:avLst/>
+          </a:prstGeom>
+          <a:noFill/>
+          <a:ln/>
+        </p:spPr>
+        <p:txBody>
+          <a:bodyPr wrap="square" lIns="0" tIns="0" rIns="0" bIns="0" rtlCol="0" anchor="t"/>
+          <a:lstStyle/>
+          <a:p>
+            <a:pPr algn="ctr" indent="0" marL="0">
+              <a:lnSpc>
+                <a:spcPts val="4752"/>
+              </a:lnSpc>
+              <a:buNone/>
+            </a:pPr>
+            <a:r>
+              <a:rPr lang="en-US" sz="4400" b="1" dirty="0">
+                <a:solidFill>
+                  <a:srgbClr val="262B30"/>
+                </a:solidFill>
+                <a:latin typeface="Noto Serif SC" pitchFamily="34" charset="0"/>
+                <a:ea typeface="Noto Serif SC" pitchFamily="34" charset="-122"/>
+                <a:cs typeface="Noto Serif SC" pitchFamily="34" charset="-120"/>
+              </a:rPr>
+              <a:t>毕</a:t>
+            </a:r>
+            <a:endParaRPr lang="en-US" sz="4400" dirty="0"/>
+          </a:p>
+        </p:txBody>
+      </p:sp>
+      <p:sp>
+        <p:nvSpPr>
+          <p:cNvPr id="12" name="Shape 10"/>
+          <p:cNvSpPr/>
+          <p:nvPr/>
+        </p:nvSpPr>
+        <p:spPr>
+          <a:xfrm>
+            <a:off x="704850" y="3995737"/>
+            <a:ext cx="1532483" cy="0"/>
+          </a:xfrm>
+          <a:prstGeom prst="line">
+            <a:avLst/>
+          </a:prstGeom>
+          <a:noFill/>
+          <a:ln w="19050">
+            <a:solidFill>
+              <a:srgbClr val="6E7780"/>
+            </a:solidFill>
+            <a:prstDash val="solid"/>
+          </a:ln>
+        </p:spPr>
+      </p:sp>
+      <p:sp>
+        <p:nvSpPr>
+          <p:cNvPr id="13" name="Text 11"/>
+          <p:cNvSpPr/>
+          <p:nvPr/>
+        </p:nvSpPr>
+        <p:spPr>
+          <a:xfrm>
+            <a:off x="2459534" y="2855863"/>
+            <a:ext cx="1722983" cy="1282750"/>
+          </a:xfrm>
+          <a:prstGeom prst="roundRect">
+            <a:avLst>
+              <a:gd name="adj" fmla="val 4950"/>
+            </a:avLst>
+          </a:prstGeom>
+          <a:solidFill>
+            <a:srgbClr val="E6EAEB"/>
+          </a:solidFill>
+          <a:ln w="19050">
+            <a:solidFill>
+              <a:srgbClr val="D5DBDD"/>
+            </a:solidFill>
+          </a:ln>
+        </p:spPr>
+        <p:txBody>
+          <a:bodyPr wrap="square" rtlCol="0" anchor="ctr"/>
+          <a:lstStyle/>
+          <a:p>
+            <a:pPr indent="0" marL="0">
+              <a:buNone/>
+            </a:pPr>
+            <a:endParaRPr lang="en-US" dirty="0"/>
+          </a:p>
+        </p:txBody>
+      </p:sp>
+      <p:sp>
+        <p:nvSpPr>
+          <p:cNvPr id="14" name="Text 12"/>
+          <p:cNvSpPr/>
+          <p:nvPr/>
+        </p:nvSpPr>
+        <p:spPr>
+          <a:xfrm>
+            <a:off x="2539459" y="3014514"/>
+            <a:ext cx="1563133" cy="603498"/>
+          </a:xfrm>
+          <a:prstGeom prst="rect">
+            <a:avLst/>
+          </a:prstGeom>
+          <a:noFill/>
+          <a:ln/>
+        </p:spPr>
+        <p:txBody>
+          <a:bodyPr wrap="square" lIns="0" tIns="0" rIns="0" bIns="0" rtlCol="0" anchor="t"/>
+          <a:lstStyle/>
+          <a:p>
+            <a:pPr algn="ctr" indent="0" marL="0">
+              <a:lnSpc>
+                <a:spcPts val="4752"/>
+              </a:lnSpc>
+              <a:buNone/>
+            </a:pPr>
+            <a:r>
+              <a:rPr lang="en-US" sz="4400" b="1" dirty="0">
+                <a:solidFill>
+                  <a:srgbClr val="262B30"/>
+                </a:solidFill>
+                <a:latin typeface="Noto Serif SC" pitchFamily="34" charset="0"/>
+                <a:ea typeface="Noto Serif SC" pitchFamily="34" charset="-122"/>
+                <a:cs typeface="Noto Serif SC" pitchFamily="34" charset="-120"/>
+              </a:rPr>
+              <a:t>忘</a:t>
+            </a:r>
+            <a:endParaRPr lang="en-US" sz="4400" dirty="0"/>
+          </a:p>
+        </p:txBody>
+      </p:sp>
+      <p:sp>
+        <p:nvSpPr>
+          <p:cNvPr id="15" name="Shape 13"/>
+          <p:cNvSpPr/>
+          <p:nvPr/>
+        </p:nvSpPr>
+        <p:spPr>
+          <a:xfrm>
+            <a:off x="2554784" y="3995737"/>
+            <a:ext cx="1532483" cy="0"/>
+          </a:xfrm>
+          <a:prstGeom prst="line">
+            <a:avLst/>
+          </a:prstGeom>
+          <a:noFill/>
+          <a:ln w="19050">
+            <a:solidFill>
+              <a:srgbClr val="6E7780"/>
+            </a:solidFill>
+            <a:prstDash val="solid"/>
+          </a:ln>
+        </p:spPr>
+      </p:sp>
+      <p:sp>
+        <p:nvSpPr>
+          <p:cNvPr id="16" name="Text 14"/>
+          <p:cNvSpPr/>
+          <p:nvPr/>
+        </p:nvSpPr>
+        <p:spPr>
+          <a:xfrm>
+            <a:off x="4309467" y="2855863"/>
+            <a:ext cx="1722983" cy="1282750"/>
+          </a:xfrm>
+          <a:prstGeom prst="roundRect">
+            <a:avLst>
+              <a:gd name="adj" fmla="val 4950"/>
+            </a:avLst>
+          </a:prstGeom>
+          <a:solidFill>
+            <a:srgbClr val="E6EAEB"/>
+          </a:solidFill>
+          <a:ln w="19050">
+            <a:solidFill>
+              <a:srgbClr val="D5DBDD"/>
+            </a:solidFill>
+          </a:ln>
+        </p:spPr>
+        <p:txBody>
+          <a:bodyPr wrap="square" rtlCol="0" anchor="ctr"/>
+          <a:lstStyle/>
+          <a:p>
+            <a:pPr indent="0" marL="0">
+              <a:buNone/>
+            </a:pPr>
+            <a:endParaRPr lang="en-US" dirty="0"/>
+          </a:p>
+        </p:txBody>
+      </p:sp>
+      <p:sp>
+        <p:nvSpPr>
+          <p:cNvPr id="17" name="Text 15"/>
+          <p:cNvSpPr/>
+          <p:nvPr/>
+        </p:nvSpPr>
+        <p:spPr>
+          <a:xfrm>
+            <a:off x="4389392" y="3014514"/>
+            <a:ext cx="1563133" cy="603498"/>
+          </a:xfrm>
+          <a:prstGeom prst="rect">
+            <a:avLst/>
+          </a:prstGeom>
+          <a:noFill/>
+          <a:ln/>
+        </p:spPr>
+        <p:txBody>
+          <a:bodyPr wrap="square" lIns="0" tIns="0" rIns="0" bIns="0" rtlCol="0" anchor="t"/>
+          <a:lstStyle/>
+          <a:p>
+            <a:pPr algn="ctr" indent="0" marL="0">
+              <a:lnSpc>
+                <a:spcPts val="4752"/>
+              </a:lnSpc>
+              <a:buNone/>
+            </a:pPr>
+            <a:r>
+              <a:rPr lang="en-US" sz="4400" b="1" dirty="0">
+                <a:solidFill>
+                  <a:srgbClr val="262B30"/>
+                </a:solidFill>
+                <a:latin typeface="Noto Serif SC" pitchFamily="34" charset="0"/>
+                <a:ea typeface="Noto Serif SC" pitchFamily="34" charset="-122"/>
+                <a:cs typeface="Noto Serif SC" pitchFamily="34" charset="-120"/>
+              </a:rPr>
+              <a:t>返</a:t>
+            </a:r>
+            <a:endParaRPr lang="en-US" sz="4400" dirty="0"/>
+          </a:p>
+        </p:txBody>
+      </p:sp>
+      <p:sp>
+        <p:nvSpPr>
+          <p:cNvPr id="18" name="Shape 16"/>
+          <p:cNvSpPr/>
+          <p:nvPr/>
+        </p:nvSpPr>
+        <p:spPr>
+          <a:xfrm>
+            <a:off x="4404717" y="3995737"/>
+            <a:ext cx="1532483" cy="0"/>
+          </a:xfrm>
+          <a:prstGeom prst="line">
+            <a:avLst/>
+          </a:prstGeom>
+          <a:noFill/>
+          <a:ln w="19050">
+            <a:solidFill>
+              <a:srgbClr val="6E7780"/>
+            </a:solidFill>
+            <a:prstDash val="solid"/>
+          </a:ln>
+        </p:spPr>
+      </p:sp>
+      <p:sp>
+        <p:nvSpPr>
+          <p:cNvPr id="19" name="Text 17"/>
+          <p:cNvSpPr/>
+          <p:nvPr/>
+        </p:nvSpPr>
+        <p:spPr>
+          <a:xfrm>
+            <a:off x="6159401" y="2855863"/>
+            <a:ext cx="1722983" cy="1282750"/>
+          </a:xfrm>
+          <a:prstGeom prst="roundRect">
+            <a:avLst>
+              <a:gd name="adj" fmla="val 4950"/>
+            </a:avLst>
+          </a:prstGeom>
+          <a:solidFill>
+            <a:srgbClr val="E6EAEB"/>
+          </a:solidFill>
+          <a:ln w="19050">
+            <a:solidFill>
+              <a:srgbClr val="D5DBDD"/>
+            </a:solidFill>
+          </a:ln>
+        </p:spPr>
+        <p:txBody>
+          <a:bodyPr wrap="square" rtlCol="0" anchor="ctr"/>
+          <a:lstStyle/>
+          <a:p>
+            <a:pPr indent="0" marL="0">
+              <a:buNone/>
+            </a:pPr>
+            <a:endParaRPr lang="en-US" dirty="0"/>
+          </a:p>
+        </p:txBody>
+      </p:sp>
+      <p:sp>
+        <p:nvSpPr>
+          <p:cNvPr id="20" name="Text 18"/>
+          <p:cNvSpPr/>
+          <p:nvPr/>
+        </p:nvSpPr>
+        <p:spPr>
+          <a:xfrm>
+            <a:off x="6239326" y="3014514"/>
+            <a:ext cx="1563133" cy="603498"/>
+          </a:xfrm>
+          <a:prstGeom prst="rect">
+            <a:avLst/>
+          </a:prstGeom>
+          <a:noFill/>
+          <a:ln/>
+        </p:spPr>
+        <p:txBody>
+          <a:bodyPr wrap="square" lIns="0" tIns="0" rIns="0" bIns="0" rtlCol="0" anchor="t"/>
+          <a:lstStyle/>
+          <a:p>
+            <a:pPr algn="ctr" indent="0" marL="0">
+              <a:lnSpc>
+                <a:spcPts val="4752"/>
+              </a:lnSpc>
+              <a:buNone/>
+            </a:pPr>
+            <a:r>
+              <a:rPr lang="en-US" sz="4400" b="1" dirty="0">
+                <a:solidFill>
+                  <a:srgbClr val="262B30"/>
+                </a:solidFill>
+                <a:latin typeface="Noto Serif SC" pitchFamily="34" charset="0"/>
+                <a:ea typeface="Noto Serif SC" pitchFamily="34" charset="-122"/>
+                <a:cs typeface="Noto Serif SC" pitchFamily="34" charset="-120"/>
+              </a:rPr>
+              <a:t>蚂</a:t>
+            </a:r>
+            <a:endParaRPr lang="en-US" sz="4400" dirty="0"/>
+          </a:p>
+        </p:txBody>
+      </p:sp>
+      <p:sp>
+        <p:nvSpPr>
+          <p:cNvPr id="21" name="Shape 19"/>
+          <p:cNvSpPr/>
+          <p:nvPr/>
+        </p:nvSpPr>
+        <p:spPr>
+          <a:xfrm>
+            <a:off x="6254651" y="3995737"/>
+            <a:ext cx="1532483" cy="0"/>
+          </a:xfrm>
+          <a:prstGeom prst="line">
+            <a:avLst/>
+          </a:prstGeom>
+          <a:noFill/>
+          <a:ln w="19050">
+            <a:solidFill>
+              <a:srgbClr val="6E7780"/>
+            </a:solidFill>
+            <a:prstDash val="solid"/>
+          </a:ln>
+        </p:spPr>
+      </p:sp>
+      <p:sp>
+        <p:nvSpPr>
+          <p:cNvPr id="22" name="Text 20"/>
+          <p:cNvSpPr/>
+          <p:nvPr/>
+        </p:nvSpPr>
+        <p:spPr>
+          <a:xfrm>
+            <a:off x="8009334" y="2855863"/>
+            <a:ext cx="1722983" cy="1282750"/>
+          </a:xfrm>
+          <a:prstGeom prst="roundRect">
+            <a:avLst>
+              <a:gd name="adj" fmla="val 4950"/>
+            </a:avLst>
+          </a:prstGeom>
+          <a:solidFill>
+            <a:srgbClr val="E6EAEB"/>
+          </a:solidFill>
+          <a:ln w="19050">
+            <a:solidFill>
+              <a:srgbClr val="D5DBDD"/>
+            </a:solidFill>
+          </a:ln>
+        </p:spPr>
+        <p:txBody>
+          <a:bodyPr wrap="square" rtlCol="0" anchor="ctr"/>
+          <a:lstStyle/>
+          <a:p>
+            <a:pPr indent="0" marL="0">
+              <a:buNone/>
+            </a:pPr>
+            <a:endParaRPr lang="en-US" dirty="0"/>
+          </a:p>
+        </p:txBody>
+      </p:sp>
+      <p:sp>
+        <p:nvSpPr>
+          <p:cNvPr id="23" name="Text 21"/>
+          <p:cNvSpPr/>
+          <p:nvPr/>
+        </p:nvSpPr>
+        <p:spPr>
+          <a:xfrm>
+            <a:off x="8089260" y="3014514"/>
+            <a:ext cx="1563133" cy="603498"/>
+          </a:xfrm>
+          <a:prstGeom prst="rect">
+            <a:avLst/>
+          </a:prstGeom>
+          <a:noFill/>
+          <a:ln/>
+        </p:spPr>
+        <p:txBody>
+          <a:bodyPr wrap="square" lIns="0" tIns="0" rIns="0" bIns="0" rtlCol="0" anchor="t"/>
+          <a:lstStyle/>
+          <a:p>
+            <a:pPr algn="ctr" indent="0" marL="0">
+              <a:lnSpc>
+                <a:spcPts val="4752"/>
+              </a:lnSpc>
+              <a:buNone/>
+            </a:pPr>
+            <a:r>
+              <a:rPr lang="en-US" sz="4400" b="1" dirty="0">
+                <a:solidFill>
+                  <a:srgbClr val="262B30"/>
+                </a:solidFill>
+                <a:latin typeface="Noto Serif SC" pitchFamily="34" charset="0"/>
+                <a:ea typeface="Noto Serif SC" pitchFamily="34" charset="-122"/>
+                <a:cs typeface="Noto Serif SC" pitchFamily="34" charset="-120"/>
+              </a:rPr>
+              <a:t>仙</a:t>
+            </a:r>
+            <a:endParaRPr lang="en-US" sz="4400" dirty="0"/>
+          </a:p>
+        </p:txBody>
+      </p:sp>
+      <p:sp>
+        <p:nvSpPr>
+          <p:cNvPr id="24" name="Shape 22"/>
+          <p:cNvSpPr/>
+          <p:nvPr/>
+        </p:nvSpPr>
+        <p:spPr>
+          <a:xfrm>
+            <a:off x="8104584" y="3995737"/>
+            <a:ext cx="1532483" cy="0"/>
+          </a:xfrm>
+          <a:prstGeom prst="line">
+            <a:avLst/>
+          </a:prstGeom>
+          <a:noFill/>
+          <a:ln w="19050">
+            <a:solidFill>
+              <a:srgbClr val="6E7780"/>
+            </a:solidFill>
+            <a:prstDash val="solid"/>
+          </a:ln>
+        </p:spPr>
+      </p:sp>
+      <p:sp>
+        <p:nvSpPr>
+          <p:cNvPr id="25" name="Text 23"/>
+          <p:cNvSpPr/>
+          <p:nvPr/>
+        </p:nvSpPr>
+        <p:spPr>
+          <a:xfrm>
+            <a:off x="9859268" y="2855863"/>
+            <a:ext cx="1723132" cy="1282750"/>
+          </a:xfrm>
+          <a:prstGeom prst="roundRect">
+            <a:avLst>
+              <a:gd name="adj" fmla="val 4950"/>
+            </a:avLst>
+          </a:prstGeom>
+          <a:solidFill>
+            <a:srgbClr val="E6EAEB"/>
+          </a:solidFill>
+          <a:ln w="19050">
+            <a:solidFill>
+              <a:srgbClr val="D5DBDD"/>
+            </a:solidFill>
+          </a:ln>
+        </p:spPr>
+        <p:txBody>
+          <a:bodyPr wrap="square" rtlCol="0" anchor="ctr"/>
+          <a:lstStyle/>
+          <a:p>
+            <a:pPr indent="0" marL="0">
+              <a:buNone/>
+            </a:pPr>
+            <a:endParaRPr lang="en-US" dirty="0"/>
+          </a:p>
+        </p:txBody>
+      </p:sp>
+      <p:sp>
+        <p:nvSpPr>
+          <p:cNvPr id="26" name="Text 24"/>
+          <p:cNvSpPr/>
+          <p:nvPr/>
+        </p:nvSpPr>
+        <p:spPr>
+          <a:xfrm>
+            <a:off x="9939192" y="3014514"/>
+            <a:ext cx="1563285" cy="603498"/>
+          </a:xfrm>
+          <a:prstGeom prst="rect">
+            <a:avLst/>
+          </a:prstGeom>
+          <a:noFill/>
+          <a:ln/>
+        </p:spPr>
+        <p:txBody>
+          <a:bodyPr wrap="square" lIns="0" tIns="0" rIns="0" bIns="0" rtlCol="0" anchor="t"/>
+          <a:lstStyle/>
+          <a:p>
+            <a:pPr algn="ctr" indent="0" marL="0">
+              <a:lnSpc>
+                <a:spcPts val="4752"/>
+              </a:lnSpc>
+              <a:buNone/>
+            </a:pPr>
+            <a:r>
+              <a:rPr lang="en-US" sz="4400" b="1" dirty="0">
+                <a:solidFill>
+                  <a:srgbClr val="262B30"/>
+                </a:solidFill>
+                <a:latin typeface="Noto Serif SC" pitchFamily="34" charset="0"/>
+                <a:ea typeface="Noto Serif SC" pitchFamily="34" charset="-122"/>
+                <a:cs typeface="Noto Serif SC" pitchFamily="34" charset="-120"/>
+              </a:rPr>
+              <a:t>鸣</a:t>
+            </a:r>
+            <a:endParaRPr lang="en-US" sz="4400" dirty="0"/>
+          </a:p>
+        </p:txBody>
+      </p:sp>
+      <p:sp>
+        <p:nvSpPr>
+          <p:cNvPr id="27" name="Shape 25"/>
+          <p:cNvSpPr/>
+          <p:nvPr/>
+        </p:nvSpPr>
+        <p:spPr>
+          <a:xfrm>
+            <a:off x="9954518" y="3995737"/>
+            <a:ext cx="1532632" cy="0"/>
+          </a:xfrm>
+          <a:prstGeom prst="line">
+            <a:avLst/>
+          </a:prstGeom>
+          <a:noFill/>
+          <a:ln w="19050">
+            <a:solidFill>
+              <a:srgbClr val="6E7780"/>
+            </a:solidFill>
+            <a:prstDash val="solid"/>
+          </a:ln>
+        </p:spPr>
+      </p:sp>
+      <p:sp>
+        <p:nvSpPr>
+          <p:cNvPr id="28" name="Text 26"/>
+          <p:cNvSpPr/>
+          <p:nvPr/>
+        </p:nvSpPr>
+        <p:spPr>
+          <a:xfrm>
+            <a:off x="609600" y="4265563"/>
+            <a:ext cx="11192256" cy="457200"/>
+          </a:xfrm>
+          <a:prstGeom prst="rect">
+            <a:avLst/>
+          </a:prstGeom>
+          <a:noFill/>
+          <a:ln/>
+        </p:spPr>
+        <p:txBody>
+          <a:bodyPr wrap="square" lIns="0" tIns="0" rIns="0" bIns="0" rtlCol="0" anchor="t"/>
+          <a:lstStyle/>
+          <a:p>
+            <a:pPr algn="l" indent="0" marL="0">
+              <a:lnSpc>
+                <a:spcPts val="1800"/>
+              </a:lnSpc>
+              <a:spcBef>
+                <a:spcPts val="1000"/>
+              </a:spcBef>
+              <a:buNone/>
+            </a:pPr>
+            <a:r>
+              <a:rPr lang="en-US" sz="1200" dirty="0">
+                <a:solidFill>
+                  <a:srgbClr val="6E7780"/>
+                </a:solidFill>
+                <a:latin typeface="Noto Sans" pitchFamily="34" charset="0"/>
+                <a:ea typeface="Noto Sans" pitchFamily="34" charset="-122"/>
+                <a:cs typeface="Noto Sans" pitchFamily="34" charset="-120"/>
+              </a:rPr>
+              <a:t>这一轮</a:t>
+            </a:r>
+            <a:r>
+              <a:rPr lang="en-US" sz="1200" b="1" dirty="0">
+                <a:solidFill>
+                  <a:srgbClr val="6E7780"/>
+                </a:solidFill>
+                <a:latin typeface="Noto Sans" pitchFamily="34" charset="0"/>
+                <a:ea typeface="Noto Sans" pitchFamily="34" charset="-122"/>
+                <a:cs typeface="Noto Sans" pitchFamily="34" charset="-120"/>
+              </a:rPr>
+              <a:t>没有方格</a:t>
+            </a:r>
+            <a:r>
+              <a:rPr lang="en-US" sz="1200" dirty="0">
+                <a:solidFill>
+                  <a:srgbClr val="6E7780"/>
+                </a:solidFill>
+                <a:latin typeface="Noto Sans" pitchFamily="34" charset="0"/>
+                <a:ea typeface="Noto Sans" pitchFamily="34" charset="-122"/>
+                <a:cs typeface="Noto Sans" pitchFamily="34" charset="-120"/>
+              </a:rPr>
+              <a:t>，跟单元测验第四部分一样。这六个字里</a:t>
+            </a:r>
+            <a:r>
+              <a:rPr lang="en-US" sz="1200" b="1" dirty="0">
+                <a:solidFill>
+                  <a:srgbClr val="6E7780"/>
+                </a:solidFill>
+                <a:latin typeface="Noto Sans" pitchFamily="34" charset="0"/>
+                <a:ea typeface="Noto Sans" pitchFamily="34" charset="-122"/>
+                <a:cs typeface="Noto Sans" pitchFamily="34" charset="-120"/>
+              </a:rPr>
+              <a:t>有三个</a:t>
+            </a:r>
+            <a:r>
+              <a:rPr lang="en-US" sz="1200" dirty="0">
+                <a:solidFill>
+                  <a:srgbClr val="6E7780"/>
+                </a:solidFill>
+                <a:latin typeface="Noto Sans" pitchFamily="34" charset="0"/>
+                <a:ea typeface="Noto Sans" pitchFamily="34" charset="-122"/>
+                <a:cs typeface="Noto Sans" pitchFamily="34" charset="-120"/>
+              </a:rPr>
+              <a:t>，藏的是你</a:t>
+            </a:r>
+            <a:r>
+              <a:rPr lang="en-US" sz="1200" b="1" dirty="0">
+                <a:solidFill>
+                  <a:srgbClr val="6E7780"/>
+                </a:solidFill>
+                <a:latin typeface="Noto Sans" pitchFamily="34" charset="0"/>
+                <a:ea typeface="Noto Sans" pitchFamily="34" charset="-122"/>
+                <a:cs typeface="Noto Sans" pitchFamily="34" charset="-120"/>
+              </a:rPr>
+              <a:t>这个星期刚学过的字</a:t>
+            </a:r>
+            <a:r>
+              <a:rPr lang="en-US" sz="1200" dirty="0">
+                <a:solidFill>
+                  <a:srgbClr val="6E7780"/>
+                </a:solidFill>
+                <a:latin typeface="Noto Sans" pitchFamily="34" charset="0"/>
+                <a:ea typeface="Noto Sans" pitchFamily="34" charset="-122"/>
+                <a:cs typeface="Noto Sans" pitchFamily="34" charset="-120"/>
+              </a:rPr>
+              <a:t>——上一页那四个，还有第三课「马路」的第一个字。先回头看一眼，别问老师。两轮加起来分最高的一组赢。</a:t>
+            </a:r>
+            <a:endParaRPr lang="en-US" sz="1200" dirty="0"/>
+          </a:p>
+        </p:txBody>
+      </p:sp>
+    </p:spTree>
+  </p:cSld>
+  <p:clrMapOvr>
+    <a:masterClrMapping/>
+  </p:clrMapOvr>
+</p:sld>
+</file>
+
+<file path=ppt/slides/slide26.xml><?xml version="1.0" encoding="utf-8"?>
+<p:sld xmlns:a="http://schemas.openxmlformats.org/drawingml/2006/main" xmlns:r="http://schemas.openxmlformats.org/officeDocument/2006/relationships" xmlns:p="http://schemas.openxmlformats.org/presentationml/2006/main">
+  <p:cSld name="Slide 26">
+    <p:bg>
+      <p:bgPr>
+        <a:solidFill>
+          <a:srgbClr val="F2F4F4"/>
+        </a:solidFill>
+      </p:bgPr>
+    </p:bg>
+    <p:spTree>
+      <p:nvGrpSpPr>
+        <p:cNvPr id="1" name=""/>
+        <p:cNvGrpSpPr/>
+        <p:nvPr/>
+      </p:nvGrpSpPr>
+      <p:grpSpPr>
+        <a:xfrm>
+          <a:off x="0" y="0"/>
+          <a:ext cx="0" cy="0"/>
+          <a:chOff x="0" y="0"/>
+          <a:chExt cx="0" cy="0"/>
+        </a:xfrm>
+      </p:grpSpPr>
+      <p:sp>
+        <p:nvSpPr>
+          <p:cNvPr id="2" name="Text 0"/>
+          <p:cNvSpPr/>
+          <p:nvPr/>
+        </p:nvSpPr>
+        <p:spPr>
+          <a:xfrm>
+            <a:off x="0" y="0"/>
+            <a:ext cx="12192000" cy="542925"/>
+          </a:xfrm>
+          <a:prstGeom prst="rect">
+            <a:avLst/>
+          </a:prstGeom>
+          <a:solidFill>
+            <a:srgbClr val="F2F4F4"/>
+          </a:solidFill>
+          <a:ln/>
+        </p:spPr>
+        <p:txBody>
+          <a:bodyPr wrap="square" rtlCol="0" anchor="ctr"/>
+          <a:lstStyle/>
+          <a:p>
+            <a:pPr indent="0" marL="0">
+              <a:buNone/>
+            </a:pPr>
+            <a:endParaRPr lang="en-US" dirty="0"/>
+          </a:p>
+        </p:txBody>
+      </p:sp>
+      <p:sp>
+        <p:nvSpPr>
+          <p:cNvPr id="3" name="Shape 1"/>
+          <p:cNvSpPr/>
+          <p:nvPr/>
+        </p:nvSpPr>
+        <p:spPr>
+          <a:xfrm>
+            <a:off x="0" y="538163"/>
+            <a:ext cx="12192000" cy="0"/>
+          </a:xfrm>
+          <a:prstGeom prst="line">
+            <a:avLst/>
+          </a:prstGeom>
+          <a:noFill/>
+          <a:ln w="9525">
+            <a:solidFill>
+              <a:srgbClr val="D5DBDD"/>
+            </a:solidFill>
+            <a:prstDash val="solid"/>
+          </a:ln>
+        </p:spPr>
+      </p:sp>
+      <p:sp>
+        <p:nvSpPr>
+          <p:cNvPr id="4" name="Text 2"/>
+          <p:cNvSpPr/>
+          <p:nvPr/>
+        </p:nvSpPr>
+        <p:spPr>
+          <a:xfrm>
+            <a:off x="507950" y="176213"/>
+            <a:ext cx="1785830" cy="180975"/>
+          </a:xfrm>
+          <a:prstGeom prst="rect">
+            <a:avLst/>
+          </a:prstGeom>
+          <a:noFill/>
+          <a:ln/>
+        </p:spPr>
+        <p:txBody>
+          <a:bodyPr wrap="square" lIns="0" tIns="0" rIns="0" bIns="0" rtlCol="0" anchor="t"/>
+          <a:lstStyle/>
+          <a:p>
+            <a:pPr algn="l" indent="0" marL="0">
+              <a:buNone/>
+            </a:pPr>
+            <a:r>
+              <a:rPr lang="en-US" sz="1000" b="1" dirty="0">
+                <a:solidFill>
+                  <a:srgbClr val="B05B3B"/>
+                </a:solidFill>
+                <a:latin typeface="Noto Sans" pitchFamily="34" charset="0"/>
+                <a:ea typeface="Noto Sans" pitchFamily="34" charset="-122"/>
+                <a:cs typeface="Noto Sans" pitchFamily="34" charset="-120"/>
+              </a:rPr>
+              <a:t>43–50 MIN · PLENARY</a:t>
+            </a:r>
+            <a:endParaRPr lang="en-US" sz="1000" dirty="0"/>
+          </a:p>
+        </p:txBody>
+      </p:sp>
+      <p:sp>
+        <p:nvSpPr>
+          <p:cNvPr id="5" name="Text 3"/>
+          <p:cNvSpPr/>
+          <p:nvPr/>
+        </p:nvSpPr>
+        <p:spPr>
+          <a:xfrm>
+            <a:off x="2544217" y="166688"/>
+            <a:ext cx="1482221" cy="200025"/>
+          </a:xfrm>
+          <a:prstGeom prst="rect">
+            <a:avLst/>
+          </a:prstGeom>
+          <a:noFill/>
+          <a:ln/>
+        </p:spPr>
+        <p:txBody>
+          <a:bodyPr wrap="square" lIns="0" tIns="0" rIns="0" bIns="0" rtlCol="0" anchor="t"/>
+          <a:lstStyle/>
+          <a:p>
+            <a:pPr algn="l" indent="0" marL="0">
+              <a:buNone/>
+            </a:pPr>
+            <a:r>
+              <a:rPr lang="en-US" sz="1100" dirty="0">
+                <a:solidFill>
+                  <a:srgbClr val="4B545C"/>
+                </a:solidFill>
+                <a:latin typeface="Noto Sans" pitchFamily="34" charset="0"/>
+                <a:ea typeface="Noto Sans" pitchFamily="34" charset="-122"/>
+                <a:cs typeface="Noto Sans" pitchFamily="34" charset="-120"/>
+              </a:rPr>
+              <a:t>小结 · 六课一起回头看</a:t>
+            </a:r>
+            <a:endParaRPr lang="en-US" sz="1100" dirty="0"/>
+          </a:p>
+        </p:txBody>
+      </p:sp>
+      <p:sp>
+        <p:nvSpPr>
+          <p:cNvPr id="6" name="Text 4"/>
+          <p:cNvSpPr/>
+          <p:nvPr/>
+        </p:nvSpPr>
+        <p:spPr>
+          <a:xfrm>
+            <a:off x="11182350" y="176213"/>
+            <a:ext cx="511734" cy="180975"/>
+          </a:xfrm>
+          <a:prstGeom prst="rect">
+            <a:avLst/>
+          </a:prstGeom>
+          <a:noFill/>
+          <a:ln/>
+        </p:spPr>
+        <p:txBody>
+          <a:bodyPr wrap="square" lIns="0" tIns="0" rIns="0" bIns="0" rtlCol="0" anchor="t"/>
+          <a:lstStyle/>
+          <a:p>
+            <a:pPr algn="l" indent="0" marL="0">
+              <a:buNone/>
+            </a:pPr>
+            <a:r>
+              <a:rPr lang="en-US" sz="1000" dirty="0">
+                <a:solidFill>
+                  <a:srgbClr val="6E7780"/>
+                </a:solidFill>
+                <a:latin typeface="Noto Sans" pitchFamily="34" charset="0"/>
+                <a:ea typeface="Noto Sans" pitchFamily="34" charset="-122"/>
+                <a:cs typeface="Noto Sans" pitchFamily="34" charset="-120"/>
+              </a:rPr>
+              <a:t>26 / 28</a:t>
+            </a:r>
+            <a:endParaRPr lang="en-US" sz="1000" dirty="0"/>
+          </a:p>
+        </p:txBody>
+      </p:sp>
+      <p:sp>
+        <p:nvSpPr>
+          <p:cNvPr id="7" name="Text 5"/>
+          <p:cNvSpPr/>
+          <p:nvPr/>
+        </p:nvSpPr>
+        <p:spPr>
+          <a:xfrm>
+            <a:off x="507950" y="0"/>
+            <a:ext cx="11176099" cy="31700"/>
+          </a:xfrm>
+          <a:prstGeom prst="rect">
+            <a:avLst/>
+          </a:prstGeom>
+          <a:solidFill>
+            <a:srgbClr val="3D5A73"/>
+          </a:solidFill>
+          <a:ln/>
+        </p:spPr>
+        <p:txBody>
+          <a:bodyPr wrap="square" rtlCol="0" anchor="ctr"/>
+          <a:lstStyle/>
+          <a:p>
+            <a:pPr indent="0" marL="0">
+              <a:buNone/>
+            </a:pPr>
+            <a:endParaRPr lang="en-US" dirty="0"/>
+          </a:p>
+        </p:txBody>
+      </p:sp>
+      <p:sp>
+        <p:nvSpPr>
+          <p:cNvPr id="8" name="Text 6"/>
+          <p:cNvSpPr/>
+          <p:nvPr/>
+        </p:nvSpPr>
+        <p:spPr>
+          <a:xfrm>
+            <a:off x="609600" y="912912"/>
+            <a:ext cx="11192256" cy="200025"/>
+          </a:xfrm>
+          <a:prstGeom prst="rect">
+            <a:avLst/>
+          </a:prstGeom>
+          <a:noFill/>
+          <a:ln/>
+        </p:spPr>
+        <p:txBody>
+          <a:bodyPr wrap="square" lIns="0" tIns="0" rIns="0" bIns="0" rtlCol="0" anchor="t"/>
+          <a:lstStyle/>
+          <a:p>
+            <a:pPr algn="l" indent="0" marL="0">
+              <a:buNone/>
+            </a:pPr>
+            <a:r>
+              <a:rPr lang="en-US" sz="1100" b="1" dirty="0">
+                <a:solidFill>
+                  <a:srgbClr val="B05B3B"/>
+                </a:solidFill>
+                <a:latin typeface="Noto Sans" pitchFamily="34" charset="0"/>
+                <a:ea typeface="Noto Sans" pitchFamily="34" charset="-122"/>
+                <a:cs typeface="Noto Sans" pitchFamily="34" charset="-120"/>
+              </a:rPr>
+              <a:t>小结 · 这六节课，你学会了什么</a:t>
+            </a:r>
+            <a:endParaRPr lang="en-US" sz="1100" dirty="0"/>
+          </a:p>
+        </p:txBody>
+      </p:sp>
+      <p:sp>
+        <p:nvSpPr>
+          <p:cNvPr id="9" name="Text 7"/>
+          <p:cNvSpPr/>
+          <p:nvPr/>
+        </p:nvSpPr>
+        <p:spPr>
+          <a:xfrm>
+            <a:off x="609600" y="1112937"/>
+            <a:ext cx="10972800" cy="712291"/>
+          </a:xfrm>
+          <a:prstGeom prst="roundRect">
+            <a:avLst>
+              <a:gd name="adj" fmla="val 8915"/>
+            </a:avLst>
+          </a:prstGeom>
+          <a:solidFill>
+            <a:srgbClr val="E6EAEB"/>
+          </a:solidFill>
+          <a:ln w="9525">
+            <a:solidFill>
+              <a:srgbClr val="D5DBDD"/>
+            </a:solidFill>
+          </a:ln>
+        </p:spPr>
+        <p:txBody>
+          <a:bodyPr wrap="square" rtlCol="0" anchor="ctr"/>
+          <a:lstStyle/>
+          <a:p>
+            <a:pPr indent="0" marL="0">
+              <a:buNone/>
+            </a:pPr>
+            <a:endParaRPr lang="en-US" dirty="0"/>
+          </a:p>
+        </p:txBody>
+      </p:sp>
+      <p:sp>
+        <p:nvSpPr>
+          <p:cNvPr id="10" name="Text 8"/>
+          <p:cNvSpPr/>
+          <p:nvPr/>
+        </p:nvSpPr>
+        <p:spPr>
+          <a:xfrm>
+            <a:off x="796826" y="1185863"/>
+            <a:ext cx="246075" cy="259110"/>
+          </a:xfrm>
+          <a:prstGeom prst="rect">
+            <a:avLst/>
+          </a:prstGeom>
+          <a:noFill/>
+          <a:ln/>
+        </p:spPr>
+        <p:txBody>
+          <a:bodyPr wrap="square" lIns="0" tIns="0" rIns="0" bIns="0" rtlCol="0" anchor="t"/>
+          <a:lstStyle/>
+          <a:p>
+            <a:pPr algn="l" indent="0" marL="0">
+              <a:lnSpc>
+                <a:spcPts val="2040"/>
+              </a:lnSpc>
+              <a:buNone/>
+            </a:pPr>
+            <a:r>
+              <a:rPr lang="en-US" sz="1700" b="1" dirty="0">
+                <a:solidFill>
+                  <a:srgbClr val="B05B3B"/>
+                </a:solidFill>
+                <a:latin typeface="Noto Serif SC" pitchFamily="34" charset="0"/>
+                <a:ea typeface="Noto Serif SC" pitchFamily="34" charset="-122"/>
+                <a:cs typeface="Noto Serif SC" pitchFamily="34" charset="-120"/>
+              </a:rPr>
+              <a:t>1</a:t>
+            </a:r>
+            <a:endParaRPr lang="en-US" sz="1700" dirty="0"/>
+          </a:p>
+        </p:txBody>
+      </p:sp>
+      <p:sp>
+        <p:nvSpPr>
+          <p:cNvPr id="11" name="Text 9"/>
+          <p:cNvSpPr/>
+          <p:nvPr/>
+        </p:nvSpPr>
+        <p:spPr>
+          <a:xfrm>
+            <a:off x="1203127" y="1185863"/>
+            <a:ext cx="3694774" cy="248989"/>
+          </a:xfrm>
+          <a:prstGeom prst="rect">
+            <a:avLst/>
+          </a:prstGeom>
+          <a:noFill/>
+          <a:ln/>
+        </p:spPr>
+        <p:txBody>
+          <a:bodyPr wrap="square" lIns="0" tIns="0" rIns="0" bIns="0" rtlCol="0" anchor="t"/>
+          <a:lstStyle/>
+          <a:p>
+            <a:pPr algn="l" indent="0" marL="0">
+              <a:lnSpc>
+                <a:spcPts val="1960"/>
+              </a:lnSpc>
+              <a:buNone/>
+            </a:pPr>
+            <a:r>
+              <a:rPr lang="en-US" sz="1400" dirty="0">
+                <a:solidFill>
+                  <a:srgbClr val="262B30"/>
+                </a:solidFill>
+                <a:latin typeface="Noto Sans" pitchFamily="34" charset="0"/>
+                <a:ea typeface="Noto Sans" pitchFamily="34" charset="-122"/>
+                <a:cs typeface="Noto Sans" pitchFamily="34" charset="-120"/>
+              </a:rPr>
+              <a:t>第一课　我家附近有花店、文具店、家具店等</a:t>
+            </a:r>
+            <a:endParaRPr lang="en-US" sz="1400" dirty="0"/>
+          </a:p>
+        </p:txBody>
+      </p:sp>
+      <p:sp>
+        <p:nvSpPr>
+          <p:cNvPr id="12" name="Text 10"/>
+          <p:cNvSpPr/>
+          <p:nvPr/>
+        </p:nvSpPr>
+        <p:spPr>
+          <a:xfrm>
+            <a:off x="1203127" y="1485602"/>
+            <a:ext cx="3694774" cy="266700"/>
+          </a:xfrm>
+          <a:prstGeom prst="rect">
+            <a:avLst/>
+          </a:prstGeom>
+          <a:noFill/>
+          <a:ln/>
+        </p:spPr>
+        <p:txBody>
+          <a:bodyPr wrap="square" lIns="0" tIns="0" rIns="0" bIns="0" rtlCol="0" anchor="t"/>
+          <a:lstStyle/>
+          <a:p>
+            <a:pPr algn="l" indent="0" marL="0">
+              <a:spcBef>
+                <a:spcPts val="400"/>
+              </a:spcBef>
+              <a:buNone/>
+            </a:pPr>
+            <a:r>
+              <a:rPr lang="en-US" sz="1500" b="1" dirty="0">
+                <a:solidFill>
+                  <a:srgbClr val="3D5A73"/>
+                </a:solidFill>
+                <a:latin typeface="Noto Serif SC" pitchFamily="34" charset="0"/>
+                <a:ea typeface="Noto Serif SC" pitchFamily="34" charset="-122"/>
+                <a:cs typeface="Noto Serif SC" pitchFamily="34" charset="-120"/>
+              </a:rPr>
+              <a:t>举一个中文例子</a:t>
+            </a:r>
+            <a:endParaRPr lang="en-US" sz="1500" dirty="0"/>
+          </a:p>
+        </p:txBody>
+      </p:sp>
+      <p:sp>
+        <p:nvSpPr>
+          <p:cNvPr id="13" name="Text 11"/>
+          <p:cNvSpPr/>
+          <p:nvPr/>
+        </p:nvSpPr>
+        <p:spPr>
+          <a:xfrm>
+            <a:off x="609600" y="1875979"/>
+            <a:ext cx="10972800" cy="712291"/>
+          </a:xfrm>
+          <a:prstGeom prst="roundRect">
+            <a:avLst>
+              <a:gd name="adj" fmla="val 8915"/>
+            </a:avLst>
+          </a:prstGeom>
+          <a:solidFill>
+            <a:srgbClr val="E6EAEB"/>
+          </a:solidFill>
+          <a:ln w="9525">
+            <a:solidFill>
+              <a:srgbClr val="D5DBDD"/>
+            </a:solidFill>
+          </a:ln>
+        </p:spPr>
+        <p:txBody>
+          <a:bodyPr wrap="square" rtlCol="0" anchor="ctr"/>
+          <a:lstStyle/>
+          <a:p>
+            <a:pPr indent="0" marL="0">
+              <a:buNone/>
+            </a:pPr>
+            <a:endParaRPr lang="en-US" dirty="0"/>
+          </a:p>
+        </p:txBody>
+      </p:sp>
+      <p:sp>
+        <p:nvSpPr>
+          <p:cNvPr id="14" name="Text 12"/>
+          <p:cNvSpPr/>
+          <p:nvPr/>
+        </p:nvSpPr>
+        <p:spPr>
+          <a:xfrm>
+            <a:off x="796826" y="1948904"/>
+            <a:ext cx="246075" cy="259110"/>
+          </a:xfrm>
+          <a:prstGeom prst="rect">
+            <a:avLst/>
+          </a:prstGeom>
+          <a:noFill/>
+          <a:ln/>
+        </p:spPr>
+        <p:txBody>
+          <a:bodyPr wrap="square" lIns="0" tIns="0" rIns="0" bIns="0" rtlCol="0" anchor="t"/>
+          <a:lstStyle/>
+          <a:p>
+            <a:pPr algn="l" indent="0" marL="0">
+              <a:lnSpc>
+                <a:spcPts val="2040"/>
+              </a:lnSpc>
+              <a:buNone/>
+            </a:pPr>
+            <a:r>
+              <a:rPr lang="en-US" sz="1700" b="1" dirty="0">
+                <a:solidFill>
+                  <a:srgbClr val="B05B3B"/>
+                </a:solidFill>
+                <a:latin typeface="Noto Serif SC" pitchFamily="34" charset="0"/>
+                <a:ea typeface="Noto Serif SC" pitchFamily="34" charset="-122"/>
+                <a:cs typeface="Noto Serif SC" pitchFamily="34" charset="-120"/>
+              </a:rPr>
+              <a:t>2</a:t>
+            </a:r>
+            <a:endParaRPr lang="en-US" sz="1700" dirty="0"/>
+          </a:p>
+        </p:txBody>
+      </p:sp>
+      <p:sp>
+        <p:nvSpPr>
+          <p:cNvPr id="15" name="Text 13"/>
+          <p:cNvSpPr/>
+          <p:nvPr/>
+        </p:nvSpPr>
+        <p:spPr>
+          <a:xfrm>
+            <a:off x="1203127" y="1948904"/>
+            <a:ext cx="3049908" cy="248989"/>
+          </a:xfrm>
+          <a:prstGeom prst="rect">
+            <a:avLst/>
+          </a:prstGeom>
+          <a:noFill/>
+          <a:ln/>
+        </p:spPr>
+        <p:txBody>
+          <a:bodyPr wrap="square" lIns="0" tIns="0" rIns="0" bIns="0" rtlCol="0" anchor="t"/>
+          <a:lstStyle/>
+          <a:p>
+            <a:pPr algn="l" indent="0" marL="0">
+              <a:lnSpc>
+                <a:spcPts val="1960"/>
+              </a:lnSpc>
+              <a:buNone/>
+            </a:pPr>
+            <a:r>
+              <a:rPr lang="en-US" sz="1400" dirty="0">
+                <a:solidFill>
+                  <a:srgbClr val="262B30"/>
+                </a:solidFill>
+                <a:latin typeface="Noto Sans" pitchFamily="34" charset="0"/>
+                <a:ea typeface="Noto Sans" pitchFamily="34" charset="-122"/>
+                <a:cs typeface="Noto Sans" pitchFamily="34" charset="-120"/>
+              </a:rPr>
+              <a:t>第二课　超市离我家不远　·　挺远的</a:t>
+            </a:r>
+            <a:endParaRPr lang="en-US" sz="1400" dirty="0"/>
+          </a:p>
+        </p:txBody>
+      </p:sp>
+      <p:sp>
+        <p:nvSpPr>
+          <p:cNvPr id="16" name="Text 14"/>
+          <p:cNvSpPr/>
+          <p:nvPr/>
+        </p:nvSpPr>
+        <p:spPr>
+          <a:xfrm>
+            <a:off x="1203127" y="2248644"/>
+            <a:ext cx="3049908" cy="266700"/>
+          </a:xfrm>
+          <a:prstGeom prst="rect">
+            <a:avLst/>
+          </a:prstGeom>
+          <a:noFill/>
+          <a:ln/>
+        </p:spPr>
+        <p:txBody>
+          <a:bodyPr wrap="square" lIns="0" tIns="0" rIns="0" bIns="0" rtlCol="0" anchor="t"/>
+          <a:lstStyle/>
+          <a:p>
+            <a:pPr algn="l" indent="0" marL="0">
+              <a:spcBef>
+                <a:spcPts val="400"/>
+              </a:spcBef>
+              <a:buNone/>
+            </a:pPr>
+            <a:r>
+              <a:rPr lang="en-US" sz="1500" b="1" dirty="0">
+                <a:solidFill>
+                  <a:srgbClr val="3D5A73"/>
+                </a:solidFill>
+                <a:latin typeface="Noto Serif SC" pitchFamily="34" charset="0"/>
+                <a:ea typeface="Noto Serif SC" pitchFamily="34" charset="-122"/>
+                <a:cs typeface="Noto Serif SC" pitchFamily="34" charset="-120"/>
+              </a:rPr>
+              <a:t>举一个中文例子</a:t>
+            </a:r>
+            <a:endParaRPr lang="en-US" sz="1500" dirty="0"/>
+          </a:p>
+        </p:txBody>
+      </p:sp>
+      <p:sp>
+        <p:nvSpPr>
+          <p:cNvPr id="17" name="Text 15"/>
+          <p:cNvSpPr/>
+          <p:nvPr/>
+        </p:nvSpPr>
+        <p:spPr>
+          <a:xfrm>
+            <a:off x="609600" y="2639020"/>
+            <a:ext cx="10972800" cy="712291"/>
+          </a:xfrm>
+          <a:prstGeom prst="roundRect">
+            <a:avLst>
+              <a:gd name="adj" fmla="val 8915"/>
+            </a:avLst>
+          </a:prstGeom>
+          <a:solidFill>
+            <a:srgbClr val="E6EAEB"/>
+          </a:solidFill>
+          <a:ln w="9525">
+            <a:solidFill>
+              <a:srgbClr val="D5DBDD"/>
+            </a:solidFill>
+          </a:ln>
+        </p:spPr>
+        <p:txBody>
+          <a:bodyPr wrap="square" rtlCol="0" anchor="ctr"/>
+          <a:lstStyle/>
+          <a:p>
+            <a:pPr indent="0" marL="0">
+              <a:buNone/>
+            </a:pPr>
+            <a:endParaRPr lang="en-US" dirty="0"/>
+          </a:p>
+        </p:txBody>
+      </p:sp>
+      <p:sp>
+        <p:nvSpPr>
+          <p:cNvPr id="18" name="Text 16"/>
+          <p:cNvSpPr/>
+          <p:nvPr/>
+        </p:nvSpPr>
+        <p:spPr>
+          <a:xfrm>
+            <a:off x="796826" y="2711946"/>
+            <a:ext cx="246075" cy="259110"/>
+          </a:xfrm>
+          <a:prstGeom prst="rect">
+            <a:avLst/>
+          </a:prstGeom>
+          <a:noFill/>
+          <a:ln/>
+        </p:spPr>
+        <p:txBody>
+          <a:bodyPr wrap="square" lIns="0" tIns="0" rIns="0" bIns="0" rtlCol="0" anchor="t"/>
+          <a:lstStyle/>
+          <a:p>
+            <a:pPr algn="l" indent="0" marL="0">
+              <a:lnSpc>
+                <a:spcPts val="2040"/>
+              </a:lnSpc>
+              <a:buNone/>
+            </a:pPr>
+            <a:r>
+              <a:rPr lang="en-US" sz="1700" b="1" dirty="0">
+                <a:solidFill>
+                  <a:srgbClr val="B05B3B"/>
+                </a:solidFill>
+                <a:latin typeface="Noto Serif SC" pitchFamily="34" charset="0"/>
+                <a:ea typeface="Noto Serif SC" pitchFamily="34" charset="-122"/>
+                <a:cs typeface="Noto Serif SC" pitchFamily="34" charset="-120"/>
+              </a:rPr>
+              <a:t>3</a:t>
+            </a:r>
+            <a:endParaRPr lang="en-US" sz="1700" dirty="0"/>
+          </a:p>
+        </p:txBody>
+      </p:sp>
+      <p:sp>
+        <p:nvSpPr>
+          <p:cNvPr id="19" name="Text 17"/>
+          <p:cNvSpPr/>
+          <p:nvPr/>
+        </p:nvSpPr>
+        <p:spPr>
+          <a:xfrm>
+            <a:off x="1203127" y="2711946"/>
+            <a:ext cx="2401702" cy="248989"/>
+          </a:xfrm>
+          <a:prstGeom prst="rect">
+            <a:avLst/>
+          </a:prstGeom>
+          <a:noFill/>
+          <a:ln/>
+        </p:spPr>
+        <p:txBody>
+          <a:bodyPr wrap="square" lIns="0" tIns="0" rIns="0" bIns="0" rtlCol="0" anchor="t"/>
+          <a:lstStyle/>
+          <a:p>
+            <a:pPr algn="l" indent="0" marL="0">
+              <a:lnSpc>
+                <a:spcPts val="1960"/>
+              </a:lnSpc>
+              <a:buNone/>
+            </a:pPr>
+            <a:r>
+              <a:rPr lang="en-US" sz="1400" dirty="0">
+                <a:solidFill>
+                  <a:srgbClr val="262B30"/>
+                </a:solidFill>
+                <a:latin typeface="Noto Sans" pitchFamily="34" charset="0"/>
+                <a:ea typeface="Noto Sans" pitchFamily="34" charset="-122"/>
+                <a:cs typeface="Noto Sans" pitchFamily="34" charset="-120"/>
+              </a:rPr>
+              <a:t>第三课　火车站就在马路对面</a:t>
+            </a:r>
+            <a:endParaRPr lang="en-US" sz="1400" dirty="0"/>
+          </a:p>
+        </p:txBody>
+      </p:sp>
+      <p:sp>
+        <p:nvSpPr>
+          <p:cNvPr id="20" name="Text 18"/>
+          <p:cNvSpPr/>
+          <p:nvPr/>
+        </p:nvSpPr>
+        <p:spPr>
+          <a:xfrm>
+            <a:off x="1203127" y="3011686"/>
+            <a:ext cx="2401702" cy="266700"/>
+          </a:xfrm>
+          <a:prstGeom prst="rect">
+            <a:avLst/>
+          </a:prstGeom>
+          <a:noFill/>
+          <a:ln/>
+        </p:spPr>
+        <p:txBody>
+          <a:bodyPr wrap="square" lIns="0" tIns="0" rIns="0" bIns="0" rtlCol="0" anchor="t"/>
+          <a:lstStyle/>
+          <a:p>
+            <a:pPr algn="l" indent="0" marL="0">
+              <a:spcBef>
+                <a:spcPts val="400"/>
+              </a:spcBef>
+              <a:buNone/>
+            </a:pPr>
+            <a:r>
+              <a:rPr lang="en-US" sz="1500" b="1" dirty="0">
+                <a:solidFill>
+                  <a:srgbClr val="3D5A73"/>
+                </a:solidFill>
+                <a:latin typeface="Noto Serif SC" pitchFamily="34" charset="0"/>
+                <a:ea typeface="Noto Serif SC" pitchFamily="34" charset="-122"/>
+                <a:cs typeface="Noto Serif SC" pitchFamily="34" charset="-120"/>
+              </a:rPr>
+              <a:t>举一个中文例子</a:t>
+            </a:r>
+            <a:endParaRPr lang="en-US" sz="1500" dirty="0"/>
+          </a:p>
+        </p:txBody>
+      </p:sp>
+      <p:sp>
+        <p:nvSpPr>
+          <p:cNvPr id="21" name="Text 19"/>
+          <p:cNvSpPr/>
+          <p:nvPr/>
+        </p:nvSpPr>
+        <p:spPr>
+          <a:xfrm>
+            <a:off x="609600" y="3402062"/>
+            <a:ext cx="10972800" cy="712291"/>
+          </a:xfrm>
+          <a:prstGeom prst="roundRect">
+            <a:avLst>
+              <a:gd name="adj" fmla="val 8915"/>
+            </a:avLst>
+          </a:prstGeom>
+          <a:solidFill>
+            <a:srgbClr val="E6EAEB"/>
+          </a:solidFill>
+          <a:ln w="9525">
+            <a:solidFill>
+              <a:srgbClr val="D5DBDD"/>
+            </a:solidFill>
+          </a:ln>
+        </p:spPr>
+        <p:txBody>
+          <a:bodyPr wrap="square" rtlCol="0" anchor="ctr"/>
+          <a:lstStyle/>
+          <a:p>
+            <a:pPr indent="0" marL="0">
+              <a:buNone/>
+            </a:pPr>
+            <a:endParaRPr lang="en-US" dirty="0"/>
+          </a:p>
+        </p:txBody>
+      </p:sp>
+      <p:sp>
+        <p:nvSpPr>
+          <p:cNvPr id="22" name="Text 20"/>
+          <p:cNvSpPr/>
+          <p:nvPr/>
+        </p:nvSpPr>
+        <p:spPr>
+          <a:xfrm>
+            <a:off x="796826" y="3474988"/>
+            <a:ext cx="246075" cy="259110"/>
+          </a:xfrm>
+          <a:prstGeom prst="rect">
+            <a:avLst/>
+          </a:prstGeom>
+          <a:noFill/>
+          <a:ln/>
+        </p:spPr>
+        <p:txBody>
+          <a:bodyPr wrap="square" lIns="0" tIns="0" rIns="0" bIns="0" rtlCol="0" anchor="t"/>
+          <a:lstStyle/>
+          <a:p>
+            <a:pPr algn="l" indent="0" marL="0">
+              <a:lnSpc>
+                <a:spcPts val="2040"/>
+              </a:lnSpc>
+              <a:buNone/>
+            </a:pPr>
+            <a:r>
+              <a:rPr lang="en-US" sz="1700" b="1" dirty="0">
+                <a:solidFill>
+                  <a:srgbClr val="B05B3B"/>
+                </a:solidFill>
+                <a:latin typeface="Noto Serif SC" pitchFamily="34" charset="0"/>
+                <a:ea typeface="Noto Serif SC" pitchFamily="34" charset="-122"/>
+                <a:cs typeface="Noto Serif SC" pitchFamily="34" charset="-120"/>
+              </a:rPr>
+              <a:t>4</a:t>
+            </a:r>
+            <a:endParaRPr lang="en-US" sz="1700" dirty="0"/>
+          </a:p>
+        </p:txBody>
+      </p:sp>
+      <p:sp>
+        <p:nvSpPr>
+          <p:cNvPr id="23" name="Text 21"/>
+          <p:cNvSpPr/>
+          <p:nvPr/>
+        </p:nvSpPr>
+        <p:spPr>
+          <a:xfrm>
+            <a:off x="1203127" y="3474988"/>
+            <a:ext cx="2955789" cy="248989"/>
+          </a:xfrm>
+          <a:prstGeom prst="rect">
+            <a:avLst/>
+          </a:prstGeom>
+          <a:noFill/>
+          <a:ln/>
+        </p:spPr>
+        <p:txBody>
+          <a:bodyPr wrap="square" lIns="0" tIns="0" rIns="0" bIns="0" rtlCol="0" anchor="t"/>
+          <a:lstStyle/>
+          <a:p>
+            <a:pPr algn="l" indent="0" marL="0">
+              <a:lnSpc>
+                <a:spcPts val="1960"/>
+              </a:lnSpc>
+              <a:buNone/>
+            </a:pPr>
+            <a:r>
+              <a:rPr lang="en-US" sz="1400" dirty="0">
+                <a:solidFill>
+                  <a:srgbClr val="262B30"/>
+                </a:solidFill>
+                <a:latin typeface="Noto Sans" pitchFamily="34" charset="0"/>
+                <a:ea typeface="Noto Sans" pitchFamily="34" charset="-122"/>
+                <a:cs typeface="Noto Sans" pitchFamily="34" charset="-120"/>
+              </a:rPr>
+              <a:t>第四课　我先坐船，然后坐公共汽车</a:t>
+            </a:r>
+            <a:endParaRPr lang="en-US" sz="1400" dirty="0"/>
+          </a:p>
+        </p:txBody>
+      </p:sp>
+      <p:sp>
+        <p:nvSpPr>
+          <p:cNvPr id="24" name="Text 22"/>
+          <p:cNvSpPr/>
+          <p:nvPr/>
+        </p:nvSpPr>
+        <p:spPr>
+          <a:xfrm>
+            <a:off x="1203127" y="3774728"/>
+            <a:ext cx="2955789" cy="266700"/>
+          </a:xfrm>
+          <a:prstGeom prst="rect">
+            <a:avLst/>
+          </a:prstGeom>
+          <a:noFill/>
+          <a:ln/>
+        </p:spPr>
+        <p:txBody>
+          <a:bodyPr wrap="square" lIns="0" tIns="0" rIns="0" bIns="0" rtlCol="0" anchor="t"/>
+          <a:lstStyle/>
+          <a:p>
+            <a:pPr algn="l" indent="0" marL="0">
+              <a:spcBef>
+                <a:spcPts val="400"/>
+              </a:spcBef>
+              <a:buNone/>
+            </a:pPr>
+            <a:r>
+              <a:rPr lang="en-US" sz="1500" b="1" dirty="0">
+                <a:solidFill>
+                  <a:srgbClr val="3D5A73"/>
+                </a:solidFill>
+                <a:latin typeface="Noto Serif SC" pitchFamily="34" charset="0"/>
+                <a:ea typeface="Noto Serif SC" pitchFamily="34" charset="-122"/>
+                <a:cs typeface="Noto Serif SC" pitchFamily="34" charset="-120"/>
+              </a:rPr>
+              <a:t>举一个中文例子</a:t>
+            </a:r>
+            <a:endParaRPr lang="en-US" sz="1500" dirty="0"/>
+          </a:p>
+        </p:txBody>
+      </p:sp>
+      <p:sp>
+        <p:nvSpPr>
+          <p:cNvPr id="25" name="Text 23"/>
+          <p:cNvSpPr/>
+          <p:nvPr/>
+        </p:nvSpPr>
+        <p:spPr>
+          <a:xfrm>
+            <a:off x="609600" y="4165104"/>
+            <a:ext cx="10972800" cy="712291"/>
+          </a:xfrm>
+          <a:prstGeom prst="roundRect">
+            <a:avLst>
+              <a:gd name="adj" fmla="val 8915"/>
+            </a:avLst>
+          </a:prstGeom>
+          <a:solidFill>
+            <a:srgbClr val="E6EAEB"/>
+          </a:solidFill>
+          <a:ln w="9525">
+            <a:solidFill>
+              <a:srgbClr val="D5DBDD"/>
+            </a:solidFill>
+          </a:ln>
+        </p:spPr>
+        <p:txBody>
+          <a:bodyPr wrap="square" rtlCol="0" anchor="ctr"/>
+          <a:lstStyle/>
+          <a:p>
+            <a:pPr indent="0" marL="0">
+              <a:buNone/>
+            </a:pPr>
+            <a:endParaRPr lang="en-US" dirty="0"/>
+          </a:p>
+        </p:txBody>
+      </p:sp>
+      <p:sp>
+        <p:nvSpPr>
+          <p:cNvPr id="26" name="Text 24"/>
+          <p:cNvSpPr/>
+          <p:nvPr/>
+        </p:nvSpPr>
+        <p:spPr>
+          <a:xfrm>
+            <a:off x="796826" y="4238030"/>
+            <a:ext cx="246075" cy="259110"/>
+          </a:xfrm>
+          <a:prstGeom prst="rect">
+            <a:avLst/>
+          </a:prstGeom>
+          <a:noFill/>
+          <a:ln/>
+        </p:spPr>
+        <p:txBody>
+          <a:bodyPr wrap="square" lIns="0" tIns="0" rIns="0" bIns="0" rtlCol="0" anchor="t"/>
+          <a:lstStyle/>
+          <a:p>
+            <a:pPr algn="l" indent="0" marL="0">
+              <a:lnSpc>
+                <a:spcPts val="2040"/>
+              </a:lnSpc>
+              <a:buNone/>
+            </a:pPr>
+            <a:r>
+              <a:rPr lang="en-US" sz="1700" b="1" dirty="0">
+                <a:solidFill>
+                  <a:srgbClr val="B05B3B"/>
+                </a:solidFill>
+                <a:latin typeface="Noto Serif SC" pitchFamily="34" charset="0"/>
+                <a:ea typeface="Noto Serif SC" pitchFamily="34" charset="-122"/>
+                <a:cs typeface="Noto Serif SC" pitchFamily="34" charset="-120"/>
+              </a:rPr>
+              <a:t>5</a:t>
+            </a:r>
+            <a:endParaRPr lang="en-US" sz="1700" dirty="0"/>
+          </a:p>
+        </p:txBody>
+      </p:sp>
+      <p:sp>
+        <p:nvSpPr>
+          <p:cNvPr id="27" name="Text 25"/>
+          <p:cNvSpPr/>
+          <p:nvPr/>
+        </p:nvSpPr>
+        <p:spPr>
+          <a:xfrm>
+            <a:off x="1203127" y="4238030"/>
+            <a:ext cx="3758532" cy="248989"/>
+          </a:xfrm>
+          <a:prstGeom prst="rect">
+            <a:avLst/>
+          </a:prstGeom>
+          <a:noFill/>
+          <a:ln/>
+        </p:spPr>
+        <p:txBody>
+          <a:bodyPr wrap="square" lIns="0" tIns="0" rIns="0" bIns="0" rtlCol="0" anchor="t"/>
+          <a:lstStyle/>
+          <a:p>
+            <a:pPr algn="l" indent="0" marL="0">
+              <a:lnSpc>
+                <a:spcPts val="1960"/>
+              </a:lnSpc>
+              <a:buNone/>
+            </a:pPr>
+            <a:r>
+              <a:rPr lang="en-US" sz="1400" dirty="0">
+                <a:solidFill>
+                  <a:srgbClr val="262B30"/>
+                </a:solidFill>
+                <a:latin typeface="Noto Sans" pitchFamily="34" charset="0"/>
+                <a:ea typeface="Noto Sans" pitchFamily="34" charset="-122"/>
+                <a:cs typeface="Noto Sans" pitchFamily="34" charset="-120"/>
+              </a:rPr>
+              <a:t>第五课　要坐多长时间？　—— 大约二十分钟</a:t>
+            </a:r>
+            <a:endParaRPr lang="en-US" sz="1400" dirty="0"/>
+          </a:p>
+        </p:txBody>
+      </p:sp>
+      <p:sp>
+        <p:nvSpPr>
+          <p:cNvPr id="28" name="Text 26"/>
+          <p:cNvSpPr/>
+          <p:nvPr/>
+        </p:nvSpPr>
+        <p:spPr>
+          <a:xfrm>
+            <a:off x="1203127" y="4537770"/>
+            <a:ext cx="3758532" cy="266700"/>
+          </a:xfrm>
+          <a:prstGeom prst="rect">
+            <a:avLst/>
+          </a:prstGeom>
+          <a:noFill/>
+          <a:ln/>
+        </p:spPr>
+        <p:txBody>
+          <a:bodyPr wrap="square" lIns="0" tIns="0" rIns="0" bIns="0" rtlCol="0" anchor="t"/>
+          <a:lstStyle/>
+          <a:p>
+            <a:pPr algn="l" indent="0" marL="0">
+              <a:spcBef>
+                <a:spcPts val="400"/>
+              </a:spcBef>
+              <a:buNone/>
+            </a:pPr>
+            <a:r>
+              <a:rPr lang="en-US" sz="1500" b="1" dirty="0">
+                <a:solidFill>
+                  <a:srgbClr val="3D5A73"/>
+                </a:solidFill>
+                <a:latin typeface="Noto Serif SC" pitchFamily="34" charset="0"/>
+                <a:ea typeface="Noto Serif SC" pitchFamily="34" charset="-122"/>
+                <a:cs typeface="Noto Serif SC" pitchFamily="34" charset="-120"/>
+              </a:rPr>
+              <a:t>举一个中文例子</a:t>
+            </a:r>
+            <a:endParaRPr lang="en-US" sz="1500" dirty="0"/>
+          </a:p>
+        </p:txBody>
+      </p:sp>
+      <p:sp>
+        <p:nvSpPr>
+          <p:cNvPr id="29" name="Text 27"/>
+          <p:cNvSpPr/>
+          <p:nvPr/>
+        </p:nvSpPr>
+        <p:spPr>
+          <a:xfrm>
+            <a:off x="609600" y="4928146"/>
+            <a:ext cx="10972800" cy="712291"/>
+          </a:xfrm>
+          <a:prstGeom prst="roundRect">
+            <a:avLst>
+              <a:gd name="adj" fmla="val 8915"/>
+            </a:avLst>
+          </a:prstGeom>
+          <a:solidFill>
+            <a:srgbClr val="E6EAEB"/>
+          </a:solidFill>
+          <a:ln w="9525">
+            <a:solidFill>
+              <a:srgbClr val="D5DBDD"/>
+            </a:solidFill>
+          </a:ln>
+        </p:spPr>
+        <p:txBody>
+          <a:bodyPr wrap="square" rtlCol="0" anchor="ctr"/>
+          <a:lstStyle/>
+          <a:p>
+            <a:pPr indent="0" marL="0">
+              <a:buNone/>
+            </a:pPr>
+            <a:endParaRPr lang="en-US" dirty="0"/>
+          </a:p>
+        </p:txBody>
+      </p:sp>
+      <p:sp>
+        <p:nvSpPr>
+          <p:cNvPr id="30" name="Text 28"/>
+          <p:cNvSpPr/>
+          <p:nvPr/>
+        </p:nvSpPr>
+        <p:spPr>
+          <a:xfrm>
+            <a:off x="796826" y="5001071"/>
+            <a:ext cx="246075" cy="259110"/>
+          </a:xfrm>
+          <a:prstGeom prst="rect">
+            <a:avLst/>
+          </a:prstGeom>
+          <a:noFill/>
+          <a:ln/>
+        </p:spPr>
+        <p:txBody>
+          <a:bodyPr wrap="square" lIns="0" tIns="0" rIns="0" bIns="0" rtlCol="0" anchor="t"/>
+          <a:lstStyle/>
+          <a:p>
+            <a:pPr algn="l" indent="0" marL="0">
+              <a:lnSpc>
+                <a:spcPts val="2040"/>
+              </a:lnSpc>
+              <a:buNone/>
+            </a:pPr>
+            <a:r>
+              <a:rPr lang="en-US" sz="1700" b="1" dirty="0">
+                <a:solidFill>
+                  <a:srgbClr val="B05B3B"/>
+                </a:solidFill>
+                <a:latin typeface="Noto Serif SC" pitchFamily="34" charset="0"/>
+                <a:ea typeface="Noto Serif SC" pitchFamily="34" charset="-122"/>
+                <a:cs typeface="Noto Serif SC" pitchFamily="34" charset="-120"/>
+              </a:rPr>
+              <a:t>6</a:t>
+            </a:r>
+            <a:endParaRPr lang="en-US" sz="1700" dirty="0"/>
+          </a:p>
+        </p:txBody>
+      </p:sp>
+      <p:sp>
+        <p:nvSpPr>
+          <p:cNvPr id="31" name="Text 29"/>
+          <p:cNvSpPr/>
+          <p:nvPr/>
+        </p:nvSpPr>
+        <p:spPr>
+          <a:xfrm>
+            <a:off x="1203127" y="5001071"/>
+            <a:ext cx="3325282" cy="248989"/>
+          </a:xfrm>
+          <a:prstGeom prst="rect">
+            <a:avLst/>
+          </a:prstGeom>
+          <a:noFill/>
+          <a:ln/>
+        </p:spPr>
+        <p:txBody>
+          <a:bodyPr wrap="square" lIns="0" tIns="0" rIns="0" bIns="0" rtlCol="0" anchor="t"/>
+          <a:lstStyle/>
+          <a:p>
+            <a:pPr algn="l" indent="0" marL="0">
+              <a:lnSpc>
+                <a:spcPts val="1960"/>
+              </a:lnSpc>
+              <a:buNone/>
+            </a:pPr>
+            <a:r>
+              <a:rPr lang="en-US" sz="1400" dirty="0">
+                <a:solidFill>
+                  <a:srgbClr val="262B30"/>
+                </a:solidFill>
+                <a:latin typeface="Noto Sans" pitchFamily="34" charset="0"/>
+                <a:ea typeface="Noto Sans" pitchFamily="34" charset="-122"/>
+                <a:cs typeface="Noto Sans" pitchFamily="34" charset="-120"/>
+              </a:rPr>
+              <a:t>第六课　水果店、书店、理发店、快餐店</a:t>
+            </a:r>
+            <a:endParaRPr lang="en-US" sz="1400" dirty="0"/>
+          </a:p>
+        </p:txBody>
+      </p:sp>
+      <p:sp>
+        <p:nvSpPr>
+          <p:cNvPr id="32" name="Text 30"/>
+          <p:cNvSpPr/>
+          <p:nvPr/>
+        </p:nvSpPr>
+        <p:spPr>
+          <a:xfrm>
+            <a:off x="1203127" y="5300811"/>
+            <a:ext cx="3325282" cy="266700"/>
+          </a:xfrm>
+          <a:prstGeom prst="rect">
+            <a:avLst/>
+          </a:prstGeom>
+          <a:noFill/>
+          <a:ln/>
+        </p:spPr>
+        <p:txBody>
+          <a:bodyPr wrap="square" lIns="0" tIns="0" rIns="0" bIns="0" rtlCol="0" anchor="t"/>
+          <a:lstStyle/>
+          <a:p>
+            <a:pPr algn="l" indent="0" marL="0">
+              <a:spcBef>
+                <a:spcPts val="400"/>
+              </a:spcBef>
+              <a:buNone/>
+            </a:pPr>
+            <a:r>
+              <a:rPr lang="en-US" sz="1500" b="1" dirty="0">
+                <a:solidFill>
+                  <a:srgbClr val="3D5A73"/>
+                </a:solidFill>
+                <a:latin typeface="Noto Serif SC" pitchFamily="34" charset="0"/>
+                <a:ea typeface="Noto Serif SC" pitchFamily="34" charset="-122"/>
+                <a:cs typeface="Noto Serif SC" pitchFamily="34" charset="-120"/>
+              </a:rPr>
+              <a:t>举一个中文例子</a:t>
+            </a:r>
+            <a:endParaRPr lang="en-US" sz="1500" dirty="0"/>
+          </a:p>
+        </p:txBody>
+      </p:sp>
+      <p:sp>
+        <p:nvSpPr>
+          <p:cNvPr id="33" name="Text 31"/>
+          <p:cNvSpPr/>
+          <p:nvPr/>
+        </p:nvSpPr>
+        <p:spPr>
+          <a:xfrm>
+            <a:off x="609600" y="5741938"/>
+            <a:ext cx="11192256" cy="228600"/>
+          </a:xfrm>
+          <a:prstGeom prst="rect">
+            <a:avLst/>
+          </a:prstGeom>
+          <a:noFill/>
+          <a:ln/>
+        </p:spPr>
+        <p:txBody>
+          <a:bodyPr wrap="square" lIns="0" tIns="0" rIns="0" bIns="0" rtlCol="0" anchor="t"/>
+          <a:lstStyle/>
+          <a:p>
+            <a:pPr algn="l" indent="0" marL="0">
+              <a:lnSpc>
+                <a:spcPts val="1800"/>
+              </a:lnSpc>
+              <a:spcBef>
+                <a:spcPts val="800"/>
+              </a:spcBef>
+              <a:buNone/>
+            </a:pPr>
+            <a:r>
+              <a:rPr lang="en-US" sz="1200" dirty="0">
+                <a:solidFill>
+                  <a:srgbClr val="6E7780"/>
+                </a:solidFill>
+                <a:latin typeface="Noto Sans" pitchFamily="34" charset="0"/>
+                <a:ea typeface="Noto Sans" pitchFamily="34" charset="-122"/>
+                <a:cs typeface="Noto Sans" pitchFamily="34" charset="-120"/>
+              </a:rPr>
+              <a:t>今天不是只看今天的三条——六节课一条一条过。每一条请一个同学用中文举例，说得出来才算学会。</a:t>
+            </a:r>
+            <a:endParaRPr lang="en-US" sz="1200" dirty="0"/>
+          </a:p>
+        </p:txBody>
+      </p:sp>
+    </p:spTree>
+  </p:cSld>
+  <p:clrMapOvr>
+    <a:masterClrMapping/>
+  </p:clrMapOvr>
+</p:sld>
+</file>
+
+<file path=ppt/slides/slide27.xml><?xml version="1.0" encoding="utf-8"?>
+<p:sld xmlns:a="http://schemas.openxmlformats.org/drawingml/2006/main" xmlns:r="http://schemas.openxmlformats.org/officeDocument/2006/relationships" xmlns:p="http://schemas.openxmlformats.org/presentationml/2006/main">
+  <p:cSld name="Slide 27">
+    <p:bg>
+      <p:bgPr>
+        <a:solidFill>
+          <a:srgbClr val="F2F4F4"/>
+        </a:solidFill>
+      </p:bgPr>
+    </p:bg>
+    <p:spTree>
+      <p:nvGrpSpPr>
+        <p:cNvPr id="1" name=""/>
+        <p:cNvGrpSpPr/>
+        <p:nvPr/>
+      </p:nvGrpSpPr>
+      <p:grpSpPr>
+        <a:xfrm>
+          <a:off x="0" y="0"/>
+          <a:ext cx="0" cy="0"/>
+          <a:chOff x="0" y="0"/>
+          <a:chExt cx="0" cy="0"/>
+        </a:xfrm>
+      </p:grpSpPr>
+      <p:sp>
+        <p:nvSpPr>
+          <p:cNvPr id="2" name="Text 0"/>
+          <p:cNvSpPr/>
+          <p:nvPr/>
+        </p:nvSpPr>
+        <p:spPr>
+          <a:xfrm>
+            <a:off x="0" y="0"/>
+            <a:ext cx="12192000" cy="542925"/>
+          </a:xfrm>
+          <a:prstGeom prst="rect">
+            <a:avLst/>
+          </a:prstGeom>
+          <a:solidFill>
+            <a:srgbClr val="F2F4F4"/>
+          </a:solidFill>
+          <a:ln/>
+        </p:spPr>
+        <p:txBody>
+          <a:bodyPr wrap="square" rtlCol="0" anchor="ctr"/>
+          <a:lstStyle/>
+          <a:p>
+            <a:pPr indent="0" marL="0">
+              <a:buNone/>
+            </a:pPr>
+            <a:endParaRPr lang="en-US" dirty="0"/>
+          </a:p>
+        </p:txBody>
+      </p:sp>
+      <p:sp>
+        <p:nvSpPr>
+          <p:cNvPr id="3" name="Shape 1"/>
+          <p:cNvSpPr/>
+          <p:nvPr/>
+        </p:nvSpPr>
+        <p:spPr>
+          <a:xfrm>
+            <a:off x="0" y="538163"/>
+            <a:ext cx="12192000" cy="0"/>
+          </a:xfrm>
+          <a:prstGeom prst="line">
+            <a:avLst/>
+          </a:prstGeom>
+          <a:noFill/>
+          <a:ln w="9525">
+            <a:solidFill>
+              <a:srgbClr val="D5DBDD"/>
+            </a:solidFill>
+            <a:prstDash val="solid"/>
+          </a:ln>
+        </p:spPr>
+      </p:sp>
+      <p:sp>
+        <p:nvSpPr>
+          <p:cNvPr id="4" name="Text 2"/>
+          <p:cNvSpPr/>
+          <p:nvPr/>
+        </p:nvSpPr>
+        <p:spPr>
+          <a:xfrm>
+            <a:off x="507950" y="176213"/>
+            <a:ext cx="1785830" cy="180975"/>
+          </a:xfrm>
+          <a:prstGeom prst="rect">
+            <a:avLst/>
+          </a:prstGeom>
+          <a:noFill/>
+          <a:ln/>
+        </p:spPr>
+        <p:txBody>
+          <a:bodyPr wrap="square" lIns="0" tIns="0" rIns="0" bIns="0" rtlCol="0" anchor="t"/>
+          <a:lstStyle/>
+          <a:p>
+            <a:pPr algn="l" indent="0" marL="0">
+              <a:buNone/>
+            </a:pPr>
+            <a:r>
+              <a:rPr lang="en-US" sz="1000" b="1" dirty="0">
+                <a:solidFill>
+                  <a:srgbClr val="B05B3B"/>
+                </a:solidFill>
+                <a:latin typeface="Noto Sans" pitchFamily="34" charset="0"/>
+                <a:ea typeface="Noto Sans" pitchFamily="34" charset="-122"/>
+                <a:cs typeface="Noto Sans" pitchFamily="34" charset="-120"/>
+              </a:rPr>
+              <a:t>43–50 MIN · PLENARY</a:t>
+            </a:r>
+            <a:endParaRPr lang="en-US" sz="1000" dirty="0"/>
+          </a:p>
+        </p:txBody>
+      </p:sp>
+      <p:sp>
+        <p:nvSpPr>
+          <p:cNvPr id="5" name="Text 3"/>
+          <p:cNvSpPr/>
+          <p:nvPr/>
+        </p:nvSpPr>
+        <p:spPr>
+          <a:xfrm>
+            <a:off x="2544217" y="166688"/>
+            <a:ext cx="901113" cy="200025"/>
+          </a:xfrm>
+          <a:prstGeom prst="rect">
+            <a:avLst/>
+          </a:prstGeom>
+          <a:noFill/>
+          <a:ln/>
+        </p:spPr>
+        <p:txBody>
+          <a:bodyPr wrap="square" lIns="0" tIns="0" rIns="0" bIns="0" rtlCol="0" anchor="t"/>
+          <a:lstStyle/>
+          <a:p>
+            <a:pPr algn="l" indent="0" marL="0">
+              <a:buNone/>
+            </a:pPr>
+            <a:r>
+              <a:rPr lang="en-US" sz="1100" dirty="0">
+                <a:solidFill>
+                  <a:srgbClr val="4B545C"/>
+                </a:solidFill>
+                <a:latin typeface="Noto Sans" pitchFamily="34" charset="0"/>
+                <a:ea typeface="Noto Sans" pitchFamily="34" charset="-122"/>
+                <a:cs typeface="Noto Sans" pitchFamily="34" charset="-120"/>
+              </a:rPr>
+              <a:t>自评 · 小白板</a:t>
+            </a:r>
+            <a:endParaRPr lang="en-US" sz="1100" dirty="0"/>
+          </a:p>
+        </p:txBody>
+      </p:sp>
+      <p:sp>
+        <p:nvSpPr>
+          <p:cNvPr id="6" name="Text 4"/>
+          <p:cNvSpPr/>
+          <p:nvPr/>
+        </p:nvSpPr>
+        <p:spPr>
+          <a:xfrm>
+            <a:off x="11188750" y="176213"/>
+            <a:ext cx="505206" cy="180975"/>
+          </a:xfrm>
+          <a:prstGeom prst="rect">
+            <a:avLst/>
+          </a:prstGeom>
+          <a:noFill/>
+          <a:ln/>
+        </p:spPr>
+        <p:txBody>
+          <a:bodyPr wrap="square" lIns="0" tIns="0" rIns="0" bIns="0" rtlCol="0" anchor="t"/>
+          <a:lstStyle/>
+          <a:p>
+            <a:pPr algn="l" indent="0" marL="0">
+              <a:buNone/>
+            </a:pPr>
+            <a:r>
+              <a:rPr lang="en-US" sz="1000" dirty="0">
+                <a:solidFill>
+                  <a:srgbClr val="6E7780"/>
+                </a:solidFill>
+                <a:latin typeface="Noto Sans" pitchFamily="34" charset="0"/>
+                <a:ea typeface="Noto Sans" pitchFamily="34" charset="-122"/>
+                <a:cs typeface="Noto Sans" pitchFamily="34" charset="-120"/>
+              </a:rPr>
+              <a:t>27 / 28</a:t>
+            </a:r>
+            <a:endParaRPr lang="en-US" sz="1000" dirty="0"/>
+          </a:p>
+        </p:txBody>
+      </p:sp>
+      <p:sp>
+        <p:nvSpPr>
+          <p:cNvPr id="7" name="Text 5"/>
+          <p:cNvSpPr/>
+          <p:nvPr/>
+        </p:nvSpPr>
+        <p:spPr>
+          <a:xfrm>
+            <a:off x="507950" y="0"/>
+            <a:ext cx="11176099" cy="31700"/>
+          </a:xfrm>
+          <a:prstGeom prst="rect">
+            <a:avLst/>
+          </a:prstGeom>
+          <a:solidFill>
+            <a:srgbClr val="3D5A73"/>
+          </a:solidFill>
+          <a:ln/>
+        </p:spPr>
+        <p:txBody>
+          <a:bodyPr wrap="square" rtlCol="0" anchor="ctr"/>
+          <a:lstStyle/>
+          <a:p>
+            <a:pPr indent="0" marL="0">
+              <a:buNone/>
+            </a:pPr>
+            <a:endParaRPr lang="en-US" dirty="0"/>
+          </a:p>
+        </p:txBody>
+      </p:sp>
+      <p:sp>
+        <p:nvSpPr>
+          <p:cNvPr id="8" name="Text 6"/>
+          <p:cNvSpPr/>
+          <p:nvPr/>
+        </p:nvSpPr>
+        <p:spPr>
+          <a:xfrm>
+            <a:off x="609600" y="1725960"/>
+            <a:ext cx="11192256" cy="200025"/>
+          </a:xfrm>
+          <a:prstGeom prst="rect">
+            <a:avLst/>
+          </a:prstGeom>
+          <a:noFill/>
+          <a:ln/>
+        </p:spPr>
+        <p:txBody>
+          <a:bodyPr wrap="square" lIns="0" tIns="0" rIns="0" bIns="0" rtlCol="0" anchor="t"/>
+          <a:lstStyle/>
+          <a:p>
+            <a:pPr algn="l" indent="0" marL="0">
+              <a:buNone/>
+            </a:pPr>
+            <a:r>
+              <a:rPr lang="en-US" sz="1100" b="1" dirty="0">
+                <a:solidFill>
+                  <a:srgbClr val="B05B3B"/>
+                </a:solidFill>
+                <a:latin typeface="Noto Sans" pitchFamily="34" charset="0"/>
+                <a:ea typeface="Noto Sans" pitchFamily="34" charset="-122"/>
+                <a:cs typeface="Noto Sans" pitchFamily="34" charset="-120"/>
+              </a:rPr>
+              <a:t>词汇总览 · 这一课的生词 · STAYS UP WHILE YOU WORK</a:t>
+            </a:r>
+            <a:endParaRPr lang="en-US" sz="1100" dirty="0"/>
+          </a:p>
+        </p:txBody>
+      </p:sp>
+      <p:sp>
+        <p:nvSpPr>
+          <p:cNvPr id="9" name="Text 7"/>
+          <p:cNvSpPr/>
+          <p:nvPr/>
+        </p:nvSpPr>
+        <p:spPr>
+          <a:xfrm>
+            <a:off x="609600" y="2027486"/>
+            <a:ext cx="2052340" cy="1298377"/>
+          </a:xfrm>
+          <a:prstGeom prst="roundRect">
+            <a:avLst>
+              <a:gd name="adj" fmla="val 8803"/>
+            </a:avLst>
+          </a:prstGeom>
+          <a:solidFill>
+            <a:srgbClr val="E6EAEB"/>
+          </a:solidFill>
+          <a:ln w="9525">
+            <a:solidFill>
+              <a:srgbClr val="D5DBDD"/>
+            </a:solidFill>
+          </a:ln>
+        </p:spPr>
+        <p:txBody>
+          <a:bodyPr wrap="square" rtlCol="0" anchor="ctr"/>
+          <a:lstStyle/>
+          <a:p>
+            <a:pPr indent="0" marL="0">
+              <a:buNone/>
+            </a:pPr>
+            <a:endParaRPr lang="en-US" dirty="0"/>
+          </a:p>
+        </p:txBody>
+      </p:sp>
+      <p:pic>
+        <p:nvPicPr>
+          <p:cNvPr id="10" name="Image 0" descr="/var/folders/6c/210dcgxn4gz5sm71vld2cy1h0000gn/T/tmp.kuKuqUEQz8/img/fujin.png">    </p:cNvPr>
+          <p:cNvPicPr>
+            <a:picLocks noChangeAspect="1"/>
+          </p:cNvPicPr>
+          <p:nvPr/>
+        </p:nvPicPr>
+        <p:blipFill>
+          <a:blip r:embed="rId1"/>
+          <a:stretch>
+            <a:fillRect/>
+          </a:stretch>
+        </p:blipFill>
+        <p:spPr>
+          <a:xfrm>
+            <a:off x="1330970" y="2125861"/>
+            <a:ext cx="609600" cy="609600"/>
+          </a:xfrm>
+          <a:prstGeom prst="rect">
+            <a:avLst/>
+          </a:prstGeom>
+        </p:spPr>
+      </p:pic>
+      <p:sp>
+        <p:nvSpPr>
+          <p:cNvPr id="11" name="Text 8"/>
+          <p:cNvSpPr/>
+          <p:nvPr/>
+        </p:nvSpPr>
+        <p:spPr>
+          <a:xfrm>
+            <a:off x="1330970" y="2798862"/>
+            <a:ext cx="621792" cy="428625"/>
+          </a:xfrm>
+          <a:prstGeom prst="rect">
+            <a:avLst/>
+          </a:prstGeom>
+          <a:noFill/>
+          <a:ln/>
+        </p:spPr>
+        <p:txBody>
+          <a:bodyPr wrap="square" lIns="0" tIns="0" rIns="0" bIns="0" rtlCol="0" anchor="t"/>
+          <a:lstStyle/>
+          <a:p>
+            <a:pPr algn="l" indent="0" marL="0">
+              <a:buNone/>
+            </a:pPr>
+            <a:r>
+              <a:rPr lang="en-US" sz="2400" b="1" dirty="0">
+                <a:solidFill>
+                  <a:srgbClr val="262B30"/>
+                </a:solidFill>
+                <a:latin typeface="Noto Serif SC" pitchFamily="34" charset="0"/>
+                <a:ea typeface="Noto Serif SC" pitchFamily="34" charset="-122"/>
+                <a:cs typeface="Noto Serif SC" pitchFamily="34" charset="-120"/>
+              </a:rPr>
+              <a:t>附近</a:t>
+            </a:r>
+            <a:endParaRPr lang="en-US" sz="2400" dirty="0"/>
+          </a:p>
+        </p:txBody>
+      </p:sp>
+      <p:sp>
+        <p:nvSpPr>
+          <p:cNvPr id="12" name="Text 9"/>
+          <p:cNvSpPr/>
+          <p:nvPr/>
+        </p:nvSpPr>
+        <p:spPr>
+          <a:xfrm>
+            <a:off x="2839641" y="2027486"/>
+            <a:ext cx="2052340" cy="1298377"/>
+          </a:xfrm>
+          <a:prstGeom prst="roundRect">
+            <a:avLst>
+              <a:gd name="adj" fmla="val 8803"/>
+            </a:avLst>
+          </a:prstGeom>
+          <a:solidFill>
+            <a:srgbClr val="E6EAEB"/>
+          </a:solidFill>
+          <a:ln w="9525">
+            <a:solidFill>
+              <a:srgbClr val="D5DBDD"/>
+            </a:solidFill>
+          </a:ln>
+        </p:spPr>
+        <p:txBody>
+          <a:bodyPr wrap="square" rtlCol="0" anchor="ctr"/>
+          <a:lstStyle/>
+          <a:p>
+            <a:pPr indent="0" marL="0">
+              <a:buNone/>
+            </a:pPr>
+            <a:endParaRPr lang="en-US" dirty="0"/>
+          </a:p>
+        </p:txBody>
+      </p:sp>
+      <p:pic>
+        <p:nvPicPr>
+          <p:cNvPr id="13" name="Image 1" descr="/var/folders/6c/210dcgxn4gz5sm71vld2cy1h0000gn/T/tmp.kuKuqUEQz8/img/li.png">    </p:cNvPr>
+          <p:cNvPicPr>
+            <a:picLocks noChangeAspect="1"/>
+          </p:cNvPicPr>
+          <p:nvPr/>
+        </p:nvPicPr>
+        <p:blipFill>
+          <a:blip r:embed="rId2"/>
+          <a:stretch>
+            <a:fillRect/>
+          </a:stretch>
+        </p:blipFill>
+        <p:spPr>
+          <a:xfrm>
+            <a:off x="3561011" y="2125861"/>
+            <a:ext cx="609600" cy="609600"/>
+          </a:xfrm>
+          <a:prstGeom prst="rect">
+            <a:avLst/>
+          </a:prstGeom>
+        </p:spPr>
+      </p:pic>
+      <p:sp>
+        <p:nvSpPr>
+          <p:cNvPr id="14" name="Text 10"/>
+          <p:cNvSpPr/>
+          <p:nvPr/>
+        </p:nvSpPr>
+        <p:spPr>
+          <a:xfrm>
+            <a:off x="3713411" y="2798862"/>
+            <a:ext cx="310896" cy="428625"/>
+          </a:xfrm>
+          <a:prstGeom prst="rect">
+            <a:avLst/>
+          </a:prstGeom>
+          <a:noFill/>
+          <a:ln/>
+        </p:spPr>
+        <p:txBody>
+          <a:bodyPr wrap="square" lIns="0" tIns="0" rIns="0" bIns="0" rtlCol="0" anchor="t"/>
+          <a:lstStyle/>
+          <a:p>
+            <a:pPr algn="l" indent="0" marL="0">
+              <a:buNone/>
+            </a:pPr>
+            <a:r>
+              <a:rPr lang="en-US" sz="2400" b="1" dirty="0">
+                <a:solidFill>
+                  <a:srgbClr val="262B30"/>
+                </a:solidFill>
+                <a:latin typeface="Noto Serif SC" pitchFamily="34" charset="0"/>
+                <a:ea typeface="Noto Serif SC" pitchFamily="34" charset="-122"/>
+                <a:cs typeface="Noto Serif SC" pitchFamily="34" charset="-120"/>
+              </a:rPr>
+              <a:t>离</a:t>
+            </a:r>
+            <a:endParaRPr lang="en-US" sz="2400" dirty="0"/>
+          </a:p>
+        </p:txBody>
+      </p:sp>
+      <p:sp>
+        <p:nvSpPr>
+          <p:cNvPr id="15" name="Text 11"/>
+          <p:cNvSpPr/>
+          <p:nvPr/>
+        </p:nvSpPr>
+        <p:spPr>
+          <a:xfrm>
+            <a:off x="5069681" y="2027486"/>
+            <a:ext cx="2052489" cy="1298377"/>
+          </a:xfrm>
+          <a:prstGeom prst="roundRect">
+            <a:avLst>
+              <a:gd name="adj" fmla="val 8803"/>
+            </a:avLst>
+          </a:prstGeom>
+          <a:solidFill>
+            <a:srgbClr val="E6EAEB"/>
+          </a:solidFill>
+          <a:ln w="9525">
+            <a:solidFill>
+              <a:srgbClr val="D5DBDD"/>
+            </a:solidFill>
+          </a:ln>
+        </p:spPr>
+        <p:txBody>
+          <a:bodyPr wrap="square" rtlCol="0" anchor="ctr"/>
+          <a:lstStyle/>
+          <a:p>
+            <a:pPr indent="0" marL="0">
+              <a:buNone/>
+            </a:pPr>
+            <a:endParaRPr lang="en-US" dirty="0"/>
+          </a:p>
+        </p:txBody>
+      </p:sp>
+      <p:sp>
+        <p:nvSpPr>
+          <p:cNvPr id="16" name="Text 12"/>
+          <p:cNvSpPr/>
+          <p:nvPr/>
+        </p:nvSpPr>
+        <p:spPr>
+          <a:xfrm>
+            <a:off x="5943451" y="2125861"/>
+            <a:ext cx="310896" cy="428625"/>
+          </a:xfrm>
+          <a:prstGeom prst="rect">
+            <a:avLst/>
+          </a:prstGeom>
+          <a:noFill/>
+          <a:ln/>
+        </p:spPr>
+        <p:txBody>
+          <a:bodyPr wrap="square" lIns="0" tIns="0" rIns="0" bIns="0" rtlCol="0" anchor="t"/>
+          <a:lstStyle/>
+          <a:p>
+            <a:pPr algn="l" indent="0" marL="0">
+              <a:buNone/>
+            </a:pPr>
+            <a:r>
+              <a:rPr lang="en-US" sz="2400" b="1" dirty="0">
+                <a:solidFill>
+                  <a:srgbClr val="262B30"/>
+                </a:solidFill>
+                <a:latin typeface="Noto Serif SC" pitchFamily="34" charset="0"/>
+                <a:ea typeface="Noto Serif SC" pitchFamily="34" charset="-122"/>
+                <a:cs typeface="Noto Serif SC" pitchFamily="34" charset="-120"/>
+              </a:rPr>
+              <a:t>就</a:t>
+            </a:r>
+            <a:endParaRPr lang="en-US" sz="2400" dirty="0"/>
+          </a:p>
+        </p:txBody>
+      </p:sp>
+      <p:sp>
+        <p:nvSpPr>
+          <p:cNvPr id="17" name="Text 13"/>
+          <p:cNvSpPr/>
+          <p:nvPr/>
+        </p:nvSpPr>
+        <p:spPr>
+          <a:xfrm>
+            <a:off x="7299871" y="2027486"/>
+            <a:ext cx="2052340" cy="1298377"/>
+          </a:xfrm>
+          <a:prstGeom prst="roundRect">
+            <a:avLst>
+              <a:gd name="adj" fmla="val 8803"/>
+            </a:avLst>
+          </a:prstGeom>
+          <a:solidFill>
+            <a:srgbClr val="E6EAEB"/>
+          </a:solidFill>
+          <a:ln w="9525">
+            <a:solidFill>
+              <a:srgbClr val="D5DBDD"/>
+            </a:solidFill>
+          </a:ln>
+        </p:spPr>
+        <p:txBody>
+          <a:bodyPr wrap="square" rtlCol="0" anchor="ctr"/>
+          <a:lstStyle/>
+          <a:p>
+            <a:pPr indent="0" marL="0">
+              <a:buNone/>
+            </a:pPr>
+            <a:endParaRPr lang="en-US" dirty="0"/>
+          </a:p>
+        </p:txBody>
+      </p:sp>
+      <p:pic>
+        <p:nvPicPr>
+          <p:cNvPr id="18" name="Image 2" descr="/var/folders/6c/210dcgxn4gz5sm71vld2cy1h0000gn/T/tmp.kuKuqUEQz8/img/ranhou.png">    </p:cNvPr>
+          <p:cNvPicPr>
+            <a:picLocks noChangeAspect="1"/>
+          </p:cNvPicPr>
+          <p:nvPr/>
+        </p:nvPicPr>
+        <p:blipFill>
+          <a:blip r:embed="rId3"/>
+          <a:stretch>
+            <a:fillRect/>
+          </a:stretch>
+        </p:blipFill>
+        <p:spPr>
+          <a:xfrm>
+            <a:off x="8021241" y="2125861"/>
+            <a:ext cx="609600" cy="609600"/>
+          </a:xfrm>
+          <a:prstGeom prst="rect">
+            <a:avLst/>
+          </a:prstGeom>
+        </p:spPr>
+      </p:pic>
+      <p:sp>
+        <p:nvSpPr>
+          <p:cNvPr id="19" name="Text 14"/>
+          <p:cNvSpPr/>
+          <p:nvPr/>
+        </p:nvSpPr>
+        <p:spPr>
+          <a:xfrm>
+            <a:off x="8021241" y="2798862"/>
+            <a:ext cx="621792" cy="428625"/>
+          </a:xfrm>
+          <a:prstGeom prst="rect">
+            <a:avLst/>
+          </a:prstGeom>
+          <a:noFill/>
+          <a:ln/>
+        </p:spPr>
+        <p:txBody>
+          <a:bodyPr wrap="square" lIns="0" tIns="0" rIns="0" bIns="0" rtlCol="0" anchor="t"/>
+          <a:lstStyle/>
+          <a:p>
+            <a:pPr algn="l" indent="0" marL="0">
+              <a:buNone/>
+            </a:pPr>
+            <a:r>
+              <a:rPr lang="en-US" sz="2400" b="1" dirty="0">
+                <a:solidFill>
+                  <a:srgbClr val="262B30"/>
+                </a:solidFill>
+                <a:latin typeface="Noto Serif SC" pitchFamily="34" charset="0"/>
+                <a:ea typeface="Noto Serif SC" pitchFamily="34" charset="-122"/>
+                <a:cs typeface="Noto Serif SC" pitchFamily="34" charset="-120"/>
+              </a:rPr>
+              <a:t>然后</a:t>
+            </a:r>
+            <a:endParaRPr lang="en-US" sz="2400" dirty="0"/>
+          </a:p>
+        </p:txBody>
+      </p:sp>
+      <p:sp>
+        <p:nvSpPr>
+          <p:cNvPr id="20" name="Text 15"/>
+          <p:cNvSpPr/>
+          <p:nvPr/>
+        </p:nvSpPr>
+        <p:spPr>
+          <a:xfrm>
+            <a:off x="9529911" y="2027486"/>
+            <a:ext cx="2052489" cy="1298377"/>
+          </a:xfrm>
+          <a:prstGeom prst="roundRect">
+            <a:avLst>
+              <a:gd name="adj" fmla="val 8803"/>
+            </a:avLst>
+          </a:prstGeom>
+          <a:solidFill>
+            <a:srgbClr val="E6EAEB"/>
+          </a:solidFill>
+          <a:ln w="9525">
+            <a:solidFill>
+              <a:srgbClr val="D5DBDD"/>
+            </a:solidFill>
+          </a:ln>
+        </p:spPr>
+        <p:txBody>
+          <a:bodyPr wrap="square" rtlCol="0" anchor="ctr"/>
+          <a:lstStyle/>
+          <a:p>
+            <a:pPr indent="0" marL="0">
+              <a:buNone/>
+            </a:pPr>
+            <a:endParaRPr lang="en-US" dirty="0"/>
+          </a:p>
+        </p:txBody>
+      </p:sp>
+      <p:pic>
+        <p:nvPicPr>
+          <p:cNvPr id="21" name="Image 3" descr="/var/folders/6c/210dcgxn4gz5sm71vld2cy1h0000gn/T/tmp.kuKuqUEQz8/img/dayue.png">    </p:cNvPr>
+          <p:cNvPicPr>
+            <a:picLocks noChangeAspect="1"/>
+          </p:cNvPicPr>
+          <p:nvPr/>
+        </p:nvPicPr>
+        <p:blipFill>
+          <a:blip r:embed="rId4"/>
+          <a:stretch>
+            <a:fillRect/>
+          </a:stretch>
+        </p:blipFill>
+        <p:spPr>
+          <a:xfrm>
+            <a:off x="10251281" y="2125861"/>
+            <a:ext cx="609600" cy="609600"/>
+          </a:xfrm>
+          <a:prstGeom prst="rect">
+            <a:avLst/>
+          </a:prstGeom>
+        </p:spPr>
+      </p:pic>
+      <p:sp>
+        <p:nvSpPr>
+          <p:cNvPr id="22" name="Text 16"/>
+          <p:cNvSpPr/>
+          <p:nvPr/>
+        </p:nvSpPr>
+        <p:spPr>
+          <a:xfrm>
+            <a:off x="10251281" y="2798862"/>
+            <a:ext cx="621792" cy="428625"/>
+          </a:xfrm>
+          <a:prstGeom prst="rect">
+            <a:avLst/>
+          </a:prstGeom>
+          <a:noFill/>
+          <a:ln/>
+        </p:spPr>
+        <p:txBody>
+          <a:bodyPr wrap="square" lIns="0" tIns="0" rIns="0" bIns="0" rtlCol="0" anchor="t"/>
+          <a:lstStyle/>
+          <a:p>
+            <a:pPr algn="l" indent="0" marL="0">
+              <a:buNone/>
+            </a:pPr>
+            <a:r>
+              <a:rPr lang="en-US" sz="2400" b="1" dirty="0">
+                <a:solidFill>
+                  <a:srgbClr val="262B30"/>
+                </a:solidFill>
+                <a:latin typeface="Noto Serif SC" pitchFamily="34" charset="0"/>
+                <a:ea typeface="Noto Serif SC" pitchFamily="34" charset="-122"/>
+                <a:cs typeface="Noto Serif SC" pitchFamily="34" charset="-120"/>
+              </a:rPr>
+              <a:t>大约</a:t>
+            </a:r>
+            <a:endParaRPr lang="en-US" sz="2400" dirty="0"/>
+          </a:p>
+        </p:txBody>
+      </p:sp>
+      <p:sp>
+        <p:nvSpPr>
+          <p:cNvPr id="23" name="Text 17"/>
+          <p:cNvSpPr/>
+          <p:nvPr/>
+        </p:nvSpPr>
+        <p:spPr>
+          <a:xfrm>
+            <a:off x="609600" y="3503563"/>
+            <a:ext cx="2052340" cy="1298377"/>
+          </a:xfrm>
+          <a:prstGeom prst="roundRect">
+            <a:avLst>
+              <a:gd name="adj" fmla="val 8803"/>
+            </a:avLst>
+          </a:prstGeom>
+          <a:solidFill>
+            <a:srgbClr val="E6EAEB"/>
+          </a:solidFill>
+          <a:ln w="9525">
+            <a:solidFill>
+              <a:srgbClr val="D5DBDD"/>
+            </a:solidFill>
+          </a:ln>
+        </p:spPr>
+        <p:txBody>
+          <a:bodyPr wrap="square" rtlCol="0" anchor="ctr"/>
+          <a:lstStyle/>
+          <a:p>
+            <a:pPr indent="0" marL="0">
+              <a:buNone/>
+            </a:pPr>
+            <a:endParaRPr lang="en-US" dirty="0"/>
+          </a:p>
+        </p:txBody>
+      </p:sp>
+      <p:pic>
+        <p:nvPicPr>
+          <p:cNvPr id="24" name="Image 4" descr="/var/folders/6c/210dcgxn4gz5sm71vld2cy1h0000gn/T/tmp.kuKuqUEQz8/img/duimian.png">    </p:cNvPr>
+          <p:cNvPicPr>
+            <a:picLocks noChangeAspect="1"/>
+          </p:cNvPicPr>
+          <p:nvPr/>
+        </p:nvPicPr>
+        <p:blipFill>
+          <a:blip r:embed="rId5"/>
+          <a:stretch>
+            <a:fillRect/>
+          </a:stretch>
+        </p:blipFill>
+        <p:spPr>
+          <a:xfrm>
+            <a:off x="1330970" y="3601938"/>
+            <a:ext cx="609600" cy="609600"/>
+          </a:xfrm>
+          <a:prstGeom prst="rect">
+            <a:avLst/>
+          </a:prstGeom>
+        </p:spPr>
+      </p:pic>
+      <p:sp>
+        <p:nvSpPr>
+          <p:cNvPr id="25" name="Text 18"/>
+          <p:cNvSpPr/>
+          <p:nvPr/>
+        </p:nvSpPr>
+        <p:spPr>
+          <a:xfrm>
+            <a:off x="1330970" y="4274939"/>
+            <a:ext cx="621792" cy="428625"/>
+          </a:xfrm>
+          <a:prstGeom prst="rect">
+            <a:avLst/>
+          </a:prstGeom>
+          <a:noFill/>
+          <a:ln/>
+        </p:spPr>
+        <p:txBody>
+          <a:bodyPr wrap="square" lIns="0" tIns="0" rIns="0" bIns="0" rtlCol="0" anchor="t"/>
+          <a:lstStyle/>
+          <a:p>
+            <a:pPr algn="l" indent="0" marL="0">
+              <a:buNone/>
+            </a:pPr>
+            <a:r>
+              <a:rPr lang="en-US" sz="2400" b="1" dirty="0">
+                <a:solidFill>
+                  <a:srgbClr val="262B30"/>
+                </a:solidFill>
+                <a:latin typeface="Noto Serif SC" pitchFamily="34" charset="0"/>
+                <a:ea typeface="Noto Serif SC" pitchFamily="34" charset="-122"/>
+                <a:cs typeface="Noto Serif SC" pitchFamily="34" charset="-120"/>
+              </a:rPr>
+              <a:t>对面</a:t>
+            </a:r>
+            <a:endParaRPr lang="en-US" sz="2400" dirty="0"/>
+          </a:p>
+        </p:txBody>
+      </p:sp>
+      <p:sp>
+        <p:nvSpPr>
+          <p:cNvPr id="26" name="Text 19"/>
+          <p:cNvSpPr/>
+          <p:nvPr/>
+        </p:nvSpPr>
+        <p:spPr>
+          <a:xfrm>
+            <a:off x="2839641" y="3503563"/>
+            <a:ext cx="2052340" cy="1298377"/>
+          </a:xfrm>
+          <a:prstGeom prst="roundRect">
+            <a:avLst>
+              <a:gd name="adj" fmla="val 8803"/>
+            </a:avLst>
+          </a:prstGeom>
+          <a:solidFill>
+            <a:srgbClr val="E6EAEB"/>
+          </a:solidFill>
+          <a:ln w="9525">
+            <a:solidFill>
+              <a:srgbClr val="D5DBDD"/>
+            </a:solidFill>
+          </a:ln>
+        </p:spPr>
+        <p:txBody>
+          <a:bodyPr wrap="square" rtlCol="0" anchor="ctr"/>
+          <a:lstStyle/>
+          <a:p>
+            <a:pPr indent="0" marL="0">
+              <a:buNone/>
+            </a:pPr>
+            <a:endParaRPr lang="en-US" dirty="0"/>
+          </a:p>
+        </p:txBody>
+      </p:sp>
+      <p:sp>
+        <p:nvSpPr>
+          <p:cNvPr id="27" name="Text 20"/>
+          <p:cNvSpPr/>
+          <p:nvPr/>
+        </p:nvSpPr>
+        <p:spPr>
+          <a:xfrm>
+            <a:off x="3713411" y="3601938"/>
+            <a:ext cx="310896" cy="428625"/>
+          </a:xfrm>
+          <a:prstGeom prst="rect">
+            <a:avLst/>
+          </a:prstGeom>
+          <a:noFill/>
+          <a:ln/>
+        </p:spPr>
+        <p:txBody>
+          <a:bodyPr wrap="square" lIns="0" tIns="0" rIns="0" bIns="0" rtlCol="0" anchor="t"/>
+          <a:lstStyle/>
+          <a:p>
+            <a:pPr algn="l" indent="0" marL="0">
+              <a:buNone/>
+            </a:pPr>
+            <a:r>
+              <a:rPr lang="en-US" sz="2400" b="1" dirty="0">
+                <a:solidFill>
+                  <a:srgbClr val="262B30"/>
+                </a:solidFill>
+                <a:latin typeface="Noto Serif SC" pitchFamily="34" charset="0"/>
+                <a:ea typeface="Noto Serif SC" pitchFamily="34" charset="-122"/>
+                <a:cs typeface="Noto Serif SC" pitchFamily="34" charset="-120"/>
+              </a:rPr>
+              <a:t>挺</a:t>
+            </a:r>
+            <a:endParaRPr lang="en-US" sz="2400" dirty="0"/>
+          </a:p>
+        </p:txBody>
+      </p:sp>
+      <p:sp>
+        <p:nvSpPr>
+          <p:cNvPr id="28" name="Text 21"/>
+          <p:cNvSpPr/>
+          <p:nvPr/>
+        </p:nvSpPr>
+        <p:spPr>
+          <a:xfrm>
+            <a:off x="5069681" y="3503563"/>
+            <a:ext cx="2052489" cy="1298377"/>
+          </a:xfrm>
+          <a:prstGeom prst="roundRect">
+            <a:avLst>
+              <a:gd name="adj" fmla="val 8803"/>
+            </a:avLst>
+          </a:prstGeom>
+          <a:solidFill>
+            <a:srgbClr val="E6EAEB"/>
+          </a:solidFill>
+          <a:ln w="9525">
+            <a:solidFill>
+              <a:srgbClr val="D5DBDD"/>
+            </a:solidFill>
+          </a:ln>
+        </p:spPr>
+        <p:txBody>
+          <a:bodyPr wrap="square" rtlCol="0" anchor="ctr"/>
+          <a:lstStyle/>
+          <a:p>
+            <a:pPr indent="0" marL="0">
+              <a:buNone/>
+            </a:pPr>
+            <a:endParaRPr lang="en-US" dirty="0"/>
+          </a:p>
+        </p:txBody>
+      </p:sp>
+      <p:pic>
+        <p:nvPicPr>
+          <p:cNvPr id="29" name="Image 5" descr="/var/folders/6c/210dcgxn4gz5sm71vld2cy1h0000gn/T/tmp.kuKuqUEQz8/img/shijian.png">    </p:cNvPr>
+          <p:cNvPicPr>
+            <a:picLocks noChangeAspect="1"/>
+          </p:cNvPicPr>
+          <p:nvPr/>
+        </p:nvPicPr>
+        <p:blipFill>
+          <a:blip r:embed="rId6"/>
+          <a:stretch>
+            <a:fillRect/>
+          </a:stretch>
+        </p:blipFill>
+        <p:spPr>
+          <a:xfrm>
+            <a:off x="5791051" y="3601938"/>
+            <a:ext cx="609600" cy="609600"/>
+          </a:xfrm>
+          <a:prstGeom prst="rect">
+            <a:avLst/>
+          </a:prstGeom>
+        </p:spPr>
+      </p:pic>
+      <p:sp>
+        <p:nvSpPr>
+          <p:cNvPr id="30" name="Text 22"/>
+          <p:cNvSpPr/>
+          <p:nvPr/>
+        </p:nvSpPr>
+        <p:spPr>
+          <a:xfrm>
+            <a:off x="5588050" y="4274939"/>
+            <a:ext cx="1036067" cy="352425"/>
+          </a:xfrm>
+          <a:prstGeom prst="rect">
+            <a:avLst/>
+          </a:prstGeom>
+          <a:noFill/>
+          <a:ln/>
+        </p:spPr>
+        <p:txBody>
+          <a:bodyPr wrap="square" lIns="0" tIns="0" rIns="0" bIns="0" rtlCol="0" anchor="t"/>
+          <a:lstStyle/>
+          <a:p>
+            <a:pPr algn="l" indent="0" marL="0">
+              <a:buNone/>
+            </a:pPr>
+            <a:r>
+              <a:rPr lang="en-US" sz="2000" b="1" dirty="0">
+                <a:solidFill>
+                  <a:srgbClr val="262B30"/>
+                </a:solidFill>
+                <a:latin typeface="Noto Serif SC" pitchFamily="34" charset="0"/>
+                <a:ea typeface="Noto Serif SC" pitchFamily="34" charset="-122"/>
+                <a:cs typeface="Noto Serif SC" pitchFamily="34" charset="-120"/>
+              </a:rPr>
+              <a:t>多长时间</a:t>
+            </a:r>
+            <a:endParaRPr lang="en-US" sz="2000" dirty="0"/>
+          </a:p>
+        </p:txBody>
+      </p:sp>
+      <p:sp>
+        <p:nvSpPr>
+          <p:cNvPr id="31" name="Text 23"/>
+          <p:cNvSpPr/>
+          <p:nvPr/>
+        </p:nvSpPr>
+        <p:spPr>
+          <a:xfrm>
+            <a:off x="609600" y="4928890"/>
+            <a:ext cx="11192256" cy="228600"/>
+          </a:xfrm>
+          <a:prstGeom prst="rect">
+            <a:avLst/>
+          </a:prstGeom>
+          <a:noFill/>
+          <a:ln/>
+        </p:spPr>
+        <p:txBody>
+          <a:bodyPr wrap="square" lIns="0" tIns="0" rIns="0" bIns="0" rtlCol="0" anchor="t"/>
+          <a:lstStyle/>
+          <a:p>
+            <a:pPr algn="l" indent="0" marL="0">
+              <a:lnSpc>
+                <a:spcPts val="1800"/>
+              </a:lnSpc>
+              <a:spcBef>
+                <a:spcPts val="1000"/>
+              </a:spcBef>
+              <a:buNone/>
+            </a:pPr>
+            <a:r>
+              <a:rPr lang="en-US" sz="1200" dirty="0">
+                <a:solidFill>
+                  <a:srgbClr val="6E7780"/>
+                </a:solidFill>
+                <a:latin typeface="Noto Sans" pitchFamily="34" charset="0"/>
+                <a:ea typeface="Noto Sans" pitchFamily="34" charset="-122"/>
+                <a:cs typeface="Noto Sans" pitchFamily="34" charset="-120"/>
+              </a:rPr>
+              <a:t>小白板：这八样，哪一样你还是 😐？写下来举起来。举得最多的那一个，就是复习要从哪儿开始。</a:t>
+            </a:r>
+            <a:endParaRPr lang="en-US" sz="1200" dirty="0"/>
+          </a:p>
+        </p:txBody>
+      </p:sp>
+    </p:spTree>
+  </p:cSld>
+  <p:clrMapOvr>
+    <a:masterClrMapping/>
+  </p:clrMapOvr>
+</p:sld>
+</file>
+
+<file path=ppt/slides/slide28.xml><?xml version="1.0" encoding="utf-8"?>
+<p:sld xmlns:a="http://schemas.openxmlformats.org/drawingml/2006/main" xmlns:r="http://schemas.openxmlformats.org/officeDocument/2006/relationships" xmlns:p="http://schemas.openxmlformats.org/presentationml/2006/main">
+  <p:cSld name="Slide 28">
+    <p:bg>
+      <p:bgPr>
+        <a:solidFill>
+          <a:srgbClr val="F2F4F4"/>
+        </a:solidFill>
+      </p:bgPr>
+    </p:bg>
+    <p:spTree>
+      <p:nvGrpSpPr>
+        <p:cNvPr id="1" name=""/>
+        <p:cNvGrpSpPr/>
+        <p:nvPr/>
+      </p:nvGrpSpPr>
+      <p:grpSpPr>
+        <a:xfrm>
+          <a:off x="0" y="0"/>
+          <a:ext cx="0" cy="0"/>
+          <a:chOff x="0" y="0"/>
+          <a:chExt cx="0" cy="0"/>
+        </a:xfrm>
+      </p:grpSpPr>
+      <p:sp>
+        <p:nvSpPr>
+          <p:cNvPr id="2" name="Text 0"/>
+          <p:cNvSpPr/>
+          <p:nvPr/>
+        </p:nvSpPr>
+        <p:spPr>
+          <a:xfrm>
+            <a:off x="0" y="0"/>
+            <a:ext cx="12192000" cy="542925"/>
+          </a:xfrm>
+          <a:prstGeom prst="rect">
+            <a:avLst/>
+          </a:prstGeom>
+          <a:solidFill>
+            <a:srgbClr val="F2F4F4"/>
+          </a:solidFill>
+          <a:ln/>
+        </p:spPr>
+        <p:txBody>
+          <a:bodyPr wrap="square" rtlCol="0" anchor="ctr"/>
+          <a:lstStyle/>
+          <a:p>
+            <a:pPr indent="0" marL="0">
+              <a:buNone/>
+            </a:pPr>
+            <a:endParaRPr lang="en-US" dirty="0"/>
+          </a:p>
+        </p:txBody>
+      </p:sp>
+      <p:sp>
+        <p:nvSpPr>
+          <p:cNvPr id="3" name="Shape 1"/>
+          <p:cNvSpPr/>
+          <p:nvPr/>
+        </p:nvSpPr>
+        <p:spPr>
+          <a:xfrm>
+            <a:off x="0" y="538163"/>
+            <a:ext cx="12192000" cy="0"/>
+          </a:xfrm>
+          <a:prstGeom prst="line">
+            <a:avLst/>
+          </a:prstGeom>
+          <a:noFill/>
+          <a:ln w="9525">
+            <a:solidFill>
+              <a:srgbClr val="D5DBDD"/>
+            </a:solidFill>
+            <a:prstDash val="solid"/>
+          </a:ln>
+        </p:spPr>
+      </p:sp>
+      <p:sp>
+        <p:nvSpPr>
+          <p:cNvPr id="4" name="Text 2"/>
+          <p:cNvSpPr/>
+          <p:nvPr/>
+        </p:nvSpPr>
+        <p:spPr>
+          <a:xfrm>
+            <a:off x="507950" y="176213"/>
             <a:ext cx="1785830" cy="180975"/>
           </a:xfrm>
           <a:prstGeom prst="rect">
@@ -16009,8 +19615,8 @@
         </p:nvSpPr>
         <p:spPr>
           <a:xfrm>
-            <a:off x="11183392" y="176213"/>
-            <a:ext cx="510671" cy="180975"/>
+            <a:off x="11182648" y="176213"/>
+            <a:ext cx="511430" cy="180975"/>
           </a:xfrm>
           <a:prstGeom prst="rect">
             <a:avLst/>
@@ -16034,7 +19640,7 @@
                 <a:ea typeface="Noto Sans" pitchFamily="34" charset="-122"/>
                 <a:cs typeface="Noto Sans" pitchFamily="34" charset="-120"/>
               </a:rPr>
-              <a:t>25 / 25</a:t>
+              <a:t>28 / 28</a:t>
             </a:r>
             <a:endParaRPr lang="en-US" sz="1000" dirty="0"/>
           </a:p>
@@ -16675,8 +20281,8 @@
         </p:nvSpPr>
         <p:spPr>
           <a:xfrm>
-            <a:off x="11266736" y="176213"/>
-            <a:ext cx="425660" cy="180975"/>
+            <a:off x="11266438" y="176213"/>
+            <a:ext cx="425964" cy="180975"/>
           </a:xfrm>
           <a:prstGeom prst="rect">
             <a:avLst/>
@@ -16700,7 +20306,7 @@
                 <a:ea typeface="Noto Sans" pitchFamily="34" charset="-122"/>
                 <a:cs typeface="Noto Sans" pitchFamily="34" charset="-120"/>
               </a:rPr>
-              <a:t>3 / 25</a:t>
+              <a:t>3 / 28</a:t>
             </a:r>
             <a:endParaRPr lang="en-US" sz="1000" dirty="0"/>
           </a:p>
@@ -17136,8 +20742,8 @@
         </p:nvSpPr>
         <p:spPr>
           <a:xfrm>
-            <a:off x="11266140" y="176213"/>
-            <a:ext cx="426268" cy="180975"/>
+            <a:off x="11265694" y="176213"/>
+            <a:ext cx="426723" cy="180975"/>
           </a:xfrm>
           <a:prstGeom prst="rect">
             <a:avLst/>
@@ -17161,7 +20767,7 @@
                 <a:ea typeface="Noto Sans" pitchFamily="34" charset="-122"/>
                 <a:cs typeface="Noto Sans" pitchFamily="34" charset="-120"/>
               </a:rPr>
-              <a:t>4 / 25</a:t>
+              <a:t>4 / 28</a:t>
             </a:r>
             <a:endParaRPr lang="en-US" sz="1000" dirty="0"/>
           </a:p>
@@ -18013,8 +21619,8 @@
         </p:nvSpPr>
         <p:spPr>
           <a:xfrm>
-            <a:off x="11266438" y="176213"/>
-            <a:ext cx="425964" cy="180975"/>
+            <a:off x="11265991" y="176213"/>
+            <a:ext cx="426419" cy="180975"/>
           </a:xfrm>
           <a:prstGeom prst="rect">
             <a:avLst/>
@@ -18038,7 +21644,7 @@
                 <a:ea typeface="Noto Sans" pitchFamily="34" charset="-122"/>
                 <a:cs typeface="Noto Sans" pitchFamily="34" charset="-120"/>
               </a:rPr>
-              <a:t>5 / 25</a:t>
+              <a:t>5 / 28</a:t>
             </a:r>
             <a:endParaRPr lang="en-US" sz="1000" dirty="0"/>
           </a:p>
@@ -18151,7 +21757,7 @@
       </p:sp>
       <p:pic>
         <p:nvPicPr>
-          <p:cNvPr id="10" name="Image 0" descr="/var/folders/6c/210dcgxn4gz5sm71vld2cy1h0000gn/T/tmp.LHO6BoqOp1/img/shuiguodian.png">    </p:cNvPr>
+          <p:cNvPr id="10" name="Image 0" descr="/var/folders/6c/210dcgxn4gz5sm71vld2cy1h0000gn/T/tmp.kuKuqUEQz8/img/shuiguodian.png">    </p:cNvPr>
           <p:cNvPicPr>
             <a:picLocks noChangeAspect="1"/>
           </p:cNvPicPr>
@@ -18331,7 +21937,7 @@
       </p:sp>
       <p:pic>
         <p:nvPicPr>
-          <p:cNvPr id="15" name="Image 1" descr="/var/folders/6c/210dcgxn4gz5sm71vld2cy1h0000gn/T/tmp.LHO6BoqOp1/img/shudian.png">    </p:cNvPr>
+          <p:cNvPr id="15" name="Image 1" descr="/var/folders/6c/210dcgxn4gz5sm71vld2cy1h0000gn/T/tmp.kuKuqUEQz8/img/shudian.png">    </p:cNvPr>
           <p:cNvPicPr>
             <a:picLocks noChangeAspect="1"/>
           </p:cNvPicPr>
@@ -18644,8 +22250,8 @@
         </p:nvSpPr>
         <p:spPr>
           <a:xfrm>
-            <a:off x="11265545" y="176213"/>
-            <a:ext cx="426875" cy="180975"/>
+            <a:off x="11265247" y="176213"/>
+            <a:ext cx="427178" cy="180975"/>
           </a:xfrm>
           <a:prstGeom prst="rect">
             <a:avLst/>
@@ -18669,7 +22275,7 @@
                 <a:ea typeface="Noto Sans" pitchFamily="34" charset="-122"/>
                 <a:cs typeface="Noto Sans" pitchFamily="34" charset="-120"/>
               </a:rPr>
-              <a:t>6 / 25</a:t>
+              <a:t>6 / 28</a:t>
             </a:r>
             <a:endParaRPr lang="en-US" sz="1000" dirty="0"/>
           </a:p>
@@ -19439,8 +23045,8 @@
         </p:nvSpPr>
         <p:spPr>
           <a:xfrm>
-            <a:off x="11272093" y="176213"/>
-            <a:ext cx="420195" cy="180975"/>
+            <a:off x="11271647" y="176213"/>
+            <a:ext cx="420651" cy="180975"/>
           </a:xfrm>
           <a:prstGeom prst="rect">
             <a:avLst/>
@@ -19464,7 +23070,7 @@
                 <a:ea typeface="Noto Sans" pitchFamily="34" charset="-122"/>
                 <a:cs typeface="Noto Sans" pitchFamily="34" charset="-120"/>
               </a:rPr>
-              <a:t>7 / 25</a:t>
+              <a:t>7 / 28</a:t>
             </a:r>
             <a:endParaRPr lang="en-US" sz="1000" dirty="0"/>
           </a:p>
@@ -19921,8 +23527,8 @@
         </p:nvSpPr>
         <p:spPr>
           <a:xfrm>
-            <a:off x="11265991" y="176213"/>
-            <a:ext cx="426419" cy="180975"/>
+            <a:off x="11265545" y="176213"/>
+            <a:ext cx="426875" cy="180975"/>
           </a:xfrm>
           <a:prstGeom prst="rect">
             <a:avLst/>
@@ -19946,7 +23552,7 @@
                 <a:ea typeface="Noto Sans" pitchFamily="34" charset="-122"/>
                 <a:cs typeface="Noto Sans" pitchFamily="34" charset="-120"/>
               </a:rPr>
-              <a:t>8 / 25</a:t>
+              <a:t>8 / 28</a:t>
             </a:r>
             <a:endParaRPr lang="en-US" sz="1000" dirty="0"/>
           </a:p>
@@ -20059,7 +23665,7 @@
       </p:sp>
       <p:pic>
         <p:nvPicPr>
-          <p:cNvPr id="10" name="Image 0" descr="/var/folders/6c/210dcgxn4gz5sm71vld2cy1h0000gn/T/tmp.LHO6BoqOp1/img/lifadian.png">    </p:cNvPr>
+          <p:cNvPr id="10" name="Image 0" descr="/var/folders/6c/210dcgxn4gz5sm71vld2cy1h0000gn/T/tmp.kuKuqUEQz8/img/lifadian.png">    </p:cNvPr>
           <p:cNvPicPr>
             <a:picLocks noChangeAspect="1"/>
           </p:cNvPicPr>
@@ -20239,7 +23845,7 @@
       </p:sp>
       <p:pic>
         <p:nvPicPr>
-          <p:cNvPr id="15" name="Image 1" descr="/var/folders/6c/210dcgxn4gz5sm71vld2cy1h0000gn/T/tmp.LHO6BoqOp1/img/kuaicandian.png">    </p:cNvPr>
+          <p:cNvPr id="15" name="Image 1" descr="/var/folders/6c/210dcgxn4gz5sm71vld2cy1h0000gn/T/tmp.kuKuqUEQz8/img/kuaicandian.png">    </p:cNvPr>
           <p:cNvPicPr>
             <a:picLocks noChangeAspect="1"/>
           </p:cNvPicPr>
@@ -20552,8 +24158,8 @@
         </p:nvSpPr>
         <p:spPr>
           <a:xfrm>
-            <a:off x="11265545" y="176213"/>
-            <a:ext cx="426875" cy="180975"/>
+            <a:off x="11265098" y="176213"/>
+            <a:ext cx="427330" cy="180975"/>
           </a:xfrm>
           <a:prstGeom prst="rect">
             <a:avLst/>
@@ -20577,7 +24183,7 @@
                 <a:ea typeface="Noto Sans" pitchFamily="34" charset="-122"/>
                 <a:cs typeface="Noto Sans" pitchFamily="34" charset="-120"/>
               </a:rPr>
-              <a:t>9 / 25</a:t>
+              <a:t>9 / 28</a:t>
             </a:r>
             <a:endParaRPr lang="en-US" sz="1000" dirty="0"/>
           </a:p>
